--- a/python-course-ppt/逐节课件/Python讲授课件-单元18.pptx
+++ b/python-course-ppt/逐节课件/Python讲授课件-单元18.pptx
@@ -343,6 +343,92 @@
           </a:p>
         </p:txBody>
       </p:sp>
+      <p:sp>
+        <p:nvSpPr>
+          <p:cNvPr id="2" name="讲课提示"/>
+          <p:cNvSpPr txBox="1"/>
+          <p:nvPr/>
+        </p:nvSpPr>
+        <p:spPr>
+          <a:xfrm>
+            <a:off x="457200" y="457200"/>
+            <a:ext cx="6858000" cy="4800600"/>
+          </a:xfrm>
+          <a:prstGeom prst="rect">
+            <a:avLst/>
+          </a:prstGeom>
+        </p:spPr>
+        <p:txBody>
+          <a:bodyPr wrap="square"/>
+          <a:lstStyle/>
+          <a:p>
+            <a:r>
+              <a:rPr lang="zh-CN" dirty="0"/>
+              <a:t>单元 18 · 单元 18 · Django 入门</a:t>
+            </a:r>
+          </a:p>
+          <a:p>
+            <a:r>
+              <a:rPr lang="zh-CN" dirty="0"/>
+              <a:t/>
+            </a:r>
+          </a:p>
+          <a:p>
+            <a:r>
+              <a:rPr lang="zh-CN" dirty="0"/>
+              <a:t>本单元包含以下课节：</a:t>
+            </a:r>
+          </a:p>
+          <a:p>
+            <a:r>
+              <a:rPr lang="zh-CN" dirty="0"/>
+              <a:t>· 第 92 节 ★ 虚拟环境与 Django 项目</a:t>
+            </a:r>
+          </a:p>
+          <a:p>
+            <a:r>
+              <a:rPr lang="zh-CN" dirty="0"/>
+              <a:t>· 第 93 节 ★ 应用、模型与迁移三步曲</a:t>
+            </a:r>
+          </a:p>
+          <a:p>
+            <a:r>
+              <a:rPr lang="zh-CN" dirty="0"/>
+              <a:t>· 第 94 节 ★ 一次请求的旅程：URL → 视图 → 模板</a:t>
+            </a:r>
+          </a:p>
+          <a:p>
+            <a:r>
+              <a:rPr lang="zh-CN" dirty="0"/>
+              <a:t>· 第 95 节 模板语法与模板继承</a:t>
+            </a:r>
+          </a:p>
+          <a:p>
+            <a:r>
+              <a:rPr lang="zh-CN" dirty="0"/>
+              <a:t>· 第 96 节 Django shell 与 404</a:t>
+            </a:r>
+          </a:p>
+          <a:p>
+            <a:r>
+              <a:rPr lang="zh-CN" dirty="0"/>
+              <a:t>· 第 97 节 实战、答案与验收复盘</a:t>
+            </a:r>
+          </a:p>
+          <a:p>
+            <a:r>
+              <a:rPr lang="zh-CN" dirty="0"/>
+              <a:t/>
+            </a:r>
+          </a:p>
+          <a:p>
+            <a:r>
+              <a:rPr lang="zh-CN" dirty="0"/>
+              <a:t>开场用 3 分钟讲清：这个单元学完能做出什么，最后会被关卡怎么验。</a:t>
+            </a:r>
+          </a:p>
+        </p:txBody>
+      </p:sp>
     </p:spTree>
   </p:cSld>
   <p:clrMapOvr>
@@ -466,6 +552,104 @@
           </a:p>
         </p:txBody>
       </p:sp>
+      <p:sp>
+        <p:nvSpPr>
+          <p:cNvPr id="2" name="讲课提示"/>
+          <p:cNvSpPr txBox="1"/>
+          <p:nvPr/>
+        </p:nvSpPr>
+        <p:spPr>
+          <a:xfrm>
+            <a:off x="457200" y="457200"/>
+            <a:ext cx="6858000" cy="4800600"/>
+          </a:xfrm>
+          <a:prstGeom prst="rect">
+            <a:avLst/>
+          </a:prstGeom>
+        </p:spPr>
+        <p:txBody>
+          <a:bodyPr wrap="square"/>
+          <a:lstStyle/>
+          <a:p>
+            <a:r>
+              <a:rPr lang="zh-CN" dirty="0"/>
+              <a:t>第 96 节 · Django shell 与 404</a:t>
+            </a:r>
+          </a:p>
+          <a:p>
+            <a:r>
+              <a:rPr lang="zh-CN" dirty="0"/>
+              <a:t>单元 18 · Django 入门 · W24</a:t>
+            </a:r>
+          </a:p>
+          <a:p>
+            <a:r>
+              <a:rPr lang="zh-CN" dirty="0"/>
+              <a:t/>
+            </a:r>
+          </a:p>
+          <a:p>
+            <a:r>
+              <a:rPr lang="zh-CN" dirty="0"/>
+              <a:t>学习目标：会用 shell 直接查数据库；理解 get_object_or_404 的意义</a:t>
+            </a:r>
+          </a:p>
+          <a:p>
+            <a:r>
+              <a:rPr lang="zh-CN" dirty="0"/>
+              <a:t/>
+            </a:r>
+          </a:p>
+          <a:p>
+            <a:r>
+              <a:rPr lang="zh-CN" dirty="0"/>
+              <a:t>课堂实操（40 分钟，不看答案）：</a:t>
+            </a:r>
+          </a:p>
+          <a:p>
+            <a:r>
+              <a:rPr lang="zh-CN" dirty="0"/>
+              <a:t>· 用 shell 造三条 Entry</a:t>
+            </a:r>
+          </a:p>
+          <a:p>
+            <a:r>
+              <a:rPr lang="zh-CN" dirty="0"/>
+              <a:t>· 访问一个不存在的 topic_id，看 404 页面</a:t>
+            </a:r>
+          </a:p>
+          <a:p>
+            <a:r>
+              <a:rPr lang="zh-CN" dirty="0"/>
+              <a:t/>
+            </a:r>
+          </a:p>
+          <a:p>
+            <a:r>
+              <a:rPr lang="zh-CN" dirty="0"/>
+              <a:t>课后作业：</a:t>
+            </a:r>
+          </a:p>
+          <a:p>
+            <a:r>
+              <a:rPr lang="zh-CN" dirty="0"/>
+              <a:t>· 产出：能浏览主题与条目的本地网站</a:t>
+            </a:r>
+          </a:p>
+          <a:p>
+            <a:r>
+              <a:rPr lang="zh-CN" dirty="0"/>
+              <a:t/>
+            </a:r>
+          </a:p>
+          <a:p>
+            <a:r>
+              <a:rPr lang="zh-CN" dirty="0"/>
+              <a:t>节奏：讲 20 分钟 → 学员自己敲 40 分钟（不看答案）→ 对讲评自查 20 分钟 → 写作业 10 分钟。</a:t>
+            </a:r>
+          </a:p>
+        </p:txBody>
+      </p:sp>
     </p:spTree>
   </p:cSld>
   <p:clrMapOvr>
@@ -559,6 +743,74 @@
           </a:p>
         </p:txBody>
       </p:sp>
+      <p:sp>
+        <p:nvSpPr>
+          <p:cNvPr id="2" name="讲课提示"/>
+          <p:cNvSpPr txBox="1"/>
+          <p:nvPr/>
+        </p:nvSpPr>
+        <p:spPr>
+          <a:xfrm>
+            <a:off x="457200" y="457200"/>
+            <a:ext cx="6858000" cy="4800600"/>
+          </a:xfrm>
+          <a:prstGeom prst="rect">
+            <a:avLst/>
+          </a:prstGeom>
+        </p:spPr>
+        <p:txBody>
+          <a:bodyPr wrap="square"/>
+          <a:lstStyle/>
+          <a:p>
+            <a:r>
+              <a:rPr lang="zh-CN" dirty="0"/>
+              <a:t>第 96 节 · 核心知识点：Django shell 与 404</a:t>
+            </a:r>
+          </a:p>
+          <a:p>
+            <a:r>
+              <a:rPr lang="zh-CN" dirty="0"/>
+              <a:t/>
+            </a:r>
+          </a:p>
+          <a:p>
+            <a:r>
+              <a:rPr lang="zh-CN" dirty="0"/>
+              <a:t>讲这一页时：先让学生说出上节课的结论，再逐块讲要点。</a:t>
+            </a:r>
+          </a:p>
+          <a:p>
+            <a:r>
+              <a:rPr lang="zh-CN" dirty="0"/>
+              <a:t>每讲完一块，问一句「这一步如果写错了，报错会长什么样？」——把错误提前讲。</a:t>
+            </a:r>
+          </a:p>
+          <a:p>
+            <a:r>
+              <a:rPr lang="zh-CN" dirty="0"/>
+              <a:t/>
+            </a:r>
+          </a:p>
+          <a:p>
+            <a:r>
+              <a:rPr lang="zh-CN" dirty="0"/>
+              <a:t>本节目标：会用 shell 直接查数据库；理解 get_object_or_404 的意义</a:t>
+            </a:r>
+          </a:p>
+          <a:p>
+            <a:r>
+              <a:rPr lang="zh-CN" dirty="0"/>
+              <a:t/>
+            </a:r>
+          </a:p>
+          <a:p>
+            <a:r>
+              <a:rPr lang="zh-CN" dirty="0"/>
+              <a:t>看不到懂的地方，回讲义对应小节读一遍，再回来对着这页复述一次——能讲出来才算真懂。</a:t>
+            </a:r>
+          </a:p>
+        </p:txBody>
+      </p:sp>
     </p:spTree>
   </p:cSld>
   <p:clrMapOvr>
@@ -682,6 +934,104 @@
           </a:p>
         </p:txBody>
       </p:sp>
+      <p:sp>
+        <p:nvSpPr>
+          <p:cNvPr id="2" name="讲课提示"/>
+          <p:cNvSpPr txBox="1"/>
+          <p:nvPr/>
+        </p:nvSpPr>
+        <p:spPr>
+          <a:xfrm>
+            <a:off x="457200" y="457200"/>
+            <a:ext cx="6858000" cy="4800600"/>
+          </a:xfrm>
+          <a:prstGeom prst="rect">
+            <a:avLst/>
+          </a:prstGeom>
+        </p:spPr>
+        <p:txBody>
+          <a:bodyPr wrap="square"/>
+          <a:lstStyle/>
+          <a:p>
+            <a:r>
+              <a:rPr lang="zh-CN" dirty="0"/>
+              <a:t>第 97 节 · 实战、答案与验收复盘</a:t>
+            </a:r>
+          </a:p>
+          <a:p>
+            <a:r>
+              <a:rPr lang="zh-CN" dirty="0"/>
+              <a:t>单元 18 · Django 入门 · W24</a:t>
+            </a:r>
+          </a:p>
+          <a:p>
+            <a:r>
+              <a:rPr lang="zh-CN" dirty="0"/>
+              <a:t/>
+            </a:r>
+          </a:p>
+          <a:p>
+            <a:r>
+              <a:rPr lang="zh-CN" dirty="0"/>
+              <a:t>学习目标：独立完成单元 18 练习，画得出项目结构图</a:t>
+            </a:r>
+          </a:p>
+          <a:p>
+            <a:r>
+              <a:rPr lang="zh-CN" dirty="0"/>
+              <a:t/>
+            </a:r>
+          </a:p>
+          <a:p>
+            <a:r>
+              <a:rPr lang="zh-CN" dirty="0"/>
+              <a:t>课堂实操（40 分钟，不看答案）：</a:t>
+            </a:r>
+          </a:p>
+          <a:p>
+            <a:r>
+              <a:rPr lang="zh-CN" dirty="0"/>
+              <a:t>· 限时 40 分钟独立完成基础档</a:t>
+            </a:r>
+          </a:p>
+          <a:p>
+            <a:r>
+              <a:rPr lang="zh-CN" dirty="0"/>
+              <a:t>· 互相检查对方的 settings.py 配置</a:t>
+            </a:r>
+          </a:p>
+          <a:p>
+            <a:r>
+              <a:rPr lang="zh-CN" dirty="0"/>
+              <a:t/>
+            </a:r>
+          </a:p>
+          <a:p>
+            <a:r>
+              <a:rPr lang="zh-CN" dirty="0"/>
+              <a:t>课后作业：</a:t>
+            </a:r>
+          </a:p>
+          <a:p>
+            <a:r>
+              <a:rPr lang="zh-CN" dirty="0"/>
+              <a:t>· ★ 产出：学习笔记本地网站</a:t>
+            </a:r>
+          </a:p>
+          <a:p>
+            <a:r>
+              <a:rPr lang="zh-CN" dirty="0"/>
+              <a:t/>
+            </a:r>
+          </a:p>
+          <a:p>
+            <a:r>
+              <a:rPr lang="zh-CN" dirty="0"/>
+              <a:t>节奏：讲 20 分钟 → 学员自己敲 40 分钟（不看答案）→ 对讲评自查 20 分钟 → 写作业 10 分钟。</a:t>
+            </a:r>
+          </a:p>
+        </p:txBody>
+      </p:sp>
     </p:spTree>
   </p:cSld>
   <p:clrMapOvr>
@@ -775,6 +1125,74 @@
           </a:p>
         </p:txBody>
       </p:sp>
+      <p:sp>
+        <p:nvSpPr>
+          <p:cNvPr id="2" name="讲课提示"/>
+          <p:cNvSpPr txBox="1"/>
+          <p:nvPr/>
+        </p:nvSpPr>
+        <p:spPr>
+          <a:xfrm>
+            <a:off x="457200" y="457200"/>
+            <a:ext cx="6858000" cy="4800600"/>
+          </a:xfrm>
+          <a:prstGeom prst="rect">
+            <a:avLst/>
+          </a:prstGeom>
+        </p:spPr>
+        <p:txBody>
+          <a:bodyPr wrap="square"/>
+          <a:lstStyle/>
+          <a:p>
+            <a:r>
+              <a:rPr lang="zh-CN" dirty="0"/>
+              <a:t>第 97 节 · 核心知识点：实战、答案与验收复盘</a:t>
+            </a:r>
+          </a:p>
+          <a:p>
+            <a:r>
+              <a:rPr lang="zh-CN" dirty="0"/>
+              <a:t/>
+            </a:r>
+          </a:p>
+          <a:p>
+            <a:r>
+              <a:rPr lang="zh-CN" dirty="0"/>
+              <a:t>讲这一页时：先让学生说出上节课的结论，再逐块讲要点。</a:t>
+            </a:r>
+          </a:p>
+          <a:p>
+            <a:r>
+              <a:rPr lang="zh-CN" dirty="0"/>
+              <a:t>每讲完一块，问一句「这一步如果写错了，报错会长什么样？」——把错误提前讲。</a:t>
+            </a:r>
+          </a:p>
+          <a:p>
+            <a:r>
+              <a:rPr lang="zh-CN" dirty="0"/>
+              <a:t/>
+            </a:r>
+          </a:p>
+          <a:p>
+            <a:r>
+              <a:rPr lang="zh-CN" dirty="0"/>
+              <a:t>本节目标：独立完成单元 18 练习，画得出项目结构图</a:t>
+            </a:r>
+          </a:p>
+          <a:p>
+            <a:r>
+              <a:rPr lang="zh-CN" dirty="0"/>
+              <a:t/>
+            </a:r>
+          </a:p>
+          <a:p>
+            <a:r>
+              <a:rPr lang="zh-CN" dirty="0"/>
+              <a:t>看不到懂的地方，回讲义对应小节读一遍，再回来对着这页复述一次——能讲出来才算真懂。</a:t>
+            </a:r>
+          </a:p>
+        </p:txBody>
+      </p:sp>
     </p:spTree>
   </p:cSld>
   <p:clrMapOvr>
@@ -844,6 +1262,50 @@
           </a:p>
         </p:txBody>
       </p:sp>
+      <p:sp>
+        <p:nvSpPr>
+          <p:cNvPr id="2" name="讲课提示"/>
+          <p:cNvSpPr txBox="1"/>
+          <p:nvPr/>
+        </p:nvSpPr>
+        <p:spPr>
+          <a:xfrm>
+            <a:off x="457200" y="457200"/>
+            <a:ext cx="6858000" cy="4800600"/>
+          </a:xfrm>
+          <a:prstGeom prst="rect">
+            <a:avLst/>
+          </a:prstGeom>
+        </p:spPr>
+        <p:txBody>
+          <a:bodyPr wrap="square"/>
+          <a:lstStyle/>
+          <a:p>
+            <a:r>
+              <a:rPr lang="zh-CN" dirty="0"/>
+              <a:t>单元 18 小结 · 单元 18 · 小结</a:t>
+            </a:r>
+          </a:p>
+          <a:p>
+            <a:r>
+              <a:rPr lang="zh-CN" dirty="0"/>
+              <a:t/>
+            </a:r>
+          </a:p>
+          <a:p>
+            <a:r>
+              <a:rPr lang="zh-CN" dirty="0"/>
+              <a:t>收尾动作：让学生合上讲义，口述本单元三个最重要的结论；说不出来的，回对应课节。</a:t>
+            </a:r>
+          </a:p>
+          <a:p>
+            <a:r>
+              <a:rPr lang="zh-CN" dirty="0"/>
+              <a:t>然后当场勾一遍本单元课节的「已完成」，没打勾的进下一单元前补掉。</a:t>
+            </a:r>
+          </a:p>
+        </p:txBody>
+      </p:sp>
     </p:spTree>
   </p:cSld>
   <p:clrMapOvr>
@@ -967,6 +1429,104 @@
           </a:p>
         </p:txBody>
       </p:sp>
+      <p:sp>
+        <p:nvSpPr>
+          <p:cNvPr id="2" name="讲课提示"/>
+          <p:cNvSpPr txBox="1"/>
+          <p:nvPr/>
+        </p:nvSpPr>
+        <p:spPr>
+          <a:xfrm>
+            <a:off x="457200" y="457200"/>
+            <a:ext cx="6858000" cy="4800600"/>
+          </a:xfrm>
+          <a:prstGeom prst="rect">
+            <a:avLst/>
+          </a:prstGeom>
+        </p:spPr>
+        <p:txBody>
+          <a:bodyPr wrap="square"/>
+          <a:lstStyle/>
+          <a:p>
+            <a:r>
+              <a:rPr lang="zh-CN" dirty="0"/>
+              <a:t>第 92 节 · ★ 虚拟环境与 Django 项目</a:t>
+            </a:r>
+          </a:p>
+          <a:p>
+            <a:r>
+              <a:rPr lang="zh-CN" dirty="0"/>
+              <a:t>单元 18 · Django 入门 · W22–W23</a:t>
+            </a:r>
+          </a:p>
+          <a:p>
+            <a:r>
+              <a:rPr lang="zh-CN" dirty="0"/>
+              <a:t/>
+            </a:r>
+          </a:p>
+          <a:p>
+            <a:r>
+              <a:rPr lang="zh-CN" dirty="0"/>
+              <a:t>学习目标：说清为什么必须用虚拟环境；能建项目、跑起来、看清目录结构</a:t>
+            </a:r>
+          </a:p>
+          <a:p>
+            <a:r>
+              <a:rPr lang="zh-CN" dirty="0"/>
+              <a:t/>
+            </a:r>
+          </a:p>
+          <a:p>
+            <a:r>
+              <a:rPr lang="zh-CN" dirty="0"/>
+              <a:t>课堂实操（40 分钟，不看答案）：</a:t>
+            </a:r>
+          </a:p>
+          <a:p>
+            <a:r>
+              <a:rPr lang="zh-CN" dirty="0"/>
+              <a:t>· 建 ll_env 并激活，确认命令行出现 (ll_env)</a:t>
+            </a:r>
+          </a:p>
+          <a:p>
+            <a:r>
+              <a:rPr lang="zh-CN" dirty="0"/>
+              <a:t>· 跑 startserver 打开首页</a:t>
+            </a:r>
+          </a:p>
+          <a:p>
+            <a:r>
+              <a:rPr lang="zh-CN" dirty="0"/>
+              <a:t/>
+            </a:r>
+          </a:p>
+          <a:p>
+            <a:r>
+              <a:rPr lang="zh-CN" dirty="0"/>
+              <a:t>课后作业：</a:t>
+            </a:r>
+          </a:p>
+          <a:p>
+            <a:r>
+              <a:rPr lang="zh-CN" dirty="0"/>
+              <a:t>· 产出：能跑起来的空 Django 项目</a:t>
+            </a:r>
+          </a:p>
+          <a:p>
+            <a:r>
+              <a:rPr lang="zh-CN" dirty="0"/>
+              <a:t/>
+            </a:r>
+          </a:p>
+          <a:p>
+            <a:r>
+              <a:rPr lang="zh-CN" dirty="0"/>
+              <a:t>节奏：讲 20 分钟 → 学员自己敲 40 分钟（不看答案）→ 对讲评自查 20 分钟 → 写作业 10 分钟。</a:t>
+            </a:r>
+          </a:p>
+        </p:txBody>
+      </p:sp>
     </p:spTree>
   </p:cSld>
   <p:clrMapOvr>
@@ -1060,6 +1620,74 @@
           </a:p>
         </p:txBody>
       </p:sp>
+      <p:sp>
+        <p:nvSpPr>
+          <p:cNvPr id="2" name="讲课提示"/>
+          <p:cNvSpPr txBox="1"/>
+          <p:nvPr/>
+        </p:nvSpPr>
+        <p:spPr>
+          <a:xfrm>
+            <a:off x="457200" y="457200"/>
+            <a:ext cx="6858000" cy="4800600"/>
+          </a:xfrm>
+          <a:prstGeom prst="rect">
+            <a:avLst/>
+          </a:prstGeom>
+        </p:spPr>
+        <p:txBody>
+          <a:bodyPr wrap="square"/>
+          <a:lstStyle/>
+          <a:p>
+            <a:r>
+              <a:rPr lang="zh-CN" dirty="0"/>
+              <a:t>第 92 节 · 核心知识点：★ 虚拟环境与 Django 项目</a:t>
+            </a:r>
+          </a:p>
+          <a:p>
+            <a:r>
+              <a:rPr lang="zh-CN" dirty="0"/>
+              <a:t/>
+            </a:r>
+          </a:p>
+          <a:p>
+            <a:r>
+              <a:rPr lang="zh-CN" dirty="0"/>
+              <a:t>讲这一页时：先让学生说出上节课的结论，再逐块讲要点。</a:t>
+            </a:r>
+          </a:p>
+          <a:p>
+            <a:r>
+              <a:rPr lang="zh-CN" dirty="0"/>
+              <a:t>每讲完一块，问一句「这一步如果写错了，报错会长什么样？」——把错误提前讲。</a:t>
+            </a:r>
+          </a:p>
+          <a:p>
+            <a:r>
+              <a:rPr lang="zh-CN" dirty="0"/>
+              <a:t/>
+            </a:r>
+          </a:p>
+          <a:p>
+            <a:r>
+              <a:rPr lang="zh-CN" dirty="0"/>
+              <a:t>本节目标：说清为什么必须用虚拟环境；能建项目、跑起来、看清目录结构</a:t>
+            </a:r>
+          </a:p>
+          <a:p>
+            <a:r>
+              <a:rPr lang="zh-CN" dirty="0"/>
+              <a:t/>
+            </a:r>
+          </a:p>
+          <a:p>
+            <a:r>
+              <a:rPr lang="zh-CN" dirty="0"/>
+              <a:t>看不到懂的地方，回讲义对应小节读一遍，再回来对着这页复述一次——能讲出来才算真懂。</a:t>
+            </a:r>
+          </a:p>
+        </p:txBody>
+      </p:sp>
     </p:spTree>
   </p:cSld>
   <p:clrMapOvr>
@@ -1183,6 +1811,104 @@
           </a:p>
         </p:txBody>
       </p:sp>
+      <p:sp>
+        <p:nvSpPr>
+          <p:cNvPr id="2" name="讲课提示"/>
+          <p:cNvSpPr txBox="1"/>
+          <p:nvPr/>
+        </p:nvSpPr>
+        <p:spPr>
+          <a:xfrm>
+            <a:off x="457200" y="457200"/>
+            <a:ext cx="6858000" cy="4800600"/>
+          </a:xfrm>
+          <a:prstGeom prst="rect">
+            <a:avLst/>
+          </a:prstGeom>
+        </p:spPr>
+        <p:txBody>
+          <a:bodyPr wrap="square"/>
+          <a:lstStyle/>
+          <a:p>
+            <a:r>
+              <a:rPr lang="zh-CN" dirty="0"/>
+              <a:t>第 93 节 · ★ 应用、模型与迁移三步曲</a:t>
+            </a:r>
+          </a:p>
+          <a:p>
+            <a:r>
+              <a:rPr lang="zh-CN" dirty="0"/>
+              <a:t>单元 18 · Django 入门 · W23</a:t>
+            </a:r>
+          </a:p>
+          <a:p>
+            <a:r>
+              <a:rPr lang="zh-CN" dirty="0"/>
+              <a:t/>
+            </a:r>
+          </a:p>
+          <a:p>
+            <a:r>
+              <a:rPr lang="zh-CN" dirty="0"/>
+              <a:t>学习目标：定义 Topic / Entry 模型；掌握「改模型 → makemigrations → migrate」三步</a:t>
+            </a:r>
+          </a:p>
+          <a:p>
+            <a:r>
+              <a:rPr lang="zh-CN" dirty="0"/>
+              <a:t/>
+            </a:r>
+          </a:p>
+          <a:p>
+            <a:r>
+              <a:rPr lang="zh-CN" dirty="0"/>
+              <a:t>课堂实操（40 分钟，不看答案）：</a:t>
+            </a:r>
+          </a:p>
+          <a:p>
+            <a:r>
+              <a:rPr lang="zh-CN" dirty="0"/>
+              <a:t>· 改一次模型跑一遍三步曲</a:t>
+            </a:r>
+          </a:p>
+          <a:p>
+            <a:r>
+              <a:rPr lang="zh-CN" dirty="0"/>
+              <a:t>· 故意改错 on_delete 看报错</a:t>
+            </a:r>
+          </a:p>
+          <a:p>
+            <a:r>
+              <a:rPr lang="zh-CN" dirty="0"/>
+              <a:t/>
+            </a:r>
+          </a:p>
+          <a:p>
+            <a:r>
+              <a:rPr lang="zh-CN" dirty="0"/>
+              <a:t>课后作业：</a:t>
+            </a:r>
+          </a:p>
+          <a:p>
+            <a:r>
+              <a:rPr lang="zh-CN" dirty="0"/>
+              <a:t>· 产出：能进管理后台看到 Topic 和 Entry</a:t>
+            </a:r>
+          </a:p>
+          <a:p>
+            <a:r>
+              <a:rPr lang="zh-CN" dirty="0"/>
+              <a:t/>
+            </a:r>
+          </a:p>
+          <a:p>
+            <a:r>
+              <a:rPr lang="zh-CN" dirty="0"/>
+              <a:t>节奏：讲 20 分钟 → 学员自己敲 40 分钟（不看答案）→ 对讲评自查 20 分钟 → 写作业 10 分钟。</a:t>
+            </a:r>
+          </a:p>
+        </p:txBody>
+      </p:sp>
     </p:spTree>
   </p:cSld>
   <p:clrMapOvr>
@@ -1276,6 +2002,74 @@
           </a:p>
         </p:txBody>
       </p:sp>
+      <p:sp>
+        <p:nvSpPr>
+          <p:cNvPr id="2" name="讲课提示"/>
+          <p:cNvSpPr txBox="1"/>
+          <p:nvPr/>
+        </p:nvSpPr>
+        <p:spPr>
+          <a:xfrm>
+            <a:off x="457200" y="457200"/>
+            <a:ext cx="6858000" cy="4800600"/>
+          </a:xfrm>
+          <a:prstGeom prst="rect">
+            <a:avLst/>
+          </a:prstGeom>
+        </p:spPr>
+        <p:txBody>
+          <a:bodyPr wrap="square"/>
+          <a:lstStyle/>
+          <a:p>
+            <a:r>
+              <a:rPr lang="zh-CN" dirty="0"/>
+              <a:t>第 93 节 · 核心知识点：★ 应用、模型与迁移三步曲</a:t>
+            </a:r>
+          </a:p>
+          <a:p>
+            <a:r>
+              <a:rPr lang="zh-CN" dirty="0"/>
+              <a:t/>
+            </a:r>
+          </a:p>
+          <a:p>
+            <a:r>
+              <a:rPr lang="zh-CN" dirty="0"/>
+              <a:t>讲这一页时：先让学生说出上节课的结论，再逐块讲要点。</a:t>
+            </a:r>
+          </a:p>
+          <a:p>
+            <a:r>
+              <a:rPr lang="zh-CN" dirty="0"/>
+              <a:t>每讲完一块，问一句「这一步如果写错了，报错会长什么样？」——把错误提前讲。</a:t>
+            </a:r>
+          </a:p>
+          <a:p>
+            <a:r>
+              <a:rPr lang="zh-CN" dirty="0"/>
+              <a:t/>
+            </a:r>
+          </a:p>
+          <a:p>
+            <a:r>
+              <a:rPr lang="zh-CN" dirty="0"/>
+              <a:t>本节目标：定义 Topic / Entry 模型；掌握「改模型 → makemigrations → migrate」三步</a:t>
+            </a:r>
+          </a:p>
+          <a:p>
+            <a:r>
+              <a:rPr lang="zh-CN" dirty="0"/>
+              <a:t/>
+            </a:r>
+          </a:p>
+          <a:p>
+            <a:r>
+              <a:rPr lang="zh-CN" dirty="0"/>
+              <a:t>看不到懂的地方，回讲义对应小节读一遍，再回来对着这页复述一次——能讲出来才算真懂。</a:t>
+            </a:r>
+          </a:p>
+        </p:txBody>
+      </p:sp>
     </p:spTree>
   </p:cSld>
   <p:clrMapOvr>
@@ -1399,6 +2193,104 @@
           </a:p>
         </p:txBody>
       </p:sp>
+      <p:sp>
+        <p:nvSpPr>
+          <p:cNvPr id="2" name="讲课提示"/>
+          <p:cNvSpPr txBox="1"/>
+          <p:nvPr/>
+        </p:nvSpPr>
+        <p:spPr>
+          <a:xfrm>
+            <a:off x="457200" y="457200"/>
+            <a:ext cx="6858000" cy="4800600"/>
+          </a:xfrm>
+          <a:prstGeom prst="rect">
+            <a:avLst/>
+          </a:prstGeom>
+        </p:spPr>
+        <p:txBody>
+          <a:bodyPr wrap="square"/>
+          <a:lstStyle/>
+          <a:p>
+            <a:r>
+              <a:rPr lang="zh-CN" dirty="0"/>
+              <a:t>第 94 节 · ★ 一次请求的旅程：URL → 视图 → 模板</a:t>
+            </a:r>
+          </a:p>
+          <a:p>
+            <a:r>
+              <a:rPr lang="zh-CN" dirty="0"/>
+              <a:t>单元 18 · Django 入门 · W23–W24</a:t>
+            </a:r>
+          </a:p>
+          <a:p>
+            <a:r>
+              <a:rPr lang="zh-CN" dirty="0"/>
+              <a:t/>
+            </a:r>
+          </a:p>
+          <a:p>
+            <a:r>
+              <a:rPr lang="zh-CN" dirty="0"/>
+              <a:t>学习目标：能画完整请求链路图；会映射 URL、写视图、渲染模板</a:t>
+            </a:r>
+          </a:p>
+          <a:p>
+            <a:r>
+              <a:rPr lang="zh-CN" dirty="0"/>
+              <a:t/>
+            </a:r>
+          </a:p>
+          <a:p>
+            <a:r>
+              <a:rPr lang="zh-CN" dirty="0"/>
+              <a:t>课堂实操（40 分钟，不看答案）：</a:t>
+            </a:r>
+          </a:p>
+          <a:p>
+            <a:r>
+              <a:rPr lang="zh-CN" dirty="0"/>
+              <a:t>· 现场加一条 URL 并访问它</a:t>
+            </a:r>
+          </a:p>
+          <a:p>
+            <a:r>
+              <a:rPr lang="zh-CN" dirty="0"/>
+              <a:t>· 故意把视图里的 context 删掉，看模板报什么错</a:t>
+            </a:r>
+          </a:p>
+          <a:p>
+            <a:r>
+              <a:rPr lang="zh-CN" dirty="0"/>
+              <a:t/>
+            </a:r>
+          </a:p>
+          <a:p>
+            <a:r>
+              <a:rPr lang="zh-CN" dirty="0"/>
+              <a:t>课后作业：</a:t>
+            </a:r>
+          </a:p>
+          <a:p>
+            <a:r>
+              <a:rPr lang="zh-CN" dirty="0"/>
+              <a:t>· ★ 产出：一张自己画的请求链路图</a:t>
+            </a:r>
+          </a:p>
+          <a:p>
+            <a:r>
+              <a:rPr lang="zh-CN" dirty="0"/>
+              <a:t/>
+            </a:r>
+          </a:p>
+          <a:p>
+            <a:r>
+              <a:rPr lang="zh-CN" dirty="0"/>
+              <a:t>节奏：讲 20 分钟 → 学员自己敲 40 分钟（不看答案）→ 对讲评自查 20 分钟 → 写作业 10 分钟。</a:t>
+            </a:r>
+          </a:p>
+        </p:txBody>
+      </p:sp>
     </p:spTree>
   </p:cSld>
   <p:clrMapOvr>
@@ -1492,6 +2384,74 @@
           </a:p>
         </p:txBody>
       </p:sp>
+      <p:sp>
+        <p:nvSpPr>
+          <p:cNvPr id="2" name="讲课提示"/>
+          <p:cNvSpPr txBox="1"/>
+          <p:nvPr/>
+        </p:nvSpPr>
+        <p:spPr>
+          <a:xfrm>
+            <a:off x="457200" y="457200"/>
+            <a:ext cx="6858000" cy="4800600"/>
+          </a:xfrm>
+          <a:prstGeom prst="rect">
+            <a:avLst/>
+          </a:prstGeom>
+        </p:spPr>
+        <p:txBody>
+          <a:bodyPr wrap="square"/>
+          <a:lstStyle/>
+          <a:p>
+            <a:r>
+              <a:rPr lang="zh-CN" dirty="0"/>
+              <a:t>第 94 节 · 核心知识点：★ 一次请求的旅程：URL → 视图 → 模板</a:t>
+            </a:r>
+          </a:p>
+          <a:p>
+            <a:r>
+              <a:rPr lang="zh-CN" dirty="0"/>
+              <a:t/>
+            </a:r>
+          </a:p>
+          <a:p>
+            <a:r>
+              <a:rPr lang="zh-CN" dirty="0"/>
+              <a:t>讲这一页时：先让学生说出上节课的结论，再逐块讲要点。</a:t>
+            </a:r>
+          </a:p>
+          <a:p>
+            <a:r>
+              <a:rPr lang="zh-CN" dirty="0"/>
+              <a:t>每讲完一块，问一句「这一步如果写错了，报错会长什么样？」——把错误提前讲。</a:t>
+            </a:r>
+          </a:p>
+          <a:p>
+            <a:r>
+              <a:rPr lang="zh-CN" dirty="0"/>
+              <a:t/>
+            </a:r>
+          </a:p>
+          <a:p>
+            <a:r>
+              <a:rPr lang="zh-CN" dirty="0"/>
+              <a:t>本节目标：能画完整请求链路图；会映射 URL、写视图、渲染模板</a:t>
+            </a:r>
+          </a:p>
+          <a:p>
+            <a:r>
+              <a:rPr lang="zh-CN" dirty="0"/>
+              <a:t/>
+            </a:r>
+          </a:p>
+          <a:p>
+            <a:r>
+              <a:rPr lang="zh-CN" dirty="0"/>
+              <a:t>看不到懂的地方，回讲义对应小节读一遍，再回来对着这页复述一次——能讲出来才算真懂。</a:t>
+            </a:r>
+          </a:p>
+        </p:txBody>
+      </p:sp>
     </p:spTree>
   </p:cSld>
   <p:clrMapOvr>
@@ -1615,6 +2575,104 @@
           </a:p>
         </p:txBody>
       </p:sp>
+      <p:sp>
+        <p:nvSpPr>
+          <p:cNvPr id="2" name="讲课提示"/>
+          <p:cNvSpPr txBox="1"/>
+          <p:nvPr/>
+        </p:nvSpPr>
+        <p:spPr>
+          <a:xfrm>
+            <a:off x="457200" y="457200"/>
+            <a:ext cx="6858000" cy="4800600"/>
+          </a:xfrm>
+          <a:prstGeom prst="rect">
+            <a:avLst/>
+          </a:prstGeom>
+        </p:spPr>
+        <p:txBody>
+          <a:bodyPr wrap="square"/>
+          <a:lstStyle/>
+          <a:p>
+            <a:r>
+              <a:rPr lang="zh-CN" dirty="0"/>
+              <a:t>第 95 节 · 模板语法与模板继承</a:t>
+            </a:r>
+          </a:p>
+          <a:p>
+            <a:r>
+              <a:rPr lang="zh-CN" dirty="0"/>
+              <a:t>单元 18 · Django 入门 · W24</a:t>
+            </a:r>
+          </a:p>
+          <a:p>
+            <a:r>
+              <a:rPr lang="zh-CN" dirty="0"/>
+              <a:t/>
+            </a:r>
+          </a:p>
+          <a:p>
+            <a:r>
+              <a:rPr lang="zh-CN" dirty="0"/>
+              <a:t>学习目标：会用 `{{ }}`、`{% for %}`、`{% url %}`；会用 base.html 做模板继承</a:t>
+            </a:r>
+          </a:p>
+          <a:p>
+            <a:r>
+              <a:rPr lang="zh-CN" dirty="0"/>
+              <a:t/>
+            </a:r>
+          </a:p>
+          <a:p>
+            <a:r>
+              <a:rPr lang="zh-CN" dirty="0"/>
+              <a:t>课堂实操（40 分钟，不看答案）：</a:t>
+            </a:r>
+          </a:p>
+          <a:p>
+            <a:r>
+              <a:rPr lang="zh-CN" dirty="0"/>
+              <a:t>· 把重复的导航栏抽进 base.html</a:t>
+            </a:r>
+          </a:p>
+          <a:p>
+            <a:r>
+              <a:rPr lang="zh-CN" dirty="0"/>
+              <a:t>· 故意写错 url 名字看 NoReverseMatch</a:t>
+            </a:r>
+          </a:p>
+          <a:p>
+            <a:r>
+              <a:rPr lang="zh-CN" dirty="0"/>
+              <a:t/>
+            </a:r>
+          </a:p>
+          <a:p>
+            <a:r>
+              <a:rPr lang="zh-CN" dirty="0"/>
+              <a:t>课后作业：</a:t>
+            </a:r>
+          </a:p>
+          <a:p>
+            <a:r>
+              <a:rPr lang="zh-CN" dirty="0"/>
+              <a:t>· 完成教材 18.4 全部动手练</a:t>
+            </a:r>
+          </a:p>
+          <a:p>
+            <a:r>
+              <a:rPr lang="zh-CN" dirty="0"/>
+              <a:t/>
+            </a:r>
+          </a:p>
+          <a:p>
+            <a:r>
+              <a:rPr lang="zh-CN" dirty="0"/>
+              <a:t>节奏：讲 20 分钟 → 学员自己敲 40 分钟（不看答案）→ 对讲评自查 20 分钟 → 写作业 10 分钟。</a:t>
+            </a:r>
+          </a:p>
+        </p:txBody>
+      </p:sp>
     </p:spTree>
   </p:cSld>
   <p:clrMapOvr>
@@ -1640,6 +2698,74 @@
           <a:chExt cx="0" cy="0"/>
         </a:xfrm>
       </p:grpSpPr>
+      <p:sp>
+        <p:nvSpPr>
+          <p:cNvPr id="2" name="讲课提示"/>
+          <p:cNvSpPr txBox="1"/>
+          <p:nvPr/>
+        </p:nvSpPr>
+        <p:spPr>
+          <a:xfrm>
+            <a:off x="457200" y="457200"/>
+            <a:ext cx="6858000" cy="4800600"/>
+          </a:xfrm>
+          <a:prstGeom prst="rect">
+            <a:avLst/>
+          </a:prstGeom>
+        </p:spPr>
+        <p:txBody>
+          <a:bodyPr wrap="square"/>
+          <a:lstStyle/>
+          <a:p>
+            <a:r>
+              <a:rPr lang="zh-CN" dirty="0"/>
+              <a:t>第 95 节 · 核心知识点：模板语法与模板继承</a:t>
+            </a:r>
+          </a:p>
+          <a:p>
+            <a:r>
+              <a:rPr lang="zh-CN" dirty="0"/>
+              <a:t/>
+            </a:r>
+          </a:p>
+          <a:p>
+            <a:r>
+              <a:rPr lang="zh-CN" dirty="0"/>
+              <a:t>讲这一页时：先让学生说出上节课的结论，再逐块讲要点。</a:t>
+            </a:r>
+          </a:p>
+          <a:p>
+            <a:r>
+              <a:rPr lang="zh-CN" dirty="0"/>
+              <a:t>每讲完一块，问一句「这一步如果写错了，报错会长什么样？」——把错误提前讲。</a:t>
+            </a:r>
+          </a:p>
+          <a:p>
+            <a:r>
+              <a:rPr lang="zh-CN" dirty="0"/>
+              <a:t/>
+            </a:r>
+          </a:p>
+          <a:p>
+            <a:r>
+              <a:rPr lang="zh-CN" dirty="0"/>
+              <a:t>本节目标：会用 `{{ }}`、`{% for %}`、`{% url %}`；会用 base.html 做模板继承</a:t>
+            </a:r>
+          </a:p>
+          <a:p>
+            <a:r>
+              <a:rPr lang="zh-CN" dirty="0"/>
+              <a:t/>
+            </a:r>
+          </a:p>
+          <a:p>
+            <a:r>
+              <a:rPr lang="zh-CN" dirty="0"/>
+              <a:t>看不到懂的地方，回讲义对应小节读一遍，再回来对着这页复述一次——能讲出来才算真懂。</a:t>
+            </a:r>
+          </a:p>
+        </p:txBody>
+      </p:sp>
       <p:sp>
         <p:nvSpPr>
           <p:cNvPr id="2" name="讲课提示"/>

--- a/python-course-ppt/逐节课件/Python讲授课件-单元18.pptx
+++ b/python-course-ppt/逐节课件/Python讲授课件-单元18.pptx
@@ -240,2608 +240,6 @@
 </p:notesMaster>
 </file>
 
-<file path=ppt/notesSlides/notesSlide1.xml><?xml version="1.0" encoding="utf-8"?>
-<p:notes xmlns:a="http://schemas.openxmlformats.org/drawingml/2006/main" xmlns:p="http://schemas.openxmlformats.org/presentationml/2006/main" xmlns:r="http://schemas.openxmlformats.org/officeDocument/2006/relationships">
-  <p:cSld>
-    <p:spTree>
-      <p:nvGrpSpPr>
-        <p:cNvPr id="1" name=""/>
-        <p:cNvGrpSpPr/>
-        <p:nvPr/>
-      </p:nvGrpSpPr>
-      <p:grpSpPr>
-        <a:xfrm>
-          <a:off x="0" y="0"/>
-          <a:ext cx="0" cy="0"/>
-          <a:chOff x="0" y="0"/>
-          <a:chExt cx="0" cy="0"/>
-        </a:xfrm>
-      </p:grpSpPr>
-      <p:sp>
-        <p:nvSpPr>
-          <p:cNvPr id="2" name="讲课提示"/>
-          <p:cNvSpPr txBox="1"/>
-          <p:nvPr/>
-        </p:nvSpPr>
-        <p:spPr>
-          <a:xfrm>
-            <a:off x="457200" y="457200"/>
-            <a:ext cx="6858000" cy="4800600"/>
-          </a:xfrm>
-          <a:prstGeom prst="rect">
-            <a:avLst/>
-          </a:prstGeom>
-        </p:spPr>
-        <p:txBody>
-          <a:bodyPr wrap="square"/>
-          <a:lstStyle/>
-          <a:p>
-            <a:r>
-              <a:rPr lang="zh-CN" dirty="0"/>
-              <a:t>单元 18 · 单元 18 · Django 入门</a:t>
-            </a:r>
-          </a:p>
-          <a:p>
-            <a:r>
-              <a:rPr lang="zh-CN" dirty="0"/>
-              <a:t/>
-            </a:r>
-          </a:p>
-          <a:p>
-            <a:r>
-              <a:rPr lang="zh-CN" dirty="0"/>
-              <a:t>本单元包含以下课节：</a:t>
-            </a:r>
-          </a:p>
-          <a:p>
-            <a:r>
-              <a:rPr lang="zh-CN" dirty="0"/>
-              <a:t>· 第 92 节 ★ 虚拟环境与 Django 项目</a:t>
-            </a:r>
-          </a:p>
-          <a:p>
-            <a:r>
-              <a:rPr lang="zh-CN" dirty="0"/>
-              <a:t>· 第 93 节 ★ 应用、模型与迁移三步曲</a:t>
-            </a:r>
-          </a:p>
-          <a:p>
-            <a:r>
-              <a:rPr lang="zh-CN" dirty="0"/>
-              <a:t>· 第 94 节 ★ 一次请求的旅程：URL → 视图 → 模板</a:t>
-            </a:r>
-          </a:p>
-          <a:p>
-            <a:r>
-              <a:rPr lang="zh-CN" dirty="0"/>
-              <a:t>· 第 95 节 模板语法与模板继承</a:t>
-            </a:r>
-          </a:p>
-          <a:p>
-            <a:r>
-              <a:rPr lang="zh-CN" dirty="0"/>
-              <a:t>· 第 96 节 Django shell 与 404</a:t>
-            </a:r>
-          </a:p>
-          <a:p>
-            <a:r>
-              <a:rPr lang="zh-CN" dirty="0"/>
-              <a:t>· 第 97 节 实战、答案与验收复盘</a:t>
-            </a:r>
-          </a:p>
-          <a:p>
-            <a:r>
-              <a:rPr lang="zh-CN" dirty="0"/>
-              <a:t/>
-            </a:r>
-          </a:p>
-          <a:p>
-            <a:r>
-              <a:rPr lang="zh-CN" dirty="0"/>
-              <a:t>开场用 3 分钟讲清：这个单元学完能做出什么，最后会被关卡怎么验。</a:t>
-            </a:r>
-          </a:p>
-        </p:txBody>
-      </p:sp>
-      <p:sp>
-        <p:nvSpPr>
-          <p:cNvPr id="2" name="讲课提示"/>
-          <p:cNvSpPr txBox="1"/>
-          <p:nvPr/>
-        </p:nvSpPr>
-        <p:spPr>
-          <a:xfrm>
-            <a:off x="457200" y="457200"/>
-            <a:ext cx="6858000" cy="4800600"/>
-          </a:xfrm>
-          <a:prstGeom prst="rect">
-            <a:avLst/>
-          </a:prstGeom>
-        </p:spPr>
-        <p:txBody>
-          <a:bodyPr wrap="square"/>
-          <a:lstStyle/>
-          <a:p>
-            <a:r>
-              <a:rPr lang="zh-CN" dirty="0"/>
-              <a:t>单元 18 · 单元 18 · Django 入门</a:t>
-            </a:r>
-          </a:p>
-          <a:p>
-            <a:r>
-              <a:rPr lang="zh-CN" dirty="0"/>
-              <a:t/>
-            </a:r>
-          </a:p>
-          <a:p>
-            <a:r>
-              <a:rPr lang="zh-CN" dirty="0"/>
-              <a:t>本单元包含以下课节：</a:t>
-            </a:r>
-          </a:p>
-          <a:p>
-            <a:r>
-              <a:rPr lang="zh-CN" dirty="0"/>
-              <a:t>· 第 92 节 ★ 虚拟环境与 Django 项目</a:t>
-            </a:r>
-          </a:p>
-          <a:p>
-            <a:r>
-              <a:rPr lang="zh-CN" dirty="0"/>
-              <a:t>· 第 93 节 ★ 应用、模型与迁移三步曲</a:t>
-            </a:r>
-          </a:p>
-          <a:p>
-            <a:r>
-              <a:rPr lang="zh-CN" dirty="0"/>
-              <a:t>· 第 94 节 ★ 一次请求的旅程：URL → 视图 → 模板</a:t>
-            </a:r>
-          </a:p>
-          <a:p>
-            <a:r>
-              <a:rPr lang="zh-CN" dirty="0"/>
-              <a:t>· 第 95 节 模板语法与模板继承</a:t>
-            </a:r>
-          </a:p>
-          <a:p>
-            <a:r>
-              <a:rPr lang="zh-CN" dirty="0"/>
-              <a:t>· 第 96 节 Django shell 与 404</a:t>
-            </a:r>
-          </a:p>
-          <a:p>
-            <a:r>
-              <a:rPr lang="zh-CN" dirty="0"/>
-              <a:t>· 第 97 节 实战、答案与验收复盘</a:t>
-            </a:r>
-          </a:p>
-          <a:p>
-            <a:r>
-              <a:rPr lang="zh-CN" dirty="0"/>
-              <a:t/>
-            </a:r>
-          </a:p>
-          <a:p>
-            <a:r>
-              <a:rPr lang="zh-CN" dirty="0"/>
-              <a:t>开场用 3 分钟讲清：这个单元学完能做出什么，最后会被关卡怎么验。</a:t>
-            </a:r>
-          </a:p>
-        </p:txBody>
-      </p:sp>
-    </p:spTree>
-  </p:cSld>
-  <p:clrMapOvr>
-    <a:masterClrMapping/>
-  </p:clrMapOvr>
-</p:notes>
-</file>
-
-<file path=ppt/notesSlides/notesSlide10.xml><?xml version="1.0" encoding="utf-8"?>
-<p:notes xmlns:a="http://schemas.openxmlformats.org/drawingml/2006/main" xmlns:p="http://schemas.openxmlformats.org/presentationml/2006/main" xmlns:r="http://schemas.openxmlformats.org/officeDocument/2006/relationships">
-  <p:cSld>
-    <p:spTree>
-      <p:nvGrpSpPr>
-        <p:cNvPr id="1" name=""/>
-        <p:cNvGrpSpPr/>
-        <p:nvPr/>
-      </p:nvGrpSpPr>
-      <p:grpSpPr>
-        <a:xfrm>
-          <a:off x="0" y="0"/>
-          <a:ext cx="0" cy="0"/>
-          <a:chOff x="0" y="0"/>
-          <a:chExt cx="0" cy="0"/>
-        </a:xfrm>
-      </p:grpSpPr>
-      <p:sp>
-        <p:nvSpPr>
-          <p:cNvPr id="2" name="讲课提示"/>
-          <p:cNvSpPr txBox="1"/>
-          <p:nvPr/>
-        </p:nvSpPr>
-        <p:spPr>
-          <a:xfrm>
-            <a:off x="457200" y="457200"/>
-            <a:ext cx="6858000" cy="4800600"/>
-          </a:xfrm>
-          <a:prstGeom prst="rect">
-            <a:avLst/>
-          </a:prstGeom>
-        </p:spPr>
-        <p:txBody>
-          <a:bodyPr wrap="square"/>
-          <a:lstStyle/>
-          <a:p>
-            <a:r>
-              <a:rPr lang="zh-CN" dirty="0"/>
-              <a:t>第 96 节 · Django shell 与 404</a:t>
-            </a:r>
-          </a:p>
-          <a:p>
-            <a:r>
-              <a:rPr lang="zh-CN" dirty="0"/>
-              <a:t>单元 18 · Django 入门 · W24</a:t>
-            </a:r>
-          </a:p>
-          <a:p>
-            <a:r>
-              <a:rPr lang="zh-CN" dirty="0"/>
-              <a:t/>
-            </a:r>
-          </a:p>
-          <a:p>
-            <a:r>
-              <a:rPr lang="zh-CN" dirty="0"/>
-              <a:t>学习目标：会用 shell 直接查数据库；理解 get_object_or_404 的意义</a:t>
-            </a:r>
-          </a:p>
-          <a:p>
-            <a:r>
-              <a:rPr lang="zh-CN" dirty="0"/>
-              <a:t/>
-            </a:r>
-          </a:p>
-          <a:p>
-            <a:r>
-              <a:rPr lang="zh-CN" dirty="0"/>
-              <a:t>课堂实操（40 分钟，不看答案）：</a:t>
-            </a:r>
-          </a:p>
-          <a:p>
-            <a:r>
-              <a:rPr lang="zh-CN" dirty="0"/>
-              <a:t>· 用 shell 造三条 Entry</a:t>
-            </a:r>
-          </a:p>
-          <a:p>
-            <a:r>
-              <a:rPr lang="zh-CN" dirty="0"/>
-              <a:t>· 访问一个不存在的 topic_id，看 404 页面</a:t>
-            </a:r>
-          </a:p>
-          <a:p>
-            <a:r>
-              <a:rPr lang="zh-CN" dirty="0"/>
-              <a:t/>
-            </a:r>
-          </a:p>
-          <a:p>
-            <a:r>
-              <a:rPr lang="zh-CN" dirty="0"/>
-              <a:t>课后作业：</a:t>
-            </a:r>
-          </a:p>
-          <a:p>
-            <a:r>
-              <a:rPr lang="zh-CN" dirty="0"/>
-              <a:t>· 产出：能浏览主题与条目的本地网站</a:t>
-            </a:r>
-          </a:p>
-          <a:p>
-            <a:r>
-              <a:rPr lang="zh-CN" dirty="0"/>
-              <a:t/>
-            </a:r>
-          </a:p>
-          <a:p>
-            <a:r>
-              <a:rPr lang="zh-CN" dirty="0"/>
-              <a:t>节奏：讲 20 分钟 → 学员自己敲 40 分钟（不看答案）→ 对讲评自查 20 分钟 → 写作业 10 分钟。</a:t>
-            </a:r>
-          </a:p>
-        </p:txBody>
-      </p:sp>
-      <p:sp>
-        <p:nvSpPr>
-          <p:cNvPr id="2" name="讲课提示"/>
-          <p:cNvSpPr txBox="1"/>
-          <p:nvPr/>
-        </p:nvSpPr>
-        <p:spPr>
-          <a:xfrm>
-            <a:off x="457200" y="457200"/>
-            <a:ext cx="6858000" cy="4800600"/>
-          </a:xfrm>
-          <a:prstGeom prst="rect">
-            <a:avLst/>
-          </a:prstGeom>
-        </p:spPr>
-        <p:txBody>
-          <a:bodyPr wrap="square"/>
-          <a:lstStyle/>
-          <a:p>
-            <a:r>
-              <a:rPr lang="zh-CN" dirty="0"/>
-              <a:t>第 96 节 · Django shell 与 404</a:t>
-            </a:r>
-          </a:p>
-          <a:p>
-            <a:r>
-              <a:rPr lang="zh-CN" dirty="0"/>
-              <a:t>单元 18 · Django 入门 · W24</a:t>
-            </a:r>
-          </a:p>
-          <a:p>
-            <a:r>
-              <a:rPr lang="zh-CN" dirty="0"/>
-              <a:t/>
-            </a:r>
-          </a:p>
-          <a:p>
-            <a:r>
-              <a:rPr lang="zh-CN" dirty="0"/>
-              <a:t>学习目标：会用 shell 直接查数据库；理解 get_object_or_404 的意义</a:t>
-            </a:r>
-          </a:p>
-          <a:p>
-            <a:r>
-              <a:rPr lang="zh-CN" dirty="0"/>
-              <a:t/>
-            </a:r>
-          </a:p>
-          <a:p>
-            <a:r>
-              <a:rPr lang="zh-CN" dirty="0"/>
-              <a:t>课堂实操（40 分钟，不看答案）：</a:t>
-            </a:r>
-          </a:p>
-          <a:p>
-            <a:r>
-              <a:rPr lang="zh-CN" dirty="0"/>
-              <a:t>· 用 shell 造三条 Entry</a:t>
-            </a:r>
-          </a:p>
-          <a:p>
-            <a:r>
-              <a:rPr lang="zh-CN" dirty="0"/>
-              <a:t>· 访问一个不存在的 topic_id，看 404 页面</a:t>
-            </a:r>
-          </a:p>
-          <a:p>
-            <a:r>
-              <a:rPr lang="zh-CN" dirty="0"/>
-              <a:t/>
-            </a:r>
-          </a:p>
-          <a:p>
-            <a:r>
-              <a:rPr lang="zh-CN" dirty="0"/>
-              <a:t>课后作业：</a:t>
-            </a:r>
-          </a:p>
-          <a:p>
-            <a:r>
-              <a:rPr lang="zh-CN" dirty="0"/>
-              <a:t>· 产出：能浏览主题与条目的本地网站</a:t>
-            </a:r>
-          </a:p>
-          <a:p>
-            <a:r>
-              <a:rPr lang="zh-CN" dirty="0"/>
-              <a:t/>
-            </a:r>
-          </a:p>
-          <a:p>
-            <a:r>
-              <a:rPr lang="zh-CN" dirty="0"/>
-              <a:t>节奏：讲 20 分钟 → 学员自己敲 40 分钟（不看答案）→ 对讲评自查 20 分钟 → 写作业 10 分钟。</a:t>
-            </a:r>
-          </a:p>
-        </p:txBody>
-      </p:sp>
-    </p:spTree>
-  </p:cSld>
-  <p:clrMapOvr>
-    <a:masterClrMapping/>
-  </p:clrMapOvr>
-</p:notes>
-</file>
-
-<file path=ppt/notesSlides/notesSlide11.xml><?xml version="1.0" encoding="utf-8"?>
-<p:notes xmlns:a="http://schemas.openxmlformats.org/drawingml/2006/main" xmlns:p="http://schemas.openxmlformats.org/presentationml/2006/main" xmlns:r="http://schemas.openxmlformats.org/officeDocument/2006/relationships">
-  <p:cSld>
-    <p:spTree>
-      <p:nvGrpSpPr>
-        <p:cNvPr id="1" name=""/>
-        <p:cNvGrpSpPr/>
-        <p:nvPr/>
-      </p:nvGrpSpPr>
-      <p:grpSpPr>
-        <a:xfrm>
-          <a:off x="0" y="0"/>
-          <a:ext cx="0" cy="0"/>
-          <a:chOff x="0" y="0"/>
-          <a:chExt cx="0" cy="0"/>
-        </a:xfrm>
-      </p:grpSpPr>
-      <p:sp>
-        <p:nvSpPr>
-          <p:cNvPr id="2" name="讲课提示"/>
-          <p:cNvSpPr txBox="1"/>
-          <p:nvPr/>
-        </p:nvSpPr>
-        <p:spPr>
-          <a:xfrm>
-            <a:off x="457200" y="457200"/>
-            <a:ext cx="6858000" cy="4800600"/>
-          </a:xfrm>
-          <a:prstGeom prst="rect">
-            <a:avLst/>
-          </a:prstGeom>
-        </p:spPr>
-        <p:txBody>
-          <a:bodyPr wrap="square"/>
-          <a:lstStyle/>
-          <a:p>
-            <a:r>
-              <a:rPr lang="zh-CN" dirty="0"/>
-              <a:t>第 96 节 · 核心知识点：Django shell 与 404</a:t>
-            </a:r>
-          </a:p>
-          <a:p>
-            <a:r>
-              <a:rPr lang="zh-CN" dirty="0"/>
-              <a:t/>
-            </a:r>
-          </a:p>
-          <a:p>
-            <a:r>
-              <a:rPr lang="zh-CN" dirty="0"/>
-              <a:t>讲这一页时：先让学生说出上节课的结论，再逐块讲要点。</a:t>
-            </a:r>
-          </a:p>
-          <a:p>
-            <a:r>
-              <a:rPr lang="zh-CN" dirty="0"/>
-              <a:t>每讲完一块，问一句「这一步如果写错了，报错会长什么样？」——把错误提前讲。</a:t>
-            </a:r>
-          </a:p>
-          <a:p>
-            <a:r>
-              <a:rPr lang="zh-CN" dirty="0"/>
-              <a:t/>
-            </a:r>
-          </a:p>
-          <a:p>
-            <a:r>
-              <a:rPr lang="zh-CN" dirty="0"/>
-              <a:t>本节目标：会用 shell 直接查数据库；理解 get_object_or_404 的意义</a:t>
-            </a:r>
-          </a:p>
-          <a:p>
-            <a:r>
-              <a:rPr lang="zh-CN" dirty="0"/>
-              <a:t/>
-            </a:r>
-          </a:p>
-          <a:p>
-            <a:r>
-              <a:rPr lang="zh-CN" dirty="0"/>
-              <a:t>看不到懂的地方，回讲义对应小节读一遍，再回来对着这页复述一次——能讲出来才算真懂。</a:t>
-            </a:r>
-          </a:p>
-        </p:txBody>
-      </p:sp>
-      <p:sp>
-        <p:nvSpPr>
-          <p:cNvPr id="2" name="讲课提示"/>
-          <p:cNvSpPr txBox="1"/>
-          <p:nvPr/>
-        </p:nvSpPr>
-        <p:spPr>
-          <a:xfrm>
-            <a:off x="457200" y="457200"/>
-            <a:ext cx="6858000" cy="4800600"/>
-          </a:xfrm>
-          <a:prstGeom prst="rect">
-            <a:avLst/>
-          </a:prstGeom>
-        </p:spPr>
-        <p:txBody>
-          <a:bodyPr wrap="square"/>
-          <a:lstStyle/>
-          <a:p>
-            <a:r>
-              <a:rPr lang="zh-CN" dirty="0"/>
-              <a:t>第 96 节 · 核心知识点：Django shell 与 404</a:t>
-            </a:r>
-          </a:p>
-          <a:p>
-            <a:r>
-              <a:rPr lang="zh-CN" dirty="0"/>
-              <a:t/>
-            </a:r>
-          </a:p>
-          <a:p>
-            <a:r>
-              <a:rPr lang="zh-CN" dirty="0"/>
-              <a:t>讲这一页时：先让学生说出上节课的结论，再逐块讲要点。</a:t>
-            </a:r>
-          </a:p>
-          <a:p>
-            <a:r>
-              <a:rPr lang="zh-CN" dirty="0"/>
-              <a:t>每讲完一块，问一句「这一步如果写错了，报错会长什么样？」——把错误提前讲。</a:t>
-            </a:r>
-          </a:p>
-          <a:p>
-            <a:r>
-              <a:rPr lang="zh-CN" dirty="0"/>
-              <a:t/>
-            </a:r>
-          </a:p>
-          <a:p>
-            <a:r>
-              <a:rPr lang="zh-CN" dirty="0"/>
-              <a:t>本节目标：会用 shell 直接查数据库；理解 get_object_or_404 的意义</a:t>
-            </a:r>
-          </a:p>
-          <a:p>
-            <a:r>
-              <a:rPr lang="zh-CN" dirty="0"/>
-              <a:t/>
-            </a:r>
-          </a:p>
-          <a:p>
-            <a:r>
-              <a:rPr lang="zh-CN" dirty="0"/>
-              <a:t>看不到懂的地方，回讲义对应小节读一遍，再回来对着这页复述一次——能讲出来才算真懂。</a:t>
-            </a:r>
-          </a:p>
-        </p:txBody>
-      </p:sp>
-    </p:spTree>
-  </p:cSld>
-  <p:clrMapOvr>
-    <a:masterClrMapping/>
-  </p:clrMapOvr>
-</p:notes>
-</file>
-
-<file path=ppt/notesSlides/notesSlide12.xml><?xml version="1.0" encoding="utf-8"?>
-<p:notes xmlns:a="http://schemas.openxmlformats.org/drawingml/2006/main" xmlns:p="http://schemas.openxmlformats.org/presentationml/2006/main" xmlns:r="http://schemas.openxmlformats.org/officeDocument/2006/relationships">
-  <p:cSld>
-    <p:spTree>
-      <p:nvGrpSpPr>
-        <p:cNvPr id="1" name=""/>
-        <p:cNvGrpSpPr/>
-        <p:nvPr/>
-      </p:nvGrpSpPr>
-      <p:grpSpPr>
-        <a:xfrm>
-          <a:off x="0" y="0"/>
-          <a:ext cx="0" cy="0"/>
-          <a:chOff x="0" y="0"/>
-          <a:chExt cx="0" cy="0"/>
-        </a:xfrm>
-      </p:grpSpPr>
-      <p:sp>
-        <p:nvSpPr>
-          <p:cNvPr id="2" name="讲课提示"/>
-          <p:cNvSpPr txBox="1"/>
-          <p:nvPr/>
-        </p:nvSpPr>
-        <p:spPr>
-          <a:xfrm>
-            <a:off x="457200" y="457200"/>
-            <a:ext cx="6858000" cy="4800600"/>
-          </a:xfrm>
-          <a:prstGeom prst="rect">
-            <a:avLst/>
-          </a:prstGeom>
-        </p:spPr>
-        <p:txBody>
-          <a:bodyPr wrap="square"/>
-          <a:lstStyle/>
-          <a:p>
-            <a:r>
-              <a:rPr lang="zh-CN" dirty="0"/>
-              <a:t>第 97 节 · 实战、答案与验收复盘</a:t>
-            </a:r>
-          </a:p>
-          <a:p>
-            <a:r>
-              <a:rPr lang="zh-CN" dirty="0"/>
-              <a:t>单元 18 · Django 入门 · W24</a:t>
-            </a:r>
-          </a:p>
-          <a:p>
-            <a:r>
-              <a:rPr lang="zh-CN" dirty="0"/>
-              <a:t/>
-            </a:r>
-          </a:p>
-          <a:p>
-            <a:r>
-              <a:rPr lang="zh-CN" dirty="0"/>
-              <a:t>学习目标：独立完成单元 18 练习，画得出项目结构图</a:t>
-            </a:r>
-          </a:p>
-          <a:p>
-            <a:r>
-              <a:rPr lang="zh-CN" dirty="0"/>
-              <a:t/>
-            </a:r>
-          </a:p>
-          <a:p>
-            <a:r>
-              <a:rPr lang="zh-CN" dirty="0"/>
-              <a:t>课堂实操（40 分钟，不看答案）：</a:t>
-            </a:r>
-          </a:p>
-          <a:p>
-            <a:r>
-              <a:rPr lang="zh-CN" dirty="0"/>
-              <a:t>· 限时 40 分钟独立完成基础档</a:t>
-            </a:r>
-          </a:p>
-          <a:p>
-            <a:r>
-              <a:rPr lang="zh-CN" dirty="0"/>
-              <a:t>· 互相检查对方的 settings.py 配置</a:t>
-            </a:r>
-          </a:p>
-          <a:p>
-            <a:r>
-              <a:rPr lang="zh-CN" dirty="0"/>
-              <a:t/>
-            </a:r>
-          </a:p>
-          <a:p>
-            <a:r>
-              <a:rPr lang="zh-CN" dirty="0"/>
-              <a:t>课后作业：</a:t>
-            </a:r>
-          </a:p>
-          <a:p>
-            <a:r>
-              <a:rPr lang="zh-CN" dirty="0"/>
-              <a:t>· ★ 产出：学习笔记本地网站</a:t>
-            </a:r>
-          </a:p>
-          <a:p>
-            <a:r>
-              <a:rPr lang="zh-CN" dirty="0"/>
-              <a:t/>
-            </a:r>
-          </a:p>
-          <a:p>
-            <a:r>
-              <a:rPr lang="zh-CN" dirty="0"/>
-              <a:t>节奏：讲 20 分钟 → 学员自己敲 40 分钟（不看答案）→ 对讲评自查 20 分钟 → 写作业 10 分钟。</a:t>
-            </a:r>
-          </a:p>
-        </p:txBody>
-      </p:sp>
-      <p:sp>
-        <p:nvSpPr>
-          <p:cNvPr id="2" name="讲课提示"/>
-          <p:cNvSpPr txBox="1"/>
-          <p:nvPr/>
-        </p:nvSpPr>
-        <p:spPr>
-          <a:xfrm>
-            <a:off x="457200" y="457200"/>
-            <a:ext cx="6858000" cy="4800600"/>
-          </a:xfrm>
-          <a:prstGeom prst="rect">
-            <a:avLst/>
-          </a:prstGeom>
-        </p:spPr>
-        <p:txBody>
-          <a:bodyPr wrap="square"/>
-          <a:lstStyle/>
-          <a:p>
-            <a:r>
-              <a:rPr lang="zh-CN" dirty="0"/>
-              <a:t>第 97 节 · 实战、答案与验收复盘</a:t>
-            </a:r>
-          </a:p>
-          <a:p>
-            <a:r>
-              <a:rPr lang="zh-CN" dirty="0"/>
-              <a:t>单元 18 · Django 入门 · W24</a:t>
-            </a:r>
-          </a:p>
-          <a:p>
-            <a:r>
-              <a:rPr lang="zh-CN" dirty="0"/>
-              <a:t/>
-            </a:r>
-          </a:p>
-          <a:p>
-            <a:r>
-              <a:rPr lang="zh-CN" dirty="0"/>
-              <a:t>学习目标：独立完成单元 18 练习，画得出项目结构图</a:t>
-            </a:r>
-          </a:p>
-          <a:p>
-            <a:r>
-              <a:rPr lang="zh-CN" dirty="0"/>
-              <a:t/>
-            </a:r>
-          </a:p>
-          <a:p>
-            <a:r>
-              <a:rPr lang="zh-CN" dirty="0"/>
-              <a:t>课堂实操（40 分钟，不看答案）：</a:t>
-            </a:r>
-          </a:p>
-          <a:p>
-            <a:r>
-              <a:rPr lang="zh-CN" dirty="0"/>
-              <a:t>· 限时 40 分钟独立完成基础档</a:t>
-            </a:r>
-          </a:p>
-          <a:p>
-            <a:r>
-              <a:rPr lang="zh-CN" dirty="0"/>
-              <a:t>· 互相检查对方的 settings.py 配置</a:t>
-            </a:r>
-          </a:p>
-          <a:p>
-            <a:r>
-              <a:rPr lang="zh-CN" dirty="0"/>
-              <a:t/>
-            </a:r>
-          </a:p>
-          <a:p>
-            <a:r>
-              <a:rPr lang="zh-CN" dirty="0"/>
-              <a:t>课后作业：</a:t>
-            </a:r>
-          </a:p>
-          <a:p>
-            <a:r>
-              <a:rPr lang="zh-CN" dirty="0"/>
-              <a:t>· ★ 产出：学习笔记本地网站</a:t>
-            </a:r>
-          </a:p>
-          <a:p>
-            <a:r>
-              <a:rPr lang="zh-CN" dirty="0"/>
-              <a:t/>
-            </a:r>
-          </a:p>
-          <a:p>
-            <a:r>
-              <a:rPr lang="zh-CN" dirty="0"/>
-              <a:t>节奏：讲 20 分钟 → 学员自己敲 40 分钟（不看答案）→ 对讲评自查 20 分钟 → 写作业 10 分钟。</a:t>
-            </a:r>
-          </a:p>
-        </p:txBody>
-      </p:sp>
-    </p:spTree>
-  </p:cSld>
-  <p:clrMapOvr>
-    <a:masterClrMapping/>
-  </p:clrMapOvr>
-</p:notes>
-</file>
-
-<file path=ppt/notesSlides/notesSlide13.xml><?xml version="1.0" encoding="utf-8"?>
-<p:notes xmlns:a="http://schemas.openxmlformats.org/drawingml/2006/main" xmlns:p="http://schemas.openxmlformats.org/presentationml/2006/main" xmlns:r="http://schemas.openxmlformats.org/officeDocument/2006/relationships">
-  <p:cSld>
-    <p:spTree>
-      <p:nvGrpSpPr>
-        <p:cNvPr id="1" name=""/>
-        <p:cNvGrpSpPr/>
-        <p:nvPr/>
-      </p:nvGrpSpPr>
-      <p:grpSpPr>
-        <a:xfrm>
-          <a:off x="0" y="0"/>
-          <a:ext cx="0" cy="0"/>
-          <a:chOff x="0" y="0"/>
-          <a:chExt cx="0" cy="0"/>
-        </a:xfrm>
-      </p:grpSpPr>
-      <p:sp>
-        <p:nvSpPr>
-          <p:cNvPr id="2" name="讲课提示"/>
-          <p:cNvSpPr txBox="1"/>
-          <p:nvPr/>
-        </p:nvSpPr>
-        <p:spPr>
-          <a:xfrm>
-            <a:off x="457200" y="457200"/>
-            <a:ext cx="6858000" cy="4800600"/>
-          </a:xfrm>
-          <a:prstGeom prst="rect">
-            <a:avLst/>
-          </a:prstGeom>
-        </p:spPr>
-        <p:txBody>
-          <a:bodyPr wrap="square"/>
-          <a:lstStyle/>
-          <a:p>
-            <a:r>
-              <a:rPr lang="zh-CN" dirty="0"/>
-              <a:t>第 97 节 · 核心知识点：实战、答案与验收复盘</a:t>
-            </a:r>
-          </a:p>
-          <a:p>
-            <a:r>
-              <a:rPr lang="zh-CN" dirty="0"/>
-              <a:t/>
-            </a:r>
-          </a:p>
-          <a:p>
-            <a:r>
-              <a:rPr lang="zh-CN" dirty="0"/>
-              <a:t>讲这一页时：先让学生说出上节课的结论，再逐块讲要点。</a:t>
-            </a:r>
-          </a:p>
-          <a:p>
-            <a:r>
-              <a:rPr lang="zh-CN" dirty="0"/>
-              <a:t>每讲完一块，问一句「这一步如果写错了，报错会长什么样？」——把错误提前讲。</a:t>
-            </a:r>
-          </a:p>
-          <a:p>
-            <a:r>
-              <a:rPr lang="zh-CN" dirty="0"/>
-              <a:t/>
-            </a:r>
-          </a:p>
-          <a:p>
-            <a:r>
-              <a:rPr lang="zh-CN" dirty="0"/>
-              <a:t>本节目标：独立完成单元 18 练习，画得出项目结构图</a:t>
-            </a:r>
-          </a:p>
-          <a:p>
-            <a:r>
-              <a:rPr lang="zh-CN" dirty="0"/>
-              <a:t/>
-            </a:r>
-          </a:p>
-          <a:p>
-            <a:r>
-              <a:rPr lang="zh-CN" dirty="0"/>
-              <a:t>看不到懂的地方，回讲义对应小节读一遍，再回来对着这页复述一次——能讲出来才算真懂。</a:t>
-            </a:r>
-          </a:p>
-        </p:txBody>
-      </p:sp>
-      <p:sp>
-        <p:nvSpPr>
-          <p:cNvPr id="2" name="讲课提示"/>
-          <p:cNvSpPr txBox="1"/>
-          <p:nvPr/>
-        </p:nvSpPr>
-        <p:spPr>
-          <a:xfrm>
-            <a:off x="457200" y="457200"/>
-            <a:ext cx="6858000" cy="4800600"/>
-          </a:xfrm>
-          <a:prstGeom prst="rect">
-            <a:avLst/>
-          </a:prstGeom>
-        </p:spPr>
-        <p:txBody>
-          <a:bodyPr wrap="square"/>
-          <a:lstStyle/>
-          <a:p>
-            <a:r>
-              <a:rPr lang="zh-CN" dirty="0"/>
-              <a:t>第 97 节 · 核心知识点：实战、答案与验收复盘</a:t>
-            </a:r>
-          </a:p>
-          <a:p>
-            <a:r>
-              <a:rPr lang="zh-CN" dirty="0"/>
-              <a:t/>
-            </a:r>
-          </a:p>
-          <a:p>
-            <a:r>
-              <a:rPr lang="zh-CN" dirty="0"/>
-              <a:t>讲这一页时：先让学生说出上节课的结论，再逐块讲要点。</a:t>
-            </a:r>
-          </a:p>
-          <a:p>
-            <a:r>
-              <a:rPr lang="zh-CN" dirty="0"/>
-              <a:t>每讲完一块，问一句「这一步如果写错了，报错会长什么样？」——把错误提前讲。</a:t>
-            </a:r>
-          </a:p>
-          <a:p>
-            <a:r>
-              <a:rPr lang="zh-CN" dirty="0"/>
-              <a:t/>
-            </a:r>
-          </a:p>
-          <a:p>
-            <a:r>
-              <a:rPr lang="zh-CN" dirty="0"/>
-              <a:t>本节目标：独立完成单元 18 练习，画得出项目结构图</a:t>
-            </a:r>
-          </a:p>
-          <a:p>
-            <a:r>
-              <a:rPr lang="zh-CN" dirty="0"/>
-              <a:t/>
-            </a:r>
-          </a:p>
-          <a:p>
-            <a:r>
-              <a:rPr lang="zh-CN" dirty="0"/>
-              <a:t>看不到懂的地方，回讲义对应小节读一遍，再回来对着这页复述一次——能讲出来才算真懂。</a:t>
-            </a:r>
-          </a:p>
-        </p:txBody>
-      </p:sp>
-    </p:spTree>
-  </p:cSld>
-  <p:clrMapOvr>
-    <a:masterClrMapping/>
-  </p:clrMapOvr>
-</p:notes>
-</file>
-
-<file path=ppt/notesSlides/notesSlide14.xml><?xml version="1.0" encoding="utf-8"?>
-<p:notes xmlns:a="http://schemas.openxmlformats.org/drawingml/2006/main" xmlns:p="http://schemas.openxmlformats.org/presentationml/2006/main" xmlns:r="http://schemas.openxmlformats.org/officeDocument/2006/relationships">
-  <p:cSld>
-    <p:spTree>
-      <p:nvGrpSpPr>
-        <p:cNvPr id="1" name=""/>
-        <p:cNvGrpSpPr/>
-        <p:nvPr/>
-      </p:nvGrpSpPr>
-      <p:grpSpPr>
-        <a:xfrm>
-          <a:off x="0" y="0"/>
-          <a:ext cx="0" cy="0"/>
-          <a:chOff x="0" y="0"/>
-          <a:chExt cx="0" cy="0"/>
-        </a:xfrm>
-      </p:grpSpPr>
-      <p:sp>
-        <p:nvSpPr>
-          <p:cNvPr id="2" name="讲课提示"/>
-          <p:cNvSpPr txBox="1"/>
-          <p:nvPr/>
-        </p:nvSpPr>
-        <p:spPr>
-          <a:xfrm>
-            <a:off x="457200" y="457200"/>
-            <a:ext cx="6858000" cy="4800600"/>
-          </a:xfrm>
-          <a:prstGeom prst="rect">
-            <a:avLst/>
-          </a:prstGeom>
-        </p:spPr>
-        <p:txBody>
-          <a:bodyPr wrap="square"/>
-          <a:lstStyle/>
-          <a:p>
-            <a:r>
-              <a:rPr lang="zh-CN" dirty="0"/>
-              <a:t>单元 18 小结 · 单元 18 · 小结</a:t>
-            </a:r>
-          </a:p>
-          <a:p>
-            <a:r>
-              <a:rPr lang="zh-CN" dirty="0"/>
-              <a:t/>
-            </a:r>
-          </a:p>
-          <a:p>
-            <a:r>
-              <a:rPr lang="zh-CN" dirty="0"/>
-              <a:t>收尾动作：让学生合上讲义，口述本单元三个最重要的结论；说不出来的，回对应课节。</a:t>
-            </a:r>
-          </a:p>
-          <a:p>
-            <a:r>
-              <a:rPr lang="zh-CN" dirty="0"/>
-              <a:t>然后当场勾一遍本单元课节的「已完成」，没打勾的进下一单元前补掉。</a:t>
-            </a:r>
-          </a:p>
-        </p:txBody>
-      </p:sp>
-      <p:sp>
-        <p:nvSpPr>
-          <p:cNvPr id="2" name="讲课提示"/>
-          <p:cNvSpPr txBox="1"/>
-          <p:nvPr/>
-        </p:nvSpPr>
-        <p:spPr>
-          <a:xfrm>
-            <a:off x="457200" y="457200"/>
-            <a:ext cx="6858000" cy="4800600"/>
-          </a:xfrm>
-          <a:prstGeom prst="rect">
-            <a:avLst/>
-          </a:prstGeom>
-        </p:spPr>
-        <p:txBody>
-          <a:bodyPr wrap="square"/>
-          <a:lstStyle/>
-          <a:p>
-            <a:r>
-              <a:rPr lang="zh-CN" dirty="0"/>
-              <a:t>单元 18 小结 · 单元 18 · 小结</a:t>
-            </a:r>
-          </a:p>
-          <a:p>
-            <a:r>
-              <a:rPr lang="zh-CN" dirty="0"/>
-              <a:t/>
-            </a:r>
-          </a:p>
-          <a:p>
-            <a:r>
-              <a:rPr lang="zh-CN" dirty="0"/>
-              <a:t>收尾动作：让学生合上讲义，口述本单元三个最重要的结论；说不出来的，回对应课节。</a:t>
-            </a:r>
-          </a:p>
-          <a:p>
-            <a:r>
-              <a:rPr lang="zh-CN" dirty="0"/>
-              <a:t>然后当场勾一遍本单元课节的「已完成」，没打勾的进下一单元前补掉。</a:t>
-            </a:r>
-          </a:p>
-        </p:txBody>
-      </p:sp>
-    </p:spTree>
-  </p:cSld>
-  <p:clrMapOvr>
-    <a:masterClrMapping/>
-  </p:clrMapOvr>
-</p:notes>
-</file>
-
-<file path=ppt/notesSlides/notesSlide2.xml><?xml version="1.0" encoding="utf-8"?>
-<p:notes xmlns:a="http://schemas.openxmlformats.org/drawingml/2006/main" xmlns:p="http://schemas.openxmlformats.org/presentationml/2006/main" xmlns:r="http://schemas.openxmlformats.org/officeDocument/2006/relationships">
-  <p:cSld>
-    <p:spTree>
-      <p:nvGrpSpPr>
-        <p:cNvPr id="1" name=""/>
-        <p:cNvGrpSpPr/>
-        <p:nvPr/>
-      </p:nvGrpSpPr>
-      <p:grpSpPr>
-        <a:xfrm>
-          <a:off x="0" y="0"/>
-          <a:ext cx="0" cy="0"/>
-          <a:chOff x="0" y="0"/>
-          <a:chExt cx="0" cy="0"/>
-        </a:xfrm>
-      </p:grpSpPr>
-      <p:sp>
-        <p:nvSpPr>
-          <p:cNvPr id="2" name="讲课提示"/>
-          <p:cNvSpPr txBox="1"/>
-          <p:nvPr/>
-        </p:nvSpPr>
-        <p:spPr>
-          <a:xfrm>
-            <a:off x="457200" y="457200"/>
-            <a:ext cx="6858000" cy="4800600"/>
-          </a:xfrm>
-          <a:prstGeom prst="rect">
-            <a:avLst/>
-          </a:prstGeom>
-        </p:spPr>
-        <p:txBody>
-          <a:bodyPr wrap="square"/>
-          <a:lstStyle/>
-          <a:p>
-            <a:r>
-              <a:rPr lang="zh-CN" dirty="0"/>
-              <a:t>第 92 节 · ★ 虚拟环境与 Django 项目</a:t>
-            </a:r>
-          </a:p>
-          <a:p>
-            <a:r>
-              <a:rPr lang="zh-CN" dirty="0"/>
-              <a:t>单元 18 · Django 入门 · W22–W23</a:t>
-            </a:r>
-          </a:p>
-          <a:p>
-            <a:r>
-              <a:rPr lang="zh-CN" dirty="0"/>
-              <a:t/>
-            </a:r>
-          </a:p>
-          <a:p>
-            <a:r>
-              <a:rPr lang="zh-CN" dirty="0"/>
-              <a:t>学习目标：说清为什么必须用虚拟环境；能建项目、跑起来、看清目录结构</a:t>
-            </a:r>
-          </a:p>
-          <a:p>
-            <a:r>
-              <a:rPr lang="zh-CN" dirty="0"/>
-              <a:t/>
-            </a:r>
-          </a:p>
-          <a:p>
-            <a:r>
-              <a:rPr lang="zh-CN" dirty="0"/>
-              <a:t>课堂实操（40 分钟，不看答案）：</a:t>
-            </a:r>
-          </a:p>
-          <a:p>
-            <a:r>
-              <a:rPr lang="zh-CN" dirty="0"/>
-              <a:t>· 建 ll_env 并激活，确认命令行出现 (ll_env)</a:t>
-            </a:r>
-          </a:p>
-          <a:p>
-            <a:r>
-              <a:rPr lang="zh-CN" dirty="0"/>
-              <a:t>· 跑 startserver 打开首页</a:t>
-            </a:r>
-          </a:p>
-          <a:p>
-            <a:r>
-              <a:rPr lang="zh-CN" dirty="0"/>
-              <a:t/>
-            </a:r>
-          </a:p>
-          <a:p>
-            <a:r>
-              <a:rPr lang="zh-CN" dirty="0"/>
-              <a:t>课后作业：</a:t>
-            </a:r>
-          </a:p>
-          <a:p>
-            <a:r>
-              <a:rPr lang="zh-CN" dirty="0"/>
-              <a:t>· 产出：能跑起来的空 Django 项目</a:t>
-            </a:r>
-          </a:p>
-          <a:p>
-            <a:r>
-              <a:rPr lang="zh-CN" dirty="0"/>
-              <a:t/>
-            </a:r>
-          </a:p>
-          <a:p>
-            <a:r>
-              <a:rPr lang="zh-CN" dirty="0"/>
-              <a:t>节奏：讲 20 分钟 → 学员自己敲 40 分钟（不看答案）→ 对讲评自查 20 分钟 → 写作业 10 分钟。</a:t>
-            </a:r>
-          </a:p>
-        </p:txBody>
-      </p:sp>
-      <p:sp>
-        <p:nvSpPr>
-          <p:cNvPr id="2" name="讲课提示"/>
-          <p:cNvSpPr txBox="1"/>
-          <p:nvPr/>
-        </p:nvSpPr>
-        <p:spPr>
-          <a:xfrm>
-            <a:off x="457200" y="457200"/>
-            <a:ext cx="6858000" cy="4800600"/>
-          </a:xfrm>
-          <a:prstGeom prst="rect">
-            <a:avLst/>
-          </a:prstGeom>
-        </p:spPr>
-        <p:txBody>
-          <a:bodyPr wrap="square"/>
-          <a:lstStyle/>
-          <a:p>
-            <a:r>
-              <a:rPr lang="zh-CN" dirty="0"/>
-              <a:t>第 92 节 · ★ 虚拟环境与 Django 项目</a:t>
-            </a:r>
-          </a:p>
-          <a:p>
-            <a:r>
-              <a:rPr lang="zh-CN" dirty="0"/>
-              <a:t>单元 18 · Django 入门 · W22–W23</a:t>
-            </a:r>
-          </a:p>
-          <a:p>
-            <a:r>
-              <a:rPr lang="zh-CN" dirty="0"/>
-              <a:t/>
-            </a:r>
-          </a:p>
-          <a:p>
-            <a:r>
-              <a:rPr lang="zh-CN" dirty="0"/>
-              <a:t>学习目标：说清为什么必须用虚拟环境；能建项目、跑起来、看清目录结构</a:t>
-            </a:r>
-          </a:p>
-          <a:p>
-            <a:r>
-              <a:rPr lang="zh-CN" dirty="0"/>
-              <a:t/>
-            </a:r>
-          </a:p>
-          <a:p>
-            <a:r>
-              <a:rPr lang="zh-CN" dirty="0"/>
-              <a:t>课堂实操（40 分钟，不看答案）：</a:t>
-            </a:r>
-          </a:p>
-          <a:p>
-            <a:r>
-              <a:rPr lang="zh-CN" dirty="0"/>
-              <a:t>· 建 ll_env 并激活，确认命令行出现 (ll_env)</a:t>
-            </a:r>
-          </a:p>
-          <a:p>
-            <a:r>
-              <a:rPr lang="zh-CN" dirty="0"/>
-              <a:t>· 跑 startserver 打开首页</a:t>
-            </a:r>
-          </a:p>
-          <a:p>
-            <a:r>
-              <a:rPr lang="zh-CN" dirty="0"/>
-              <a:t/>
-            </a:r>
-          </a:p>
-          <a:p>
-            <a:r>
-              <a:rPr lang="zh-CN" dirty="0"/>
-              <a:t>课后作业：</a:t>
-            </a:r>
-          </a:p>
-          <a:p>
-            <a:r>
-              <a:rPr lang="zh-CN" dirty="0"/>
-              <a:t>· 产出：能跑起来的空 Django 项目</a:t>
-            </a:r>
-          </a:p>
-          <a:p>
-            <a:r>
-              <a:rPr lang="zh-CN" dirty="0"/>
-              <a:t/>
-            </a:r>
-          </a:p>
-          <a:p>
-            <a:r>
-              <a:rPr lang="zh-CN" dirty="0"/>
-              <a:t>节奏：讲 20 分钟 → 学员自己敲 40 分钟（不看答案）→ 对讲评自查 20 分钟 → 写作业 10 分钟。</a:t>
-            </a:r>
-          </a:p>
-        </p:txBody>
-      </p:sp>
-    </p:spTree>
-  </p:cSld>
-  <p:clrMapOvr>
-    <a:masterClrMapping/>
-  </p:clrMapOvr>
-</p:notes>
-</file>
-
-<file path=ppt/notesSlides/notesSlide3.xml><?xml version="1.0" encoding="utf-8"?>
-<p:notes xmlns:a="http://schemas.openxmlformats.org/drawingml/2006/main" xmlns:p="http://schemas.openxmlformats.org/presentationml/2006/main" xmlns:r="http://schemas.openxmlformats.org/officeDocument/2006/relationships">
-  <p:cSld>
-    <p:spTree>
-      <p:nvGrpSpPr>
-        <p:cNvPr id="1" name=""/>
-        <p:cNvGrpSpPr/>
-        <p:nvPr/>
-      </p:nvGrpSpPr>
-      <p:grpSpPr>
-        <a:xfrm>
-          <a:off x="0" y="0"/>
-          <a:ext cx="0" cy="0"/>
-          <a:chOff x="0" y="0"/>
-          <a:chExt cx="0" cy="0"/>
-        </a:xfrm>
-      </p:grpSpPr>
-      <p:sp>
-        <p:nvSpPr>
-          <p:cNvPr id="2" name="讲课提示"/>
-          <p:cNvSpPr txBox="1"/>
-          <p:nvPr/>
-        </p:nvSpPr>
-        <p:spPr>
-          <a:xfrm>
-            <a:off x="457200" y="457200"/>
-            <a:ext cx="6858000" cy="4800600"/>
-          </a:xfrm>
-          <a:prstGeom prst="rect">
-            <a:avLst/>
-          </a:prstGeom>
-        </p:spPr>
-        <p:txBody>
-          <a:bodyPr wrap="square"/>
-          <a:lstStyle/>
-          <a:p>
-            <a:r>
-              <a:rPr lang="zh-CN" dirty="0"/>
-              <a:t>第 92 节 · 核心知识点：★ 虚拟环境与 Django 项目</a:t>
-            </a:r>
-          </a:p>
-          <a:p>
-            <a:r>
-              <a:rPr lang="zh-CN" dirty="0"/>
-              <a:t/>
-            </a:r>
-          </a:p>
-          <a:p>
-            <a:r>
-              <a:rPr lang="zh-CN" dirty="0"/>
-              <a:t>讲这一页时：先让学生说出上节课的结论，再逐块讲要点。</a:t>
-            </a:r>
-          </a:p>
-          <a:p>
-            <a:r>
-              <a:rPr lang="zh-CN" dirty="0"/>
-              <a:t>每讲完一块，问一句「这一步如果写错了，报错会长什么样？」——把错误提前讲。</a:t>
-            </a:r>
-          </a:p>
-          <a:p>
-            <a:r>
-              <a:rPr lang="zh-CN" dirty="0"/>
-              <a:t/>
-            </a:r>
-          </a:p>
-          <a:p>
-            <a:r>
-              <a:rPr lang="zh-CN" dirty="0"/>
-              <a:t>本节目标：说清为什么必须用虚拟环境；能建项目、跑起来、看清目录结构</a:t>
-            </a:r>
-          </a:p>
-          <a:p>
-            <a:r>
-              <a:rPr lang="zh-CN" dirty="0"/>
-              <a:t/>
-            </a:r>
-          </a:p>
-          <a:p>
-            <a:r>
-              <a:rPr lang="zh-CN" dirty="0"/>
-              <a:t>看不到懂的地方，回讲义对应小节读一遍，再回来对着这页复述一次——能讲出来才算真懂。</a:t>
-            </a:r>
-          </a:p>
-        </p:txBody>
-      </p:sp>
-      <p:sp>
-        <p:nvSpPr>
-          <p:cNvPr id="2" name="讲课提示"/>
-          <p:cNvSpPr txBox="1"/>
-          <p:nvPr/>
-        </p:nvSpPr>
-        <p:spPr>
-          <a:xfrm>
-            <a:off x="457200" y="457200"/>
-            <a:ext cx="6858000" cy="4800600"/>
-          </a:xfrm>
-          <a:prstGeom prst="rect">
-            <a:avLst/>
-          </a:prstGeom>
-        </p:spPr>
-        <p:txBody>
-          <a:bodyPr wrap="square"/>
-          <a:lstStyle/>
-          <a:p>
-            <a:r>
-              <a:rPr lang="zh-CN" dirty="0"/>
-              <a:t>第 92 节 · 核心知识点：★ 虚拟环境与 Django 项目</a:t>
-            </a:r>
-          </a:p>
-          <a:p>
-            <a:r>
-              <a:rPr lang="zh-CN" dirty="0"/>
-              <a:t/>
-            </a:r>
-          </a:p>
-          <a:p>
-            <a:r>
-              <a:rPr lang="zh-CN" dirty="0"/>
-              <a:t>讲这一页时：先让学生说出上节课的结论，再逐块讲要点。</a:t>
-            </a:r>
-          </a:p>
-          <a:p>
-            <a:r>
-              <a:rPr lang="zh-CN" dirty="0"/>
-              <a:t>每讲完一块，问一句「这一步如果写错了，报错会长什么样？」——把错误提前讲。</a:t>
-            </a:r>
-          </a:p>
-          <a:p>
-            <a:r>
-              <a:rPr lang="zh-CN" dirty="0"/>
-              <a:t/>
-            </a:r>
-          </a:p>
-          <a:p>
-            <a:r>
-              <a:rPr lang="zh-CN" dirty="0"/>
-              <a:t>本节目标：说清为什么必须用虚拟环境；能建项目、跑起来、看清目录结构</a:t>
-            </a:r>
-          </a:p>
-          <a:p>
-            <a:r>
-              <a:rPr lang="zh-CN" dirty="0"/>
-              <a:t/>
-            </a:r>
-          </a:p>
-          <a:p>
-            <a:r>
-              <a:rPr lang="zh-CN" dirty="0"/>
-              <a:t>看不到懂的地方，回讲义对应小节读一遍，再回来对着这页复述一次——能讲出来才算真懂。</a:t>
-            </a:r>
-          </a:p>
-        </p:txBody>
-      </p:sp>
-    </p:spTree>
-  </p:cSld>
-  <p:clrMapOvr>
-    <a:masterClrMapping/>
-  </p:clrMapOvr>
-</p:notes>
-</file>
-
-<file path=ppt/notesSlides/notesSlide4.xml><?xml version="1.0" encoding="utf-8"?>
-<p:notes xmlns:a="http://schemas.openxmlformats.org/drawingml/2006/main" xmlns:p="http://schemas.openxmlformats.org/presentationml/2006/main" xmlns:r="http://schemas.openxmlformats.org/officeDocument/2006/relationships">
-  <p:cSld>
-    <p:spTree>
-      <p:nvGrpSpPr>
-        <p:cNvPr id="1" name=""/>
-        <p:cNvGrpSpPr/>
-        <p:nvPr/>
-      </p:nvGrpSpPr>
-      <p:grpSpPr>
-        <a:xfrm>
-          <a:off x="0" y="0"/>
-          <a:ext cx="0" cy="0"/>
-          <a:chOff x="0" y="0"/>
-          <a:chExt cx="0" cy="0"/>
-        </a:xfrm>
-      </p:grpSpPr>
-      <p:sp>
-        <p:nvSpPr>
-          <p:cNvPr id="2" name="讲课提示"/>
-          <p:cNvSpPr txBox="1"/>
-          <p:nvPr/>
-        </p:nvSpPr>
-        <p:spPr>
-          <a:xfrm>
-            <a:off x="457200" y="457200"/>
-            <a:ext cx="6858000" cy="4800600"/>
-          </a:xfrm>
-          <a:prstGeom prst="rect">
-            <a:avLst/>
-          </a:prstGeom>
-        </p:spPr>
-        <p:txBody>
-          <a:bodyPr wrap="square"/>
-          <a:lstStyle/>
-          <a:p>
-            <a:r>
-              <a:rPr lang="zh-CN" dirty="0"/>
-              <a:t>第 93 节 · ★ 应用、模型与迁移三步曲</a:t>
-            </a:r>
-          </a:p>
-          <a:p>
-            <a:r>
-              <a:rPr lang="zh-CN" dirty="0"/>
-              <a:t>单元 18 · Django 入门 · W23</a:t>
-            </a:r>
-          </a:p>
-          <a:p>
-            <a:r>
-              <a:rPr lang="zh-CN" dirty="0"/>
-              <a:t/>
-            </a:r>
-          </a:p>
-          <a:p>
-            <a:r>
-              <a:rPr lang="zh-CN" dirty="0"/>
-              <a:t>学习目标：定义 Topic / Entry 模型；掌握「改模型 → makemigrations → migrate」三步</a:t>
-            </a:r>
-          </a:p>
-          <a:p>
-            <a:r>
-              <a:rPr lang="zh-CN" dirty="0"/>
-              <a:t/>
-            </a:r>
-          </a:p>
-          <a:p>
-            <a:r>
-              <a:rPr lang="zh-CN" dirty="0"/>
-              <a:t>课堂实操（40 分钟，不看答案）：</a:t>
-            </a:r>
-          </a:p>
-          <a:p>
-            <a:r>
-              <a:rPr lang="zh-CN" dirty="0"/>
-              <a:t>· 改一次模型跑一遍三步曲</a:t>
-            </a:r>
-          </a:p>
-          <a:p>
-            <a:r>
-              <a:rPr lang="zh-CN" dirty="0"/>
-              <a:t>· 故意改错 on_delete 看报错</a:t>
-            </a:r>
-          </a:p>
-          <a:p>
-            <a:r>
-              <a:rPr lang="zh-CN" dirty="0"/>
-              <a:t/>
-            </a:r>
-          </a:p>
-          <a:p>
-            <a:r>
-              <a:rPr lang="zh-CN" dirty="0"/>
-              <a:t>课后作业：</a:t>
-            </a:r>
-          </a:p>
-          <a:p>
-            <a:r>
-              <a:rPr lang="zh-CN" dirty="0"/>
-              <a:t>· 产出：能进管理后台看到 Topic 和 Entry</a:t>
-            </a:r>
-          </a:p>
-          <a:p>
-            <a:r>
-              <a:rPr lang="zh-CN" dirty="0"/>
-              <a:t/>
-            </a:r>
-          </a:p>
-          <a:p>
-            <a:r>
-              <a:rPr lang="zh-CN" dirty="0"/>
-              <a:t>节奏：讲 20 分钟 → 学员自己敲 40 分钟（不看答案）→ 对讲评自查 20 分钟 → 写作业 10 分钟。</a:t>
-            </a:r>
-          </a:p>
-        </p:txBody>
-      </p:sp>
-      <p:sp>
-        <p:nvSpPr>
-          <p:cNvPr id="2" name="讲课提示"/>
-          <p:cNvSpPr txBox="1"/>
-          <p:nvPr/>
-        </p:nvSpPr>
-        <p:spPr>
-          <a:xfrm>
-            <a:off x="457200" y="457200"/>
-            <a:ext cx="6858000" cy="4800600"/>
-          </a:xfrm>
-          <a:prstGeom prst="rect">
-            <a:avLst/>
-          </a:prstGeom>
-        </p:spPr>
-        <p:txBody>
-          <a:bodyPr wrap="square"/>
-          <a:lstStyle/>
-          <a:p>
-            <a:r>
-              <a:rPr lang="zh-CN" dirty="0"/>
-              <a:t>第 93 节 · ★ 应用、模型与迁移三步曲</a:t>
-            </a:r>
-          </a:p>
-          <a:p>
-            <a:r>
-              <a:rPr lang="zh-CN" dirty="0"/>
-              <a:t>单元 18 · Django 入门 · W23</a:t>
-            </a:r>
-          </a:p>
-          <a:p>
-            <a:r>
-              <a:rPr lang="zh-CN" dirty="0"/>
-              <a:t/>
-            </a:r>
-          </a:p>
-          <a:p>
-            <a:r>
-              <a:rPr lang="zh-CN" dirty="0"/>
-              <a:t>学习目标：定义 Topic / Entry 模型；掌握「改模型 → makemigrations → migrate」三步</a:t>
-            </a:r>
-          </a:p>
-          <a:p>
-            <a:r>
-              <a:rPr lang="zh-CN" dirty="0"/>
-              <a:t/>
-            </a:r>
-          </a:p>
-          <a:p>
-            <a:r>
-              <a:rPr lang="zh-CN" dirty="0"/>
-              <a:t>课堂实操（40 分钟，不看答案）：</a:t>
-            </a:r>
-          </a:p>
-          <a:p>
-            <a:r>
-              <a:rPr lang="zh-CN" dirty="0"/>
-              <a:t>· 改一次模型跑一遍三步曲</a:t>
-            </a:r>
-          </a:p>
-          <a:p>
-            <a:r>
-              <a:rPr lang="zh-CN" dirty="0"/>
-              <a:t>· 故意改错 on_delete 看报错</a:t>
-            </a:r>
-          </a:p>
-          <a:p>
-            <a:r>
-              <a:rPr lang="zh-CN" dirty="0"/>
-              <a:t/>
-            </a:r>
-          </a:p>
-          <a:p>
-            <a:r>
-              <a:rPr lang="zh-CN" dirty="0"/>
-              <a:t>课后作业：</a:t>
-            </a:r>
-          </a:p>
-          <a:p>
-            <a:r>
-              <a:rPr lang="zh-CN" dirty="0"/>
-              <a:t>· 产出：能进管理后台看到 Topic 和 Entry</a:t>
-            </a:r>
-          </a:p>
-          <a:p>
-            <a:r>
-              <a:rPr lang="zh-CN" dirty="0"/>
-              <a:t/>
-            </a:r>
-          </a:p>
-          <a:p>
-            <a:r>
-              <a:rPr lang="zh-CN" dirty="0"/>
-              <a:t>节奏：讲 20 分钟 → 学员自己敲 40 分钟（不看答案）→ 对讲评自查 20 分钟 → 写作业 10 分钟。</a:t>
-            </a:r>
-          </a:p>
-        </p:txBody>
-      </p:sp>
-    </p:spTree>
-  </p:cSld>
-  <p:clrMapOvr>
-    <a:masterClrMapping/>
-  </p:clrMapOvr>
-</p:notes>
-</file>
-
-<file path=ppt/notesSlides/notesSlide5.xml><?xml version="1.0" encoding="utf-8"?>
-<p:notes xmlns:a="http://schemas.openxmlformats.org/drawingml/2006/main" xmlns:p="http://schemas.openxmlformats.org/presentationml/2006/main" xmlns:r="http://schemas.openxmlformats.org/officeDocument/2006/relationships">
-  <p:cSld>
-    <p:spTree>
-      <p:nvGrpSpPr>
-        <p:cNvPr id="1" name=""/>
-        <p:cNvGrpSpPr/>
-        <p:nvPr/>
-      </p:nvGrpSpPr>
-      <p:grpSpPr>
-        <a:xfrm>
-          <a:off x="0" y="0"/>
-          <a:ext cx="0" cy="0"/>
-          <a:chOff x="0" y="0"/>
-          <a:chExt cx="0" cy="0"/>
-        </a:xfrm>
-      </p:grpSpPr>
-      <p:sp>
-        <p:nvSpPr>
-          <p:cNvPr id="2" name="讲课提示"/>
-          <p:cNvSpPr txBox="1"/>
-          <p:nvPr/>
-        </p:nvSpPr>
-        <p:spPr>
-          <a:xfrm>
-            <a:off x="457200" y="457200"/>
-            <a:ext cx="6858000" cy="4800600"/>
-          </a:xfrm>
-          <a:prstGeom prst="rect">
-            <a:avLst/>
-          </a:prstGeom>
-        </p:spPr>
-        <p:txBody>
-          <a:bodyPr wrap="square"/>
-          <a:lstStyle/>
-          <a:p>
-            <a:r>
-              <a:rPr lang="zh-CN" dirty="0"/>
-              <a:t>第 93 节 · 核心知识点：★ 应用、模型与迁移三步曲</a:t>
-            </a:r>
-          </a:p>
-          <a:p>
-            <a:r>
-              <a:rPr lang="zh-CN" dirty="0"/>
-              <a:t/>
-            </a:r>
-          </a:p>
-          <a:p>
-            <a:r>
-              <a:rPr lang="zh-CN" dirty="0"/>
-              <a:t>讲这一页时：先让学生说出上节课的结论，再逐块讲要点。</a:t>
-            </a:r>
-          </a:p>
-          <a:p>
-            <a:r>
-              <a:rPr lang="zh-CN" dirty="0"/>
-              <a:t>每讲完一块，问一句「这一步如果写错了，报错会长什么样？」——把错误提前讲。</a:t>
-            </a:r>
-          </a:p>
-          <a:p>
-            <a:r>
-              <a:rPr lang="zh-CN" dirty="0"/>
-              <a:t/>
-            </a:r>
-          </a:p>
-          <a:p>
-            <a:r>
-              <a:rPr lang="zh-CN" dirty="0"/>
-              <a:t>本节目标：定义 Topic / Entry 模型；掌握「改模型 → makemigrations → migrate」三步</a:t>
-            </a:r>
-          </a:p>
-          <a:p>
-            <a:r>
-              <a:rPr lang="zh-CN" dirty="0"/>
-              <a:t/>
-            </a:r>
-          </a:p>
-          <a:p>
-            <a:r>
-              <a:rPr lang="zh-CN" dirty="0"/>
-              <a:t>看不到懂的地方，回讲义对应小节读一遍，再回来对着这页复述一次——能讲出来才算真懂。</a:t>
-            </a:r>
-          </a:p>
-        </p:txBody>
-      </p:sp>
-      <p:sp>
-        <p:nvSpPr>
-          <p:cNvPr id="2" name="讲课提示"/>
-          <p:cNvSpPr txBox="1"/>
-          <p:nvPr/>
-        </p:nvSpPr>
-        <p:spPr>
-          <a:xfrm>
-            <a:off x="457200" y="457200"/>
-            <a:ext cx="6858000" cy="4800600"/>
-          </a:xfrm>
-          <a:prstGeom prst="rect">
-            <a:avLst/>
-          </a:prstGeom>
-        </p:spPr>
-        <p:txBody>
-          <a:bodyPr wrap="square"/>
-          <a:lstStyle/>
-          <a:p>
-            <a:r>
-              <a:rPr lang="zh-CN" dirty="0"/>
-              <a:t>第 93 节 · 核心知识点：★ 应用、模型与迁移三步曲</a:t>
-            </a:r>
-          </a:p>
-          <a:p>
-            <a:r>
-              <a:rPr lang="zh-CN" dirty="0"/>
-              <a:t/>
-            </a:r>
-          </a:p>
-          <a:p>
-            <a:r>
-              <a:rPr lang="zh-CN" dirty="0"/>
-              <a:t>讲这一页时：先让学生说出上节课的结论，再逐块讲要点。</a:t>
-            </a:r>
-          </a:p>
-          <a:p>
-            <a:r>
-              <a:rPr lang="zh-CN" dirty="0"/>
-              <a:t>每讲完一块，问一句「这一步如果写错了，报错会长什么样？」——把错误提前讲。</a:t>
-            </a:r>
-          </a:p>
-          <a:p>
-            <a:r>
-              <a:rPr lang="zh-CN" dirty="0"/>
-              <a:t/>
-            </a:r>
-          </a:p>
-          <a:p>
-            <a:r>
-              <a:rPr lang="zh-CN" dirty="0"/>
-              <a:t>本节目标：定义 Topic / Entry 模型；掌握「改模型 → makemigrations → migrate」三步</a:t>
-            </a:r>
-          </a:p>
-          <a:p>
-            <a:r>
-              <a:rPr lang="zh-CN" dirty="0"/>
-              <a:t/>
-            </a:r>
-          </a:p>
-          <a:p>
-            <a:r>
-              <a:rPr lang="zh-CN" dirty="0"/>
-              <a:t>看不到懂的地方，回讲义对应小节读一遍，再回来对着这页复述一次——能讲出来才算真懂。</a:t>
-            </a:r>
-          </a:p>
-        </p:txBody>
-      </p:sp>
-    </p:spTree>
-  </p:cSld>
-  <p:clrMapOvr>
-    <a:masterClrMapping/>
-  </p:clrMapOvr>
-</p:notes>
-</file>
-
-<file path=ppt/notesSlides/notesSlide6.xml><?xml version="1.0" encoding="utf-8"?>
-<p:notes xmlns:a="http://schemas.openxmlformats.org/drawingml/2006/main" xmlns:p="http://schemas.openxmlformats.org/presentationml/2006/main" xmlns:r="http://schemas.openxmlformats.org/officeDocument/2006/relationships">
-  <p:cSld>
-    <p:spTree>
-      <p:nvGrpSpPr>
-        <p:cNvPr id="1" name=""/>
-        <p:cNvGrpSpPr/>
-        <p:nvPr/>
-      </p:nvGrpSpPr>
-      <p:grpSpPr>
-        <a:xfrm>
-          <a:off x="0" y="0"/>
-          <a:ext cx="0" cy="0"/>
-          <a:chOff x="0" y="0"/>
-          <a:chExt cx="0" cy="0"/>
-        </a:xfrm>
-      </p:grpSpPr>
-      <p:sp>
-        <p:nvSpPr>
-          <p:cNvPr id="2" name="讲课提示"/>
-          <p:cNvSpPr txBox="1"/>
-          <p:nvPr/>
-        </p:nvSpPr>
-        <p:spPr>
-          <a:xfrm>
-            <a:off x="457200" y="457200"/>
-            <a:ext cx="6858000" cy="4800600"/>
-          </a:xfrm>
-          <a:prstGeom prst="rect">
-            <a:avLst/>
-          </a:prstGeom>
-        </p:spPr>
-        <p:txBody>
-          <a:bodyPr wrap="square"/>
-          <a:lstStyle/>
-          <a:p>
-            <a:r>
-              <a:rPr lang="zh-CN" dirty="0"/>
-              <a:t>第 94 节 · ★ 一次请求的旅程：URL → 视图 → 模板</a:t>
-            </a:r>
-          </a:p>
-          <a:p>
-            <a:r>
-              <a:rPr lang="zh-CN" dirty="0"/>
-              <a:t>单元 18 · Django 入门 · W23–W24</a:t>
-            </a:r>
-          </a:p>
-          <a:p>
-            <a:r>
-              <a:rPr lang="zh-CN" dirty="0"/>
-              <a:t/>
-            </a:r>
-          </a:p>
-          <a:p>
-            <a:r>
-              <a:rPr lang="zh-CN" dirty="0"/>
-              <a:t>学习目标：能画完整请求链路图；会映射 URL、写视图、渲染模板</a:t>
-            </a:r>
-          </a:p>
-          <a:p>
-            <a:r>
-              <a:rPr lang="zh-CN" dirty="0"/>
-              <a:t/>
-            </a:r>
-          </a:p>
-          <a:p>
-            <a:r>
-              <a:rPr lang="zh-CN" dirty="0"/>
-              <a:t>课堂实操（40 分钟，不看答案）：</a:t>
-            </a:r>
-          </a:p>
-          <a:p>
-            <a:r>
-              <a:rPr lang="zh-CN" dirty="0"/>
-              <a:t>· 现场加一条 URL 并访问它</a:t>
-            </a:r>
-          </a:p>
-          <a:p>
-            <a:r>
-              <a:rPr lang="zh-CN" dirty="0"/>
-              <a:t>· 故意把视图里的 context 删掉，看模板报什么错</a:t>
-            </a:r>
-          </a:p>
-          <a:p>
-            <a:r>
-              <a:rPr lang="zh-CN" dirty="0"/>
-              <a:t/>
-            </a:r>
-          </a:p>
-          <a:p>
-            <a:r>
-              <a:rPr lang="zh-CN" dirty="0"/>
-              <a:t>课后作业：</a:t>
-            </a:r>
-          </a:p>
-          <a:p>
-            <a:r>
-              <a:rPr lang="zh-CN" dirty="0"/>
-              <a:t>· ★ 产出：一张自己画的请求链路图</a:t>
-            </a:r>
-          </a:p>
-          <a:p>
-            <a:r>
-              <a:rPr lang="zh-CN" dirty="0"/>
-              <a:t/>
-            </a:r>
-          </a:p>
-          <a:p>
-            <a:r>
-              <a:rPr lang="zh-CN" dirty="0"/>
-              <a:t>节奏：讲 20 分钟 → 学员自己敲 40 分钟（不看答案）→ 对讲评自查 20 分钟 → 写作业 10 分钟。</a:t>
-            </a:r>
-          </a:p>
-        </p:txBody>
-      </p:sp>
-      <p:sp>
-        <p:nvSpPr>
-          <p:cNvPr id="2" name="讲课提示"/>
-          <p:cNvSpPr txBox="1"/>
-          <p:nvPr/>
-        </p:nvSpPr>
-        <p:spPr>
-          <a:xfrm>
-            <a:off x="457200" y="457200"/>
-            <a:ext cx="6858000" cy="4800600"/>
-          </a:xfrm>
-          <a:prstGeom prst="rect">
-            <a:avLst/>
-          </a:prstGeom>
-        </p:spPr>
-        <p:txBody>
-          <a:bodyPr wrap="square"/>
-          <a:lstStyle/>
-          <a:p>
-            <a:r>
-              <a:rPr lang="zh-CN" dirty="0"/>
-              <a:t>第 94 节 · ★ 一次请求的旅程：URL → 视图 → 模板</a:t>
-            </a:r>
-          </a:p>
-          <a:p>
-            <a:r>
-              <a:rPr lang="zh-CN" dirty="0"/>
-              <a:t>单元 18 · Django 入门 · W23–W24</a:t>
-            </a:r>
-          </a:p>
-          <a:p>
-            <a:r>
-              <a:rPr lang="zh-CN" dirty="0"/>
-              <a:t/>
-            </a:r>
-          </a:p>
-          <a:p>
-            <a:r>
-              <a:rPr lang="zh-CN" dirty="0"/>
-              <a:t>学习目标：能画完整请求链路图；会映射 URL、写视图、渲染模板</a:t>
-            </a:r>
-          </a:p>
-          <a:p>
-            <a:r>
-              <a:rPr lang="zh-CN" dirty="0"/>
-              <a:t/>
-            </a:r>
-          </a:p>
-          <a:p>
-            <a:r>
-              <a:rPr lang="zh-CN" dirty="0"/>
-              <a:t>课堂实操（40 分钟，不看答案）：</a:t>
-            </a:r>
-          </a:p>
-          <a:p>
-            <a:r>
-              <a:rPr lang="zh-CN" dirty="0"/>
-              <a:t>· 现场加一条 URL 并访问它</a:t>
-            </a:r>
-          </a:p>
-          <a:p>
-            <a:r>
-              <a:rPr lang="zh-CN" dirty="0"/>
-              <a:t>· 故意把视图里的 context 删掉，看模板报什么错</a:t>
-            </a:r>
-          </a:p>
-          <a:p>
-            <a:r>
-              <a:rPr lang="zh-CN" dirty="0"/>
-              <a:t/>
-            </a:r>
-          </a:p>
-          <a:p>
-            <a:r>
-              <a:rPr lang="zh-CN" dirty="0"/>
-              <a:t>课后作业：</a:t>
-            </a:r>
-          </a:p>
-          <a:p>
-            <a:r>
-              <a:rPr lang="zh-CN" dirty="0"/>
-              <a:t>· ★ 产出：一张自己画的请求链路图</a:t>
-            </a:r>
-          </a:p>
-          <a:p>
-            <a:r>
-              <a:rPr lang="zh-CN" dirty="0"/>
-              <a:t/>
-            </a:r>
-          </a:p>
-          <a:p>
-            <a:r>
-              <a:rPr lang="zh-CN" dirty="0"/>
-              <a:t>节奏：讲 20 分钟 → 学员自己敲 40 分钟（不看答案）→ 对讲评自查 20 分钟 → 写作业 10 分钟。</a:t>
-            </a:r>
-          </a:p>
-        </p:txBody>
-      </p:sp>
-    </p:spTree>
-  </p:cSld>
-  <p:clrMapOvr>
-    <a:masterClrMapping/>
-  </p:clrMapOvr>
-</p:notes>
-</file>
-
-<file path=ppt/notesSlides/notesSlide7.xml><?xml version="1.0" encoding="utf-8"?>
-<p:notes xmlns:a="http://schemas.openxmlformats.org/drawingml/2006/main" xmlns:p="http://schemas.openxmlformats.org/presentationml/2006/main" xmlns:r="http://schemas.openxmlformats.org/officeDocument/2006/relationships">
-  <p:cSld>
-    <p:spTree>
-      <p:nvGrpSpPr>
-        <p:cNvPr id="1" name=""/>
-        <p:cNvGrpSpPr/>
-        <p:nvPr/>
-      </p:nvGrpSpPr>
-      <p:grpSpPr>
-        <a:xfrm>
-          <a:off x="0" y="0"/>
-          <a:ext cx="0" cy="0"/>
-          <a:chOff x="0" y="0"/>
-          <a:chExt cx="0" cy="0"/>
-        </a:xfrm>
-      </p:grpSpPr>
-      <p:sp>
-        <p:nvSpPr>
-          <p:cNvPr id="2" name="讲课提示"/>
-          <p:cNvSpPr txBox="1"/>
-          <p:nvPr/>
-        </p:nvSpPr>
-        <p:spPr>
-          <a:xfrm>
-            <a:off x="457200" y="457200"/>
-            <a:ext cx="6858000" cy="4800600"/>
-          </a:xfrm>
-          <a:prstGeom prst="rect">
-            <a:avLst/>
-          </a:prstGeom>
-        </p:spPr>
-        <p:txBody>
-          <a:bodyPr wrap="square"/>
-          <a:lstStyle/>
-          <a:p>
-            <a:r>
-              <a:rPr lang="zh-CN" dirty="0"/>
-              <a:t>第 94 节 · 核心知识点：★ 一次请求的旅程：URL → 视图 → 模板</a:t>
-            </a:r>
-          </a:p>
-          <a:p>
-            <a:r>
-              <a:rPr lang="zh-CN" dirty="0"/>
-              <a:t/>
-            </a:r>
-          </a:p>
-          <a:p>
-            <a:r>
-              <a:rPr lang="zh-CN" dirty="0"/>
-              <a:t>讲这一页时：先让学生说出上节课的结论，再逐块讲要点。</a:t>
-            </a:r>
-          </a:p>
-          <a:p>
-            <a:r>
-              <a:rPr lang="zh-CN" dirty="0"/>
-              <a:t>每讲完一块，问一句「这一步如果写错了，报错会长什么样？」——把错误提前讲。</a:t>
-            </a:r>
-          </a:p>
-          <a:p>
-            <a:r>
-              <a:rPr lang="zh-CN" dirty="0"/>
-              <a:t/>
-            </a:r>
-          </a:p>
-          <a:p>
-            <a:r>
-              <a:rPr lang="zh-CN" dirty="0"/>
-              <a:t>本节目标：能画完整请求链路图；会映射 URL、写视图、渲染模板</a:t>
-            </a:r>
-          </a:p>
-          <a:p>
-            <a:r>
-              <a:rPr lang="zh-CN" dirty="0"/>
-              <a:t/>
-            </a:r>
-          </a:p>
-          <a:p>
-            <a:r>
-              <a:rPr lang="zh-CN" dirty="0"/>
-              <a:t>看不到懂的地方，回讲义对应小节读一遍，再回来对着这页复述一次——能讲出来才算真懂。</a:t>
-            </a:r>
-          </a:p>
-        </p:txBody>
-      </p:sp>
-      <p:sp>
-        <p:nvSpPr>
-          <p:cNvPr id="2" name="讲课提示"/>
-          <p:cNvSpPr txBox="1"/>
-          <p:nvPr/>
-        </p:nvSpPr>
-        <p:spPr>
-          <a:xfrm>
-            <a:off x="457200" y="457200"/>
-            <a:ext cx="6858000" cy="4800600"/>
-          </a:xfrm>
-          <a:prstGeom prst="rect">
-            <a:avLst/>
-          </a:prstGeom>
-        </p:spPr>
-        <p:txBody>
-          <a:bodyPr wrap="square"/>
-          <a:lstStyle/>
-          <a:p>
-            <a:r>
-              <a:rPr lang="zh-CN" dirty="0"/>
-              <a:t>第 94 节 · 核心知识点：★ 一次请求的旅程：URL → 视图 → 模板</a:t>
-            </a:r>
-          </a:p>
-          <a:p>
-            <a:r>
-              <a:rPr lang="zh-CN" dirty="0"/>
-              <a:t/>
-            </a:r>
-          </a:p>
-          <a:p>
-            <a:r>
-              <a:rPr lang="zh-CN" dirty="0"/>
-              <a:t>讲这一页时：先让学生说出上节课的结论，再逐块讲要点。</a:t>
-            </a:r>
-          </a:p>
-          <a:p>
-            <a:r>
-              <a:rPr lang="zh-CN" dirty="0"/>
-              <a:t>每讲完一块，问一句「这一步如果写错了，报错会长什么样？」——把错误提前讲。</a:t>
-            </a:r>
-          </a:p>
-          <a:p>
-            <a:r>
-              <a:rPr lang="zh-CN" dirty="0"/>
-              <a:t/>
-            </a:r>
-          </a:p>
-          <a:p>
-            <a:r>
-              <a:rPr lang="zh-CN" dirty="0"/>
-              <a:t>本节目标：能画完整请求链路图；会映射 URL、写视图、渲染模板</a:t>
-            </a:r>
-          </a:p>
-          <a:p>
-            <a:r>
-              <a:rPr lang="zh-CN" dirty="0"/>
-              <a:t/>
-            </a:r>
-          </a:p>
-          <a:p>
-            <a:r>
-              <a:rPr lang="zh-CN" dirty="0"/>
-              <a:t>看不到懂的地方，回讲义对应小节读一遍，再回来对着这页复述一次——能讲出来才算真懂。</a:t>
-            </a:r>
-          </a:p>
-        </p:txBody>
-      </p:sp>
-    </p:spTree>
-  </p:cSld>
-  <p:clrMapOvr>
-    <a:masterClrMapping/>
-  </p:clrMapOvr>
-</p:notes>
-</file>
-
-<file path=ppt/notesSlides/notesSlide8.xml><?xml version="1.0" encoding="utf-8"?>
-<p:notes xmlns:a="http://schemas.openxmlformats.org/drawingml/2006/main" xmlns:p="http://schemas.openxmlformats.org/presentationml/2006/main" xmlns:r="http://schemas.openxmlformats.org/officeDocument/2006/relationships">
-  <p:cSld>
-    <p:spTree>
-      <p:nvGrpSpPr>
-        <p:cNvPr id="1" name=""/>
-        <p:cNvGrpSpPr/>
-        <p:nvPr/>
-      </p:nvGrpSpPr>
-      <p:grpSpPr>
-        <a:xfrm>
-          <a:off x="0" y="0"/>
-          <a:ext cx="0" cy="0"/>
-          <a:chOff x="0" y="0"/>
-          <a:chExt cx="0" cy="0"/>
-        </a:xfrm>
-      </p:grpSpPr>
-      <p:sp>
-        <p:nvSpPr>
-          <p:cNvPr id="2" name="讲课提示"/>
-          <p:cNvSpPr txBox="1"/>
-          <p:nvPr/>
-        </p:nvSpPr>
-        <p:spPr>
-          <a:xfrm>
-            <a:off x="457200" y="457200"/>
-            <a:ext cx="6858000" cy="4800600"/>
-          </a:xfrm>
-          <a:prstGeom prst="rect">
-            <a:avLst/>
-          </a:prstGeom>
-        </p:spPr>
-        <p:txBody>
-          <a:bodyPr wrap="square"/>
-          <a:lstStyle/>
-          <a:p>
-            <a:r>
-              <a:rPr lang="zh-CN" dirty="0"/>
-              <a:t>第 95 节 · 模板语法与模板继承</a:t>
-            </a:r>
-          </a:p>
-          <a:p>
-            <a:r>
-              <a:rPr lang="zh-CN" dirty="0"/>
-              <a:t>单元 18 · Django 入门 · W24</a:t>
-            </a:r>
-          </a:p>
-          <a:p>
-            <a:r>
-              <a:rPr lang="zh-CN" dirty="0"/>
-              <a:t/>
-            </a:r>
-          </a:p>
-          <a:p>
-            <a:r>
-              <a:rPr lang="zh-CN" dirty="0"/>
-              <a:t>学习目标：会用 `{{ }}`、`{% for %}`、`{% url %}`；会用 base.html 做模板继承</a:t>
-            </a:r>
-          </a:p>
-          <a:p>
-            <a:r>
-              <a:rPr lang="zh-CN" dirty="0"/>
-              <a:t/>
-            </a:r>
-          </a:p>
-          <a:p>
-            <a:r>
-              <a:rPr lang="zh-CN" dirty="0"/>
-              <a:t>课堂实操（40 分钟，不看答案）：</a:t>
-            </a:r>
-          </a:p>
-          <a:p>
-            <a:r>
-              <a:rPr lang="zh-CN" dirty="0"/>
-              <a:t>· 把重复的导航栏抽进 base.html</a:t>
-            </a:r>
-          </a:p>
-          <a:p>
-            <a:r>
-              <a:rPr lang="zh-CN" dirty="0"/>
-              <a:t>· 故意写错 url 名字看 NoReverseMatch</a:t>
-            </a:r>
-          </a:p>
-          <a:p>
-            <a:r>
-              <a:rPr lang="zh-CN" dirty="0"/>
-              <a:t/>
-            </a:r>
-          </a:p>
-          <a:p>
-            <a:r>
-              <a:rPr lang="zh-CN" dirty="0"/>
-              <a:t>课后作业：</a:t>
-            </a:r>
-          </a:p>
-          <a:p>
-            <a:r>
-              <a:rPr lang="zh-CN" dirty="0"/>
-              <a:t>· 完成教材 18.4 全部动手练</a:t>
-            </a:r>
-          </a:p>
-          <a:p>
-            <a:r>
-              <a:rPr lang="zh-CN" dirty="0"/>
-              <a:t/>
-            </a:r>
-          </a:p>
-          <a:p>
-            <a:r>
-              <a:rPr lang="zh-CN" dirty="0"/>
-              <a:t>节奏：讲 20 分钟 → 学员自己敲 40 分钟（不看答案）→ 对讲评自查 20 分钟 → 写作业 10 分钟。</a:t>
-            </a:r>
-          </a:p>
-        </p:txBody>
-      </p:sp>
-      <p:sp>
-        <p:nvSpPr>
-          <p:cNvPr id="2" name="讲课提示"/>
-          <p:cNvSpPr txBox="1"/>
-          <p:nvPr/>
-        </p:nvSpPr>
-        <p:spPr>
-          <a:xfrm>
-            <a:off x="457200" y="457200"/>
-            <a:ext cx="6858000" cy="4800600"/>
-          </a:xfrm>
-          <a:prstGeom prst="rect">
-            <a:avLst/>
-          </a:prstGeom>
-        </p:spPr>
-        <p:txBody>
-          <a:bodyPr wrap="square"/>
-          <a:lstStyle/>
-          <a:p>
-            <a:r>
-              <a:rPr lang="zh-CN" dirty="0"/>
-              <a:t>第 95 节 · 模板语法与模板继承</a:t>
-            </a:r>
-          </a:p>
-          <a:p>
-            <a:r>
-              <a:rPr lang="zh-CN" dirty="0"/>
-              <a:t>单元 18 · Django 入门 · W24</a:t>
-            </a:r>
-          </a:p>
-          <a:p>
-            <a:r>
-              <a:rPr lang="zh-CN" dirty="0"/>
-              <a:t/>
-            </a:r>
-          </a:p>
-          <a:p>
-            <a:r>
-              <a:rPr lang="zh-CN" dirty="0"/>
-              <a:t>学习目标：会用 `{{ }}`、`{% for %}`、`{% url %}`；会用 base.html 做模板继承</a:t>
-            </a:r>
-          </a:p>
-          <a:p>
-            <a:r>
-              <a:rPr lang="zh-CN" dirty="0"/>
-              <a:t/>
-            </a:r>
-          </a:p>
-          <a:p>
-            <a:r>
-              <a:rPr lang="zh-CN" dirty="0"/>
-              <a:t>课堂实操（40 分钟，不看答案）：</a:t>
-            </a:r>
-          </a:p>
-          <a:p>
-            <a:r>
-              <a:rPr lang="zh-CN" dirty="0"/>
-              <a:t>· 把重复的导航栏抽进 base.html</a:t>
-            </a:r>
-          </a:p>
-          <a:p>
-            <a:r>
-              <a:rPr lang="zh-CN" dirty="0"/>
-              <a:t>· 故意写错 url 名字看 NoReverseMatch</a:t>
-            </a:r>
-          </a:p>
-          <a:p>
-            <a:r>
-              <a:rPr lang="zh-CN" dirty="0"/>
-              <a:t/>
-            </a:r>
-          </a:p>
-          <a:p>
-            <a:r>
-              <a:rPr lang="zh-CN" dirty="0"/>
-              <a:t>课后作业：</a:t>
-            </a:r>
-          </a:p>
-          <a:p>
-            <a:r>
-              <a:rPr lang="zh-CN" dirty="0"/>
-              <a:t>· 完成教材 18.4 全部动手练</a:t>
-            </a:r>
-          </a:p>
-          <a:p>
-            <a:r>
-              <a:rPr lang="zh-CN" dirty="0"/>
-              <a:t/>
-            </a:r>
-          </a:p>
-          <a:p>
-            <a:r>
-              <a:rPr lang="zh-CN" dirty="0"/>
-              <a:t>节奏：讲 20 分钟 → 学员自己敲 40 分钟（不看答案）→ 对讲评自查 20 分钟 → 写作业 10 分钟。</a:t>
-            </a:r>
-          </a:p>
-        </p:txBody>
-      </p:sp>
-    </p:spTree>
-  </p:cSld>
-  <p:clrMapOvr>
-    <a:masterClrMapping/>
-  </p:clrMapOvr>
-</p:notes>
-</file>
-
-<file path=ppt/notesSlides/notesSlide9.xml><?xml version="1.0" encoding="utf-8"?>
-<p:notes xmlns:a="http://schemas.openxmlformats.org/drawingml/2006/main" xmlns:p="http://schemas.openxmlformats.org/presentationml/2006/main" xmlns:r="http://schemas.openxmlformats.org/officeDocument/2006/relationships">
-  <p:cSld>
-    <p:spTree>
-      <p:nvGrpSpPr>
-        <p:cNvPr id="1" name=""/>
-        <p:cNvGrpSpPr/>
-        <p:nvPr/>
-      </p:nvGrpSpPr>
-      <p:grpSpPr>
-        <a:xfrm>
-          <a:off x="0" y="0"/>
-          <a:ext cx="0" cy="0"/>
-          <a:chOff x="0" y="0"/>
-          <a:chExt cx="0" cy="0"/>
-        </a:xfrm>
-      </p:grpSpPr>
-      <p:sp>
-        <p:nvSpPr>
-          <p:cNvPr id="2" name="讲课提示"/>
-          <p:cNvSpPr txBox="1"/>
-          <p:nvPr/>
-        </p:nvSpPr>
-        <p:spPr>
-          <a:xfrm>
-            <a:off x="457200" y="457200"/>
-            <a:ext cx="6858000" cy="4800600"/>
-          </a:xfrm>
-          <a:prstGeom prst="rect">
-            <a:avLst/>
-          </a:prstGeom>
-        </p:spPr>
-        <p:txBody>
-          <a:bodyPr wrap="square"/>
-          <a:lstStyle/>
-          <a:p>
-            <a:r>
-              <a:rPr lang="zh-CN" dirty="0"/>
-              <a:t>第 95 节 · 核心知识点：模板语法与模板继承</a:t>
-            </a:r>
-          </a:p>
-          <a:p>
-            <a:r>
-              <a:rPr lang="zh-CN" dirty="0"/>
-              <a:t/>
-            </a:r>
-          </a:p>
-          <a:p>
-            <a:r>
-              <a:rPr lang="zh-CN" dirty="0"/>
-              <a:t>讲这一页时：先让学生说出上节课的结论，再逐块讲要点。</a:t>
-            </a:r>
-          </a:p>
-          <a:p>
-            <a:r>
-              <a:rPr lang="zh-CN" dirty="0"/>
-              <a:t>每讲完一块，问一句「这一步如果写错了，报错会长什么样？」——把错误提前讲。</a:t>
-            </a:r>
-          </a:p>
-          <a:p>
-            <a:r>
-              <a:rPr lang="zh-CN" dirty="0"/>
-              <a:t/>
-            </a:r>
-          </a:p>
-          <a:p>
-            <a:r>
-              <a:rPr lang="zh-CN" dirty="0"/>
-              <a:t>本节目标：会用 `{{ }}`、`{% for %}`、`{% url %}`；会用 base.html 做模板继承</a:t>
-            </a:r>
-          </a:p>
-          <a:p>
-            <a:r>
-              <a:rPr lang="zh-CN" dirty="0"/>
-              <a:t/>
-            </a:r>
-          </a:p>
-          <a:p>
-            <a:r>
-              <a:rPr lang="zh-CN" dirty="0"/>
-              <a:t>看不到懂的地方，回讲义对应小节读一遍，再回来对着这页复述一次——能讲出来才算真懂。</a:t>
-            </a:r>
-          </a:p>
-        </p:txBody>
-      </p:sp>
-      <p:sp>
-        <p:nvSpPr>
-          <p:cNvPr id="2" name="讲课提示"/>
-          <p:cNvSpPr txBox="1"/>
-          <p:nvPr/>
-        </p:nvSpPr>
-        <p:spPr>
-          <a:xfrm>
-            <a:off x="457200" y="457200"/>
-            <a:ext cx="6858000" cy="4800600"/>
-          </a:xfrm>
-          <a:prstGeom prst="rect">
-            <a:avLst/>
-          </a:prstGeom>
-        </p:spPr>
-        <p:txBody>
-          <a:bodyPr wrap="square"/>
-          <a:lstStyle/>
-          <a:p>
-            <a:r>
-              <a:rPr lang="zh-CN" dirty="0"/>
-              <a:t>第 95 节 · 核心知识点：模板语法与模板继承</a:t>
-            </a:r>
-          </a:p>
-          <a:p>
-            <a:r>
-              <a:rPr lang="zh-CN" dirty="0"/>
-              <a:t/>
-            </a:r>
-          </a:p>
-          <a:p>
-            <a:r>
-              <a:rPr lang="zh-CN" dirty="0"/>
-              <a:t>讲这一页时：先让学生说出上节课的结论，再逐块讲要点。</a:t>
-            </a:r>
-          </a:p>
-          <a:p>
-            <a:r>
-              <a:rPr lang="zh-CN" dirty="0"/>
-              <a:t>每讲完一块，问一句「这一步如果写错了，报错会长什么样？」——把错误提前讲。</a:t>
-            </a:r>
-          </a:p>
-          <a:p>
-            <a:r>
-              <a:rPr lang="zh-CN" dirty="0"/>
-              <a:t/>
-            </a:r>
-          </a:p>
-          <a:p>
-            <a:r>
-              <a:rPr lang="zh-CN" dirty="0"/>
-              <a:t>本节目标：会用 `{{ }}`、`{% for %}`、`{% url %}`；会用 base.html 做模板继承</a:t>
-            </a:r>
-          </a:p>
-          <a:p>
-            <a:r>
-              <a:rPr lang="zh-CN" dirty="0"/>
-              <a:t/>
-            </a:r>
-          </a:p>
-          <a:p>
-            <a:r>
-              <a:rPr lang="zh-CN" dirty="0"/>
-              <a:t>看不到懂的地方，回讲义对应小节读一遍，再回来对着这页复述一次——能讲出来才算真懂。</a:t>
-            </a:r>
-          </a:p>
-        </p:txBody>
-      </p:sp>
-    </p:spTree>
-  </p:cSld>
-  <p:clrMapOvr>
-    <a:masterClrMapping/>
-  </p:clrMapOvr>
-</p:notes>
-</file>
-
 <file path=ppt/slideLayouts/slideLayout1.xml><?xml version="1.0" encoding="utf-8"?>
 <p:sldLayout xmlns:p="http://schemas.openxmlformats.org/presentationml/2006/main" xmlns:a="http://schemas.openxmlformats.org/drawingml/2006/main">
   <p:cSld name="DEFAULT">
@@ -3159,7 +557,7 @@
   <p:cSld>
     <p:spTree>
       <p:nvGrpSpPr>
-        <p:cNvPr id="1" name="" descr="&lt;Slide style={{ width: '1280px', height: '720px', backgroundColor: '#FAFCFE', padding: 0, position: 'relative', overflow: 'hidden' }}&gt;&#13;&#10;    &lt;Box style={{ position: 'absolute', left: 0, top: 0, width: '1280px', height: '150px', background: '#1F5FA8' }} /&gt;&#13;&#10;    &lt;Box style={{ position: 'absolute', left: 64, top: 34, width: '1152px', flexDirection: 'column' }}&gt;&#13;&#10;        &lt;Text style={{ fontSize: 15, fontWeight: 'bold', color: '#BFD9F2', letterSpacing: 2 }}&gt;阶段 2 · 单元 18&lt;/Text&gt;&#13;&#10;        &lt;Text style={{ fontSize: 38, fontWeight: 'bold', color: '#FFFFFF', marginTop: 6 }}&gt;Django 入门&lt;/Text&gt;&#13;&#10;    &lt;/Box&gt;&#13;&#10;    &lt;Box style={{ position: 'absolute', left: 64, top: 168, width: '1152px', height: 470 }}&gt;&#13;&#10;        &lt;svg width='1152' height='470' viewBox='0 0 1152 470'&gt;&#13;&#10;            &lt;text x='0' y='18' fontSize='15' fontWeight='bold' fill='#16232E' fontFamily='Microsoft YaHei'&gt;本单元共 6 节课&lt;/text&gt;&#13;&#10;            &lt;rect x='0' y='196' width='1152' height='38' rx='7' fill='#FFFFFF' /&gt;&lt;text x='16' y='221' fontSize='15' fontWeight='bold' fill='#1F5FA8' fontFamily='Microsoft YaHei'&gt;第 92 节&lt;/text&gt;&lt;text x='96' y='221' fontSize='15' fill='#16232E' fontFamily='Microsoft YaHei'&gt;★ 虚拟环境与 Django 项目&lt;/text&gt;&lt;text x='1080' y='221' fontSize='13' fill='#5A6B7A' textAnchor='end' fontFamily='Microsoft YaHei'&gt;W22–W23&lt;/text&gt;&lt;rect x='0' y='238' width='1152' height='38' rx='7' fill='#F2F7FD' /&gt;&lt;text x='16' y='263' fontSize='15' fontWeight='bold' fill='#1F5FA8' fontFamily='Microsoft YaHei'&gt;第 93 节&lt;/text&gt;&lt;text x='96' y='263' fontSize='15' fill='#16232E' fontFamily='Microsoft YaHei'&gt;★ 应用、模型与迁移三步曲&lt;/text&gt;&lt;text x='1080' y='263' fontSize='13' fill='#5A6B7A' textAnchor='end' fontFamily='Microsoft YaHei'&gt;W22–W23&lt;/text&gt;&lt;rect x='0' y='280' width='1152' height='38' rx='7' fill='#FFFFFF' /&gt;&lt;text x='16' y='305' fontSize='15' fontWeight='bold' fill='#1F5FA8' fontFamily='Microsoft YaHei'&gt;第 94 节&lt;/text&gt;&lt;text x='96' y='305' fontSize='15' fill='#16232E' fontFamily='Microsoft YaHei'&gt;★ 一次请求的旅程：URL → 视图 → 模板&lt;/text&gt;&lt;text x='1080' y='305' fontSize='13' fill='#5A6B7A' textAnchor='end' fontFamily='Microsoft YaHei'&gt;W22–W23&lt;/text&gt;&lt;rect x='0' y='322' width='1152' height='38' rx='7' fill='#F2F7FD' /&gt;&lt;text x='16' y='347' fontSize='15' fontWeight='bold' fill='#1F5FA8' fontFamily='Microsoft YaHei'&gt;第 95 节&lt;/text&gt;&lt;text x='96' y='347' fontSize='15' fill='#16232E' fontFamily='Microsoft YaHei'&gt;模板语法与模板继承&lt;/text&gt;&lt;text x='1080' y='347' fontSize='13' fill='#5A6B7A' textAnchor='end' fontFamily='Microsoft YaHei'&gt;W22–W23&lt;/text&gt;&lt;rect x='0' y='364' width='1152' height='38' rx='7' fill='#FFFFFF' /&gt;&lt;text x='16' y='389' fontSize='15' fontWeight='bold' fill='#1F5FA8' fontFamily='Microsoft YaHei'&gt;第 96 节&lt;/text&gt;&lt;text x='96' y='389' fontSize='15' fill='#16232E' fontFamily='Microsoft YaHei'&gt;Django shell 与 404&lt;/text&gt;&lt;text x='1080' y='389' fontSize='13' fill='#5A6B7A' textAnchor='end' fontFamily='Microsoft YaHei'&gt;W22–W23&lt;/text&gt;&lt;rect x='0' y='406' width='1152' height='38' rx='7' fill='#F2F7FD' /&gt;&lt;text x='16' y='431' fontSize='15' fontWeight='bold' fill='#1F5FA8' fontFamily='Microsoft YaHei'&gt;第 97 节&lt;/text&gt;&lt;text x='96' y='431' fontSize='15' fill='#16232E' fontFamily='Microsoft YaHei'&gt;实战、答案与验收复盘&lt;/text&gt;&lt;text x='1080' y='431' fontSize='13' fill='#5A6B7A' textAnchor='end' fontFamily='Microsoft YaHei'&gt;W22–W23&lt;/text&gt;&#13;&#10;        &lt;/svg&gt;&#13;&#10;    &lt;/Box&gt;&#13;&#10;    &lt;Box style={{ position: 'absolute', left: 64, bottom: 22, width: '1152px', flexDirection: 'row', justifyContent: 'space-between' }}&gt;&#13;&#10;        &lt;Text style={{ fontSize: 13, color: '#8A9AAA' }}&gt;Python 讲授课件 · 逐节版&lt;/Text&gt;&#13;&#10;        &lt;Text style={{ fontSize: 13, color: '#8A9AAA' }}&gt;单元 18 · 封面&lt;/Text&gt;&#13;&#10;    &lt;/Box&gt;&#13;&#10;&lt;/Slide&gt;&#13;&#10;"/>
+        <p:cNvPr id="1" name="" descr="&lt;Slide style={{ width: '1280px', height: '720px', backgroundColor: '#FAFCFE', padding: 0, position: 'relative', overflow: 'hidden' }}&gt;&#13;&#10;    &lt;Box style={{ position: 'absolute', left: 0, top: 0, width: '1280px', height: '150px', background: '#1F5FA8' }} /&gt;&#13;&#10;    &lt;Box style={{ position: 'absolute', left: 64, top: 34, width: '1152px', flexDirection: 'column' }}&gt;&#13;&#10;        &lt;Text style={{ fontSize: 15, fontWeight: 'bold', color: '#BFD9F2', letterSpacing: 2 }}&gt;阶段 2 · 单元 18&lt;/Text&gt;&#13;&#10;        &lt;Text style={{ fontSize: 38, fontWeight: 'bold', color: '#FFFFFF', marginTop: 6 }}&gt;Django 入门&lt;/Text&gt;&#13;&#10;    &lt;/Box&gt;&#13;&#10;    &lt;Box style={{ position: 'absolute', left: 64, top: 168, width: '1152px', height: 470 }}&gt;&#13;&#10;        &lt;svg width='1152' height='470' viewBox='0 0 1152 470'&gt;&#13;&#10;            &lt;text x='0' y='18' fontSize='15' fontWeight='bold' fill='#16232E' fontFamily='Microsoft YaHei'&gt;本单元共 6 节课&lt;/text&gt;&#13;&#10;            &lt;rect x='0' y='56.0' width='1152' height='48.0' rx='7' fill='#FFFFFF' /&gt;&lt;text x='16' y='85.0' fontSize='15' fontWeight='bold' fill='#1F5FA8' fontFamily='Microsoft YaHei'&gt;第 92 节&lt;/text&gt;&lt;text x='96' y='85.0' fontSize='15' fill='#16232E' fontFamily='Microsoft YaHei'&gt;★ 虚拟环境与 Django 项目&lt;/text&gt;&lt;text x='1080' y='85.0' fontSize='13' fill='#5A6B7A' textAnchor='end' fontFamily='Microsoft YaHei'&gt;W22–W23&lt;/text&gt;&lt;rect x='0' y='122.0' width='1152' height='48.0' rx='7' fill='#F2F7FD' /&gt;&lt;text x='16' y='151.0' fontSize='15' fontWeight='bold' fill='#1F5FA8' fontFamily='Microsoft YaHei'&gt;第 93 节&lt;/text&gt;&lt;text x='96' y='151.0' fontSize='15' fill='#16232E' fontFamily='Microsoft YaHei'&gt;★ 应用、模型与迁移三步曲&lt;/text&gt;&lt;text x='1080' y='151.0' fontSize='13' fill='#5A6B7A' textAnchor='end' fontFamily='Microsoft YaHei'&gt;W22–W23&lt;/text&gt;&lt;rect x='0' y='188.0' width='1152' height='48.0' rx='7' fill='#FFFFFF' /&gt;&lt;text x='16' y='217.0' fontSize='15' fontWeight='bold' fill='#1F5FA8' fontFamily='Microsoft YaHei'&gt;第 94 节&lt;/text&gt;&lt;text x='96' y='217.0' fontSize='15' fill='#16232E' fontFamily='Microsoft YaHei'&gt;★ 一次请求的旅程：URL → 视图 → 模板&lt;/text&gt;&lt;text x='1080' y='217.0' fontSize='13' fill='#5A6B7A' textAnchor='end' fontFamily='Microsoft YaHei'&gt;W22–W23&lt;/text&gt;&lt;rect x='0' y='254.0' width='1152' height='48.0' rx='7' fill='#F2F7FD' /&gt;&lt;text x='16' y='283.0' fontSize='15' fontWeight='bold' fill='#1F5FA8' fontFamily='Microsoft YaHei'&gt;第 95 节&lt;/text&gt;&lt;text x='96' y='283.0' fontSize='15' fill='#16232E' fontFamily='Microsoft YaHei'&gt;模板语法与模板继承&lt;/text&gt;&lt;text x='1080' y='283.0' fontSize='13' fill='#5A6B7A' textAnchor='end' fontFamily='Microsoft YaHei'&gt;W22–W23&lt;/text&gt;&lt;rect x='0' y='320.0' width='1152' height='48.0' rx='7' fill='#FFFFFF' /&gt;&lt;text x='16' y='349.0' fontSize='15' fontWeight='bold' fill='#1F5FA8' fontFamily='Microsoft YaHei'&gt;第 96 节&lt;/text&gt;&lt;text x='96' y='349.0' fontSize='15' fill='#16232E' fontFamily='Microsoft YaHei'&gt;Django shell 与 404&lt;/text&gt;&lt;text x='1080' y='349.0' fontSize='13' fill='#5A6B7A' textAnchor='end' fontFamily='Microsoft YaHei'&gt;W22–W23&lt;/text&gt;&lt;rect x='0' y='386.0' width='1152' height='48.0' rx='7' fill='#F2F7FD' /&gt;&lt;text x='16' y='415.0' fontSize='15' fontWeight='bold' fill='#1F5FA8' fontFamily='Microsoft YaHei'&gt;第 97 节&lt;/text&gt;&lt;text x='96' y='415.0' fontSize='15' fill='#16232E' fontFamily='Microsoft YaHei'&gt;实战、答案与验收复盘&lt;/text&gt;&lt;text x='1080' y='415.0' fontSize='13' fill='#5A6B7A' textAnchor='end' fontFamily='Microsoft YaHei'&gt;W22–W23&lt;/text&gt;&#13;&#10;        &lt;/svg&gt;&#13;&#10;    &lt;/Box&gt;&#13;&#10;    &lt;Box style={{ position: 'absolute', left: 64, bottom: 22, width: '1152px', flexDirection: 'row', justifyContent: 'space-between' }}&gt;&#13;&#10;        &lt;Text style={{ fontSize: 13, color: '#8A9AAA' }}&gt;Python 讲授课件 · 逐节版&lt;/Text&gt;&#13;&#10;        &lt;Text style={{ fontSize: 13, color: '#8A9AAA' }}&gt;单元 18 · 封面&lt;/Text&gt;&#13;&#10;    &lt;/Box&gt;&#13;&#10;&lt;/Slide&gt;&#13;&#10;"/>
         <p:cNvGrpSpPr/>
         <p:nvPr/>
       </p:nvGrpSpPr>
@@ -3703,7 +1101,7 @@
   <p:cSld>
     <p:spTree>
       <p:nvGrpSpPr>
-        <p:cNvPr id="15" name="" descr="&lt;Slide style={{ width: '1280px', height: '720px', backgroundColor: '#FAFCFE', padding: 0, position: 'relative', overflow: 'hidden' }}&gt;&#13;&#10;    &lt;Box style={{ position: 'absolute', left: 64, top: 36, width: '1152px', flexDirection: 'row', alignItems: 'center', gap: 12 }}&gt;&#13;&#10;        &lt;Box style={{ background: '#0E9B78', borderRadius: 5, padding: '3px 11px' }}&gt;&#13;&#10;            &lt;Text style={{ fontSize: 14, fontWeight: 'bold', color: '#FFFFFF' }}&gt;第 96 节&lt;/Text&gt;&#13;&#10;        &lt;/Box&gt;&#13;&#10;        &lt;Text style={{ fontSize: 30, fontWeight: 'bold', color: '#16232E' }}&gt;核心知识点&lt;/Text&gt;&#13;&#10;        &lt;Text style={{ fontSize: 15, color: '#5A6B7A', marginTop: 10 }}&gt;· Django shell 与 404&lt;/Text&gt;&#13;&#10;    &lt;/Box&gt;&#13;&#10;    &lt;Box style={{ position: 'absolute', left: 0, top: 0, width: '1280px', height: '720px' }}&gt;&#13;&#10;        &lt;svg width='1280' height='720' viewBox='0 0 1280 720'&gt;&#13;&#10;            &lt;rect x='64' y='96' width='1152' height='330' rx='12' fill='#FFFFFF' stroke='#D8E3EE' /&gt;&lt;rect x='64' y='96' width='1152' height='4' rx='2' fill='#1F5FA8' /&gt;&lt;text x='82' y='130' fontSize='15.5' fontWeight='bold' fill='#1F5FA8' textAnchor='start' fontFamily='Microsoft YaHei'&gt;2.7 模板继承与 404：别每个页面重复写导航栏 ★&lt;/text&gt;&lt;text x='82' y='169.0' fontSize='13' fill='#3A4A58' textAnchor='start' fontFamily='Microsoft YaHei'&gt;· 404 处理：视图里 Topic.objects.get(id=topic_id) 遇到不存在的 ID…&lt;/text&gt;&lt;text x='64' y='470' fontSize='14.5' fontWeight='bold' fill='#0E9B78' textAnchor='start' fontFamily='Microsoft YaHei'&gt;本节的代码示例&lt;/text&gt;&lt;text x='64' y='500' fontSize='13' fill='#3A4A58' textAnchor='start' fontFamily='Microsoft YaHei'&gt;· 用纯 Python 看懂外键和级联删除&lt;/text&gt;&lt;text x='468' y='500' fontSize='13' fill='#3A4A58' textAnchor='start' fontFamily='Microsoft YaHei'&gt;· 用纯 Python 模拟「URL → 视图 → 模板」请求链路&lt;/text&gt;&lt;text x='872' y='500' fontSize='13' fill='#3A4A58' textAnchor='start' fontFamily='Microsoft YaHei'&gt;· 用纯 Python 模拟模板继承&lt;/text&gt;&lt;rect x='64' y='574' width='1152' height='66' rx='12' fill='#EEF5FB' /&gt;&lt;text x='84' y='616' fontSize='14' fill='#243444' textAnchor='start' fontFamily='Microsoft YaHei'&gt;看不懂的地方先回讲义对应小节读一遍，再回来对着这页复述一次——能讲出来才算真懂。&lt;/text&gt;&#13;&#10;            &lt;text x='64' y='684' fontSize='13' fill='#8A9AAA' fontFamily='Microsoft YaHei'&gt;Python 讲授课件 · 逐节版&lt;/text&gt;&#13;&#10;            &lt;text x='1216' y='684' fontSize='13' fill='#8A9AAA' textAnchor='end' fontFamily='Microsoft YaHei'&gt;单元 18 · 第 96 节&lt;/text&gt;&#13;&#10;        &lt;/svg&gt;&#13;&#10;    &lt;/Box&gt;&#13;&#10;&lt;/Slide&gt;&#13;&#10;"/>
+        <p:cNvPr id="15" name="" descr="&lt;Slide style={{ width: '1280px', height: '720px', backgroundColor: '#FAFCFE', padding: 0, position: 'relative', overflow: 'hidden' }}&gt;&#13;&#10;    &lt;Box style={{ position: 'absolute', left: 64, top: 36, width: '1152px', flexDirection: 'row', alignItems: 'center', gap: 12 }}&gt;&#13;&#10;        &lt;Box style={{ background: '#0E9B78', borderRadius: 5, padding: '3px 11px' }}&gt;&#13;&#10;            &lt;Text style={{ fontSize: 14, fontWeight: 'bold', color: '#FFFFFF' }}&gt;第 96 节&lt;/Text&gt;&#13;&#10;        &lt;/Box&gt;&#13;&#10;        &lt;Text style={{ fontSize: 30, fontWeight: 'bold', color: '#16232E' }}&gt;核心知识点&lt;/Text&gt;&#13;&#10;        &lt;Text style={{ fontSize: 15, color: '#5A6B7A', marginTop: 10 }}&gt;· Django shell 与 404&lt;/Text&gt;&#13;&#10;    &lt;/Box&gt;&#13;&#10;    &lt;Box style={{ position: 'absolute', left: 0, top: 0, width: '1280px', height: '720px' }}&gt;&#13;&#10;        &lt;svg width='1280' height='720' viewBox='0 0 1280 720'&gt;&#13;&#10;            &lt;rect x='64' y='96' width='1152' height='330' rx='12' fill='#FFFFFF' stroke='#D8E3EE' /&gt;&lt;rect x='64' y='96' width='1152' height='4' rx='2' fill='#1F5FA8' /&gt;&lt;text x='82' y='130' fontSize='15.5' fontWeight='bold' fill='#1F5FA8' textAnchor='start' fontFamily='Microsoft YaHei'&gt;2.7 模板继承与 404：别每个页面重复写导航栏 ★&lt;/text&gt;&lt;text x='82' y='169.0' fontSize='13' fill='#3A4A58' textAnchor='start' fontFamily='Microsoft YaHei'&gt;· 404 处理&lt;/text&gt;&lt;text x='64' y='470' fontSize='14.5' fontWeight='bold' fill='#0E9B78' textAnchor='start' fontFamily='Microsoft YaHei'&gt;本节的代码示例&lt;/text&gt;&lt;text x='64' y='500' fontSize='13' fill='#3A4A58' textAnchor='start' fontFamily='Microsoft YaHei'&gt;· 用纯 Python 看懂外键和级联删除&lt;/text&gt;&lt;text x='468' y='500' fontSize='13' fill='#3A4A58' textAnchor='start' fontFamily='Microsoft YaHei'&gt;· 用纯 Python 模拟「URL → 视图 → 模板」请求链路&lt;/text&gt;&lt;text x='872' y='500' fontSize='13' fill='#3A4A58' textAnchor='start' fontFamily='Microsoft YaHei'&gt;· 用纯 Python 模拟模板继承&lt;/text&gt;&lt;rect x='64' y='574' width='1152' height='66' rx='12' fill='#EEF5FB' /&gt;&lt;text x='84' y='616' fontSize='14' fill='#243444' textAnchor='start' fontFamily='Microsoft YaHei'&gt;看不懂的地方先回讲义对应小节读一遍，再回来对着这页复述一次——能讲出来才算真懂。&lt;/text&gt;&#13;&#10;            &lt;text x='64' y='684' fontSize='13' fill='#8A9AAA' fontFamily='Microsoft YaHei'&gt;Python 讲授课件 · 逐节版&lt;/text&gt;&#13;&#10;            &lt;text x='1216' y='684' fontSize='13' fill='#8A9AAA' textAnchor='end' fontFamily='Microsoft YaHei'&gt;单元 18 · 第 96 节&lt;/text&gt;&#13;&#10;        &lt;/svg&gt;&#13;&#10;    &lt;/Box&gt;&#13;&#10;&lt;/Slide&gt;&#13;&#10;"/>
         <p:cNvGrpSpPr/>
         <p:nvPr/>
       </p:nvGrpSpPr>
@@ -4144,7 +1542,7 @@
   <p:cSld>
     <p:spTree>
       <p:nvGrpSpPr>
-        <p:cNvPr id="28" name="" descr="&lt;Slide style={{ width: '1280px', height: '720px', backgroundColor: '#FAFCFE', padding: 0, position: 'relative', overflow: 'hidden' }}&gt;&#13;&#10;    &lt;Box style={{ position: 'absolute', left: 64, top: 36, width: '1152px', flexDirection: 'row', alignItems: 'center', gap: 12 }}&gt;&#13;&#10;        &lt;Box style={{ background: '#0E9B78', borderRadius: 5, padding: '3px 11px' }}&gt;&#13;&#10;            &lt;Text style={{ fontSize: 14, fontWeight: 'bold', color: '#FFFFFF' }}&gt;第 97 节&lt;/Text&gt;&#13;&#10;        &lt;/Box&gt;&#13;&#10;        &lt;Text style={{ fontSize: 30, fontWeight: 'bold', color: '#16232E' }}&gt;核心知识点&lt;/Text&gt;&#13;&#10;        &lt;Text style={{ fontSize: 15, color: '#5A6B7A', marginTop: 10 }}&gt;· 实战、答案与验收复盘&lt;/Text&gt;&#13;&#10;    &lt;/Box&gt;&#13;&#10;    &lt;Box style={{ position: 'absolute', left: 0, top: 0, width: '1280px', height: '720px' }}&gt;&#13;&#10;        &lt;svg width='1280' height='720' viewBox='0 0 1280 720'&gt;&#13;&#10;            &lt;rect x='64' y='96' width='368' height='330' rx='12' fill='#FFFFFF' stroke='#D8E3EE' /&gt;&lt;rect x='64' y='96' width='368' height='4' rx='2' fill='#1F5FA8' /&gt;&lt;text x='82' y='130' fontSize='15.5' fontWeight='bold' fill='#1F5FA8' textAnchor='start' fontFamily='Microsoft YaHei'&gt;基础档&lt;/text&gt;&lt;text x='82' y='169.0' fontSize='13' fill='#3A4A58' textAnchor='start' fontFamily='Microsoft YaHei'&gt;· 练习 18-1【从零跑通第一个页面】&lt;/text&gt;&lt;text x='82' y='197.5' fontSize='13' fill='#3A4A58' textAnchor='start' fontFamily='Microsoft YaHei'&gt;· 练习 18-2【教材练习 18.2：简短的条目】&lt;/text&gt;&lt;text x='82' y='226.0' fontSize='13' fill='#3A4A58' textAnchor='start' fontFamily='Microsoft YaHei'&gt;· 练习 18-3【教材练习 18.4：比萨与配料】&lt;/text&gt;&lt;rect x='468' y='96' width='368' height='330' rx='12' fill='#FFFFFF' stroke='#D8E3EE' /&gt;&lt;rect x='468' y='96' width='368' height='4' rx='2' fill='#1F5FA8' /&gt;&lt;text x='486' y='130' fontSize='15.5' fontWeight='bold' fill='#1F5FA8' textAnchor='start' fontFamily='Microsoft YaHei'&gt;进阶档&lt;/text&gt;&lt;text x='486' y='169.0' fontSize='13' fill='#3A4A58' textAnchor='start' fontFamily='Microsoft YaHei'&gt;· 练习 18-4【手写迷你模板引擎】&lt;/text&gt;&lt;text x='486' y='197.5' fontSize='13' fill='#3A4A58' textAnchor='start' fontFamily='Microsoft YaHei'&gt;· 练习 18-5【给学习笔记加「关于」页面】&lt;/text&gt;&lt;rect x='872' y='96' width='368' height='330' rx='12' fill='#FFFFFF' stroke='#D8E3EE' /&gt;&lt;rect x='872' y='96' width='368' height='4' rx='2' fill='#1F5FA8' /&gt;&lt;text x='890' y='130' fontSize='15.5' fontWeight='bold' fill='#1F5FA8' textAnchor='start' fontFamily='Microsoft YaHei'&gt;参考答案 18-1&lt;/text&gt;&lt;text x='890' y='169.0' fontSize='13' fill='#3A4A58' textAnchor='start' fontFamily='Microsoft YaHei'&gt;· mkdir learning_log&lt;/text&gt;&lt;rect x='64' y='574' width='1152' height='66' rx='12' fill='#EEF5FB' /&gt;&lt;text x='84' y='616' fontSize='14' fill='#243444' textAnchor='start' fontFamily='Microsoft YaHei'&gt;看不懂的地方先回讲义对应小节读一遍，再回来对着这页复述一次——能讲出来才算真懂。&lt;/text&gt;&#13;&#10;            &lt;text x='64' y='684' fontSize='13' fill='#8A9AAA' fontFamily='Microsoft YaHei'&gt;Python 讲授课件 · 逐节版&lt;/text&gt;&#13;&#10;            &lt;text x='1216' y='684' fontSize='13' fill='#8A9AAA' textAnchor='end' fontFamily='Microsoft YaHei'&gt;单元 18 · 第 97 节&lt;/text&gt;&#13;&#10;        &lt;/svg&gt;&#13;&#10;    &lt;/Box&gt;&#13;&#10;&lt;/Slide&gt;&#13;&#10;"/>
+        <p:cNvPr id="28" name="" descr="&lt;Slide style={{ width: '1280px', height: '720px', backgroundColor: '#FAFCFE', padding: 0, position: 'relative', overflow: 'hidden' }}&gt;&#13;&#10;    &lt;Box style={{ position: 'absolute', left: 64, top: 36, width: '1152px', flexDirection: 'row', alignItems: 'center', gap: 12 }}&gt;&#13;&#10;        &lt;Box style={{ background: '#0E9B78', borderRadius: 5, padding: '3px 11px' }}&gt;&#13;&#10;            &lt;Text style={{ fontSize: 14, fontWeight: 'bold', color: '#FFFFFF' }}&gt;第 97 节&lt;/Text&gt;&#13;&#10;        &lt;/Box&gt;&#13;&#10;        &lt;Text style={{ fontSize: 30, fontWeight: 'bold', color: '#16232E' }}&gt;核心知识点&lt;/Text&gt;&#13;&#10;        &lt;Text style={{ fontSize: 15, color: '#5A6B7A', marginTop: 10 }}&gt;· 实战、答案与验收复盘&lt;/Text&gt;&#13;&#10;    &lt;/Box&gt;&#13;&#10;    &lt;Box style={{ position: 'absolute', left: 0, top: 0, width: '1280px', height: '720px' }}&gt;&#13;&#10;        &lt;svg width='1280' height='720' viewBox='0 0 1280 720'&gt;&#13;&#10;            &lt;rect x='64' y='96' width='368' height='330' rx='12' fill='#FFFFFF' stroke='#D8E3EE' /&gt;&lt;rect x='64' y='96' width='368' height='4' rx='2' fill='#1F5FA8' /&gt;&lt;text x='82' y='130' fontSize='15.5' fontWeight='bold' fill='#1F5FA8' textAnchor='start' fontFamily='Microsoft YaHei'&gt;基础档&lt;/text&gt;&lt;text x='82' y='169.0' fontSize='13' fill='#3A4A58' textAnchor='start' fontFamily='Microsoft YaHei'&gt;· 练习 18-1【从零跑通第一个页面】&lt;/text&gt;&lt;text x='82' y='197.5' fontSize='13' fill='#3A4A58' textAnchor='start' fontFamily='Microsoft YaHei'&gt;· 练习 18-2【教材练习 18.2：简短的条目】&lt;/text&gt;&lt;text x='82' y='226.0' fontSize='13' fill='#3A4A58' textAnchor='start' fontFamily='Microsoft YaHei'&gt;· 练习 18-3【教材练习 18.4：比萨与配料】&lt;/text&gt;&lt;rect x='468' y='96' width='368' height='330' rx='12' fill='#FFFFFF' stroke='#D8E3EE' /&gt;&lt;rect x='468' y='96' width='368' height='4' rx='2' fill='#1F5FA8' /&gt;&lt;text x='486' y='130' fontSize='15.5' fontWeight='bold' fill='#1F5FA8' textAnchor='start' fontFamily='Microsoft YaHei'&gt;进阶档&lt;/text&gt;&lt;text x='486' y='169.0' fontSize='13' fill='#3A4A58' textAnchor='start' fontFamily='Microsoft YaHei'&gt;· 练习 18-4【手写迷你模板引擎】&lt;/text&gt;&lt;text x='486' y='197.5' fontSize='13' fill='#3A4A58' textAnchor='start' fontFamily='Microsoft YaHei'&gt;· 练习 18-5【给学习笔记加「关于」页面】&lt;/text&gt;&lt;rect x='872' y='96' width='368' height='330' rx='12' fill='#FFFFFF' stroke='#D8E3EE' /&gt;&lt;rect x='872' y='96' width='368' height='4' rx='2' fill='#1F5FA8' /&gt;&lt;text x='890' y='130' fontSize='15.5' fontWeight='bold' fill='#1F5FA8' textAnchor='start' fontFamily='Microsoft YaHei'&gt;参考答案 18-1&lt;/text&gt;&lt;text x='890' y='169.0' fontSize='13' fill='#3A4A58' textAnchor='start' fontFamily='Microsoft YaHei'&gt;· ll_env 是工具间（装 Django 的地方）；&lt;/text&gt;&lt;text x='890' y='188.5' fontSize='13' fill='#3A4A58' textAnchor='start' fontFamily='Microsoft YaHei'&gt;ll_project 是项目配置的家（settin…&lt;/text&gt;&lt;rect x='64' y='574' width='1152' height='66' rx='12' fill='#EEF5FB' /&gt;&lt;text x='84' y='616' fontSize='14' fill='#243444' textAnchor='start' fontFamily='Microsoft YaHei'&gt;看不懂的地方先回讲义对应小节读一遍，再回来对着这页复述一次——能讲出来才算真懂。&lt;/text&gt;&#13;&#10;            &lt;text x='64' y='684' fontSize='13' fill='#8A9AAA' fontFamily='Microsoft YaHei'&gt;Python 讲授课件 · 逐节版&lt;/text&gt;&#13;&#10;            &lt;text x='1216' y='684' fontSize='13' fill='#8A9AAA' textAnchor='end' fontFamily='Microsoft YaHei'&gt;单元 18 · 第 97 节&lt;/text&gt;&#13;&#10;        &lt;/svg&gt;&#13;&#10;    &lt;/Box&gt;&#13;&#10;&lt;/Slide&gt;&#13;&#10;"/>
         <p:cNvGrpSpPr/>
         <p:nvPr/>
       </p:nvGrpSpPr>
@@ -5205,7 +2603,7 @@
   <p:cSld>
     <p:spTree>
       <p:nvGrpSpPr>
-        <p:cNvPr id="55" name="" descr="&lt;Slide style={{ width: '1280px', height: '720px', backgroundColor: '#FAFCFE', padding: 0, position: 'relative', overflow: 'hidden' }}&gt;&#13;&#10;    &lt;Box style={{ position: 'absolute', left: 64, top: 36, width: '1152px', flexDirection: 'row', alignItems: 'center', gap: 12 }}&gt;&#13;&#10;        &lt;Box style={{ background: '#0E9B78', borderRadius: 5, padding: '3px 11px' }}&gt;&#13;&#10;            &lt;Text style={{ fontSize: 14, fontWeight: 'bold', color: '#FFFFFF' }}&gt;第 92 节&lt;/Text&gt;&#13;&#10;        &lt;/Box&gt;&#13;&#10;        &lt;Text style={{ fontSize: 30, fontWeight: 'bold', color: '#16232E' }}&gt;核心知识点&lt;/Text&gt;&#13;&#10;        &lt;Text style={{ fontSize: 15, color: '#5A6B7A', marginTop: 10 }}&gt;· ★ 虚拟环境与 Django 项目&lt;/Text&gt;&#13;&#10;    &lt;/Box&gt;&#13;&#10;    &lt;Box style={{ position: 'absolute', left: 0, top: 0, width: '1280px', height: '720px' }}&gt;&#13;&#10;        &lt;svg width='1280' height='720' viewBox='0 0 1280 720'&gt;&#13;&#10;            &lt;rect x='64' y='96' width='548' height='330' rx='12' fill='#FFFFFF' stroke='#D8E3EE' /&gt;&lt;rect x='64' y='96' width='548' height='4' rx='2' fill='#1F5FA8' /&gt;&lt;text x='82' y='130' fontSize='15.5' fontWeight='bold' fill='#1F5FA8' textAnchor='start' fontFamily='Microsoft YaHei'&gt;2.1 虚拟环境：给每个项目一间独立的「工具间」★&lt;/text&gt;&lt;text x='82' y='169.0' fontSize='13' fill='#3A4A58' textAnchor='start' fontFamily='Microsoft YaHei'&gt;· ll_env 是两个小写的 L 加 env，不是数字 1。教材特意提醒过这一点。&lt;/text&gt;&lt;text x='82' y='197.5' fontSize='13' fill='#3A4A58' textAnchor='start' fontFamily='Microsoft YaHei'&gt;· pip install 前一定看一眼有没有 (ll_env)。没有它，Django 会被装到全局 Py…&lt;/text&gt;&lt;text x='82' y='226.0' fontSize='13' fill='#3A4A58' textAnchor='start' fontFamily='Microsoft YaHei'&gt;· 关闭终端 = 虚拟环境自动失效，下次开工要重新激活。这是新手最常犯的错，没有之一&lt;/text&gt;&lt;text x='82' y='245.5' fontSize='13' fill='#3A4A58' textAnchor='start' fontFamily='Microsoft YaHei'&gt;：昨天明明跑得好好的…&lt;/text&gt;&lt;rect x='668' y='96' width='548' height='330' rx='12' fill='#FFFFFF' stroke='#D8E3EE' /&gt;&lt;rect x='668' y='96' width='548' height='4' rx='2' fill='#1F5FA8' /&gt;&lt;text x='686' y='130' fontSize='15.5' fontWeight='bold' fill='#1F5FA8' textAnchor='start' fontFamily='Microsoft YaHei'&gt;2.2 Django 的三个层次：项目、应用程序、MVT ★&lt;/text&gt;&lt;text x='686' y='169.0' fontSize='13' fill='#3A4A58' textAnchor='start' fontFamily='Microsoft YaHei'&gt;· 项目（project）= 餐厅的营业执照和规章制度。全项目一份，规定「本店用什么灶、账&lt;/text&gt;&lt;text x='686' y='188.5' fontSize='13' fill='#3A4A58' textAnchor='start' fontFamily='Microsoft YaHei'&gt;记在哪」。&lt;/text&gt;&lt;text x='686' y='217.0' fontSize='13' fill='#3A4A58' textAnchor='start' fontFamily='Microsoft YaHei'&gt;· 应用程序（app）= 厨房、收银台、库房。可以有很多个，各干各的活；它们协同工作，&lt;/text&gt;&lt;text x='686' y='236.5' fontSize='13' fill='#3A4A58' textAnchor='start' fontFamily='Microsoft YaHei'&gt;让项目成为一个整体…&lt;/text&gt;&lt;text x='686' y='265.0' fontSize='13' fill='#3A4A58' textAnchor='start' fontFamily='Microsoft YaHei'&gt;· settings.py 里的 INSTALLED_APPS：每新建一个 app，都要来这里「注册学籍」…&lt;/text&gt;&lt;rect x='64' y='574' width='1152' height='66' rx='12' fill='#EEF5FB' /&gt;&lt;text x='84' y='616' fontSize='14' fill='#243444' textAnchor='start' fontFamily='Microsoft YaHei'&gt;看不懂的地方先回讲义对应小节读一遍，再回来对着这页复述一次——能讲出来才算真懂。&lt;/text&gt;&#13;&#10;            &lt;text x='64' y='684' fontSize='13' fill='#8A9AAA' fontFamily='Microsoft YaHei'&gt;Python 讲授课件 · 逐节版&lt;/text&gt;&#13;&#10;            &lt;text x='1216' y='684' fontSize='13' fill='#8A9AAA' textAnchor='end' fontFamily='Microsoft YaHei'&gt;单元 18 · 第 92 节&lt;/text&gt;&#13;&#10;        &lt;/svg&gt;&#13;&#10;    &lt;/Box&gt;&#13;&#10;&lt;/Slide&gt;&#13;&#10;"/>
+        <p:cNvPr id="55" name="" descr="&lt;Slide style={{ width: '1280px', height: '720px', backgroundColor: '#FAFCFE', padding: 0, position: 'relative', overflow: 'hidden' }}&gt;&#13;&#10;    &lt;Box style={{ position: 'absolute', left: 64, top: 36, width: '1152px', flexDirection: 'row', alignItems: 'center', gap: 12 }}&gt;&#13;&#10;        &lt;Box style={{ background: '#0E9B78', borderRadius: 5, padding: '3px 11px' }}&gt;&#13;&#10;            &lt;Text style={{ fontSize: 14, fontWeight: 'bold', color: '#FFFFFF' }}&gt;第 92 节&lt;/Text&gt;&#13;&#10;        &lt;/Box&gt;&#13;&#10;        &lt;Text style={{ fontSize: 30, fontWeight: 'bold', color: '#16232E' }}&gt;核心知识点&lt;/Text&gt;&#13;&#10;        &lt;Text style={{ fontSize: 15, color: '#5A6B7A', marginTop: 10 }}&gt;· ★ 虚拟环境与 Django 项目&lt;/Text&gt;&#13;&#10;    &lt;/Box&gt;&#13;&#10;    &lt;Box style={{ position: 'absolute', left: 0, top: 0, width: '1280px', height: '720px' }}&gt;&#13;&#10;        &lt;svg width='1280' height='720' viewBox='0 0 1280 720'&gt;&#13;&#10;            &lt;rect x='64' y='96' width='548' height='330' rx='12' fill='#FFFFFF' stroke='#D8E3EE' /&gt;&lt;rect x='64' y='96' width='548' height='4' rx='2' fill='#1F5FA8' /&gt;&lt;text x='82' y='130' fontSize='15.5' fontWeight='bold' fill='#1F5FA8' textAnchor='start' fontFamily='Microsoft YaHei'&gt;2.1 虚拟环境：给每个项目一间独立的「工具间」★&lt;/text&gt;&lt;text x='82' y='169.0' fontSize='13' fill='#3A4A58' textAnchor='start' fontFamily='Microsoft YaHei'&gt;· ll_env 是两个小写的 L 加 env，不是数字 1。教材特意提醒过这一点。&lt;/text&gt;&lt;text x='82' y='197.5' fontSize='13' fill='#3A4A58' textAnchor='start' fontFamily='Microsoft YaHei'&gt;· pip install 前一定看一眼有没有 (ll_env)。没有它…&lt;/text&gt;&lt;text x='82' y='226.0' fontSize='13' fill='#3A4A58' textAnchor='start' fontFamily='Microsoft YaHei'&gt;· 关闭终端 = 虚拟环境自动失效，下次开工要重新激活。这是新手最常犯的错，&lt;/text&gt;&lt;text x='82' y='245.5' fontSize='13' fill='#3A4A58' textAnchor='start' fontFamily='Microsoft YaHei'&gt;没有之一：昨天明明跑得好好的…&lt;/text&gt;&lt;rect x='668' y='96' width='548' height='330' rx='12' fill='#FFFFFF' stroke='#D8E3EE' /&gt;&lt;rect x='668' y='96' width='548' height='4' rx='2' fill='#1F5FA8' /&gt;&lt;text x='686' y='130' fontSize='15.5' fontWeight='bold' fill='#1F5FA8' textAnchor='start' fontFamily='Microsoft YaHei'&gt;2.2 Django 的三个层次：项目、应用程序、MVT ★&lt;/text&gt;&lt;text x='686' y='169.0' fontSize='13' fill='#3A4A58' textAnchor='start' fontFamily='Microsoft YaHei'&gt;· 项目（project）= 餐厅的营业执照和规章制度。全项目一份，规定「本店用什么灶、&lt;/text&gt;&lt;text x='686' y='188.5' fontSize='13' fill='#3A4A58' textAnchor='start' fontFamily='Microsoft YaHei'&gt;账记在哪」。&lt;/text&gt;&lt;text x='686' y='217.0' fontSize='13' fill='#3A4A58' textAnchor='start' fontFamily='Microsoft YaHei'&gt;· 应用程序（app）= 厨房、收银台、库房。可以有很多个，各干各的活；它们协同工作，&lt;/text&gt;&lt;text x='686' y='236.5' fontSize='13' fill='#3A4A58' textAnchor='start' fontFamily='Microsoft YaHei'&gt;让项目成为一个整体…&lt;/text&gt;&lt;text x='686' y='265.0' fontSize='13' fill='#3A4A58' textAnchor='start' fontFamily='Microsoft YaHei'&gt;· settings.py 里的 INSTALLED_APPS&lt;/text&gt;&lt;rect x='64' y='574' width='1152' height='66' rx='12' fill='#EEF5FB' /&gt;&lt;text x='84' y='616' fontSize='14' fill='#243444' textAnchor='start' fontFamily='Microsoft YaHei'&gt;看不懂的地方先回讲义对应小节读一遍，再回来对着这页复述一次——能讲出来才算真懂。&lt;/text&gt;&#13;&#10;            &lt;text x='64' y='684' fontSize='13' fill='#8A9AAA' fontFamily='Microsoft YaHei'&gt;Python 讲授课件 · 逐节版&lt;/text&gt;&#13;&#10;            &lt;text x='1216' y='684' fontSize='13' fill='#8A9AAA' textAnchor='end' fontFamily='Microsoft YaHei'&gt;单元 18 · 第 92 节&lt;/text&gt;&#13;&#10;        &lt;/svg&gt;&#13;&#10;    &lt;/Box&gt;&#13;&#10;&lt;/Slide&gt;&#13;&#10;"/>
         <p:cNvGrpSpPr/>
         <p:nvPr/>
       </p:nvGrpSpPr>
@@ -5666,7 +3064,7 @@
   <p:cSld>
     <p:spTree>
       <p:nvGrpSpPr>
-        <p:cNvPr id="68" name="" descr="&lt;Slide style={{ width: '1280px', height: '720px', backgroundColor: '#FAFCFE', padding: 0, position: 'relative', overflow: 'hidden' }}&gt;&#13;&#10;    &lt;Box style={{ position: 'absolute', left: 64, top: 36, width: '1152px', flexDirection: 'row', alignItems: 'center', gap: 12 }}&gt;&#13;&#10;        &lt;Box style={{ background: '#0E9B78', borderRadius: 5, padding: '3px 11px' }}&gt;&#13;&#10;            &lt;Text style={{ fontSize: 14, fontWeight: 'bold', color: '#FFFFFF' }}&gt;第 93 节&lt;/Text&gt;&#13;&#10;        &lt;/Box&gt;&#13;&#10;        &lt;Text style={{ fontSize: 30, fontWeight: 'bold', color: '#16232E' }}&gt;核心知识点&lt;/Text&gt;&#13;&#10;        &lt;Text style={{ fontSize: 15, color: '#5A6B7A', marginTop: 10 }}&gt;· ★ 应用、模型与迁移三步曲&lt;/Text&gt;&#13;&#10;    &lt;/Box&gt;&#13;&#10;    &lt;Box style={{ position: 'absolute', left: 0, top: 0, width: '1280px', height: '720px' }}&gt;&#13;&#10;        &lt;svg width='1280' height='720' viewBox='0 0 1280 720'&gt;&#13;&#10;            &lt;rect x='64' y='96' width='548' height='330' rx='12' fill='#FFFFFF' stroke='#D8E3EE' /&gt;&lt;rect x='64' y='96' width='548' height='4' rx='2' fill='#1F5FA8' /&gt;&lt;text x='82' y='130' fontSize='15.5' fontWeight='bold' fill='#1F5FA8' textAnchor='start' fontFamily='Microsoft YaHei'&gt;2.3 模型 → 迁移 → 数据库：改数据的「三步曲」★&lt;/text&gt;&lt;text x='82' y='169.0' fontSize='13' fill='#3A4A58' textAnchor='start' fontFamily='Microsoft YaHei'&gt;· 迁移文件就是数据库的施工图纸——它记录「上次数据库长这样，这次要加一张表 / 加&lt;/text&gt;&lt;text x='82' y='188.5' fontSize='13' fill='#3A4A58' textAnchor='start' fontFamily='Microsoft YaHei'&gt;一列」。有了它，数据库…&lt;/text&gt;&lt;text x='82' y='217.0' fontSize='13' fill='#3A4A58' textAnchor='start' fontFamily='Microsoft YaHei'&gt;· 管理网站 /admin/ 是 Django 白送的后台：先建一个超级用户（相当于总经理，手握&lt;/text&gt;&lt;text x='82' y='236.5' fontSize='13' fill='#3A4A58' textAnchor='start' fontFamily='Microsoft YaHei'&gt;所有房间的…&lt;/text&gt;&lt;text x='82' y='265.0' fontSize='13' fill='#3A4A58' textAnchor='start' fontFamily='Microsoft YaHei'&gt;· Django shell（python manage.py shell）是调试神器：它启动一个带项目环…&lt;/text&gt;&lt;rect x='668' y='96' width='548' height='330' rx='12' fill='#FFFFFF' stroke='#D8E3EE' /&gt;&lt;rect x='668' y='96' width='548' height='4' rx='2' fill='#1F5FA8' /&gt;&lt;text x='686' y='130' fontSize='15.5' fontWeight='bold' fill='#1F5FA8' textAnchor='start' fontFamily='Microsoft YaHei'&gt;2.4 一对多：Topic 和 Entry 的外键 ★&lt;/text&gt;&lt;text x='686' y='169.0' fontSize='13' fill='#3A4A58' textAnchor='start' fontFamily='Microsoft YaHei'&gt;· 学习笔记的数据长这样：一个主题（比如「Python」）下面挂着很多条目（今天学的一&lt;/text&gt;&lt;text x='686' y='188.5' fontSize='13' fill='#3A4A58' textAnchor='start' fontFamily='Microsoft YaHei'&gt;点、明天学的一点）…&lt;/text&gt;&lt;rect x='64' y='574' width='1152' height='66' rx='12' fill='#EEF5FB' /&gt;&lt;text x='84' y='616' fontSize='14' fill='#243444' textAnchor='start' fontFamily='Microsoft YaHei'&gt;看不懂的地方先回讲义对应小节读一遍，再回来对着这页复述一次——能讲出来才算真懂。&lt;/text&gt;&#13;&#10;            &lt;text x='64' y='684' fontSize='13' fill='#8A9AAA' fontFamily='Microsoft YaHei'&gt;Python 讲授课件 · 逐节版&lt;/text&gt;&#13;&#10;            &lt;text x='1216' y='684' fontSize='13' fill='#8A9AAA' textAnchor='end' fontFamily='Microsoft YaHei'&gt;单元 18 · 第 93 节&lt;/text&gt;&#13;&#10;        &lt;/svg&gt;&#13;&#10;    &lt;/Box&gt;&#13;&#10;&lt;/Slide&gt;&#13;&#10;"/>
+        <p:cNvPr id="68" name="" descr="&lt;Slide style={{ width: '1280px', height: '720px', backgroundColor: '#FAFCFE', padding: 0, position: 'relative', overflow: 'hidden' }}&gt;&#13;&#10;    &lt;Box style={{ position: 'absolute', left: 64, top: 36, width: '1152px', flexDirection: 'row', alignItems: 'center', gap: 12 }}&gt;&#13;&#10;        &lt;Box style={{ background: '#0E9B78', borderRadius: 5, padding: '3px 11px' }}&gt;&#13;&#10;            &lt;Text style={{ fontSize: 14, fontWeight: 'bold', color: '#FFFFFF' }}&gt;第 93 节&lt;/Text&gt;&#13;&#10;        &lt;/Box&gt;&#13;&#10;        &lt;Text style={{ fontSize: 30, fontWeight: 'bold', color: '#16232E' }}&gt;核心知识点&lt;/Text&gt;&#13;&#10;        &lt;Text style={{ fontSize: 15, color: '#5A6B7A', marginTop: 10 }}&gt;· ★ 应用、模型与迁移三步曲&lt;/Text&gt;&#13;&#10;    &lt;/Box&gt;&#13;&#10;    &lt;Box style={{ position: 'absolute', left: 0, top: 0, width: '1280px', height: '720px' }}&gt;&#13;&#10;        &lt;svg width='1280' height='720' viewBox='0 0 1280 720'&gt;&#13;&#10;            &lt;rect x='64' y='96' width='548' height='330' rx='12' fill='#FFFFFF' stroke='#D8E3EE' /&gt;&lt;rect x='64' y='96' width='548' height='4' rx='2' fill='#1F5FA8' /&gt;&lt;text x='82' y='130' fontSize='15.5' fontWeight='bold' fill='#1F5FA8' textAnchor='start' fontFamily='Microsoft YaHei'&gt;2.3 模型 → 迁移 → 数据库：改数据的「三步曲」★&lt;/text&gt;&lt;text x='82' y='169.0' fontSize='13' fill='#3A4A58' textAnchor='start' fontFamily='Microsoft YaHei'&gt;· 迁移文件就是数据库的施工图纸&lt;/text&gt;&lt;text x='82' y='197.5' fontSize='13' fill='#3A4A58' textAnchor='start' fontFamily='Microsoft YaHei'&gt;· 管理网站 /admin/&lt;/text&gt;&lt;text x='82' y='226.0' fontSize='13' fill='#3A4A58' textAnchor='start' fontFamily='Microsoft YaHei'&gt;· Django shell&lt;/text&gt;&lt;rect x='668' y='96' width='548' height='330' rx='12' fill='#FFFFFF' stroke='#D8E3EE' /&gt;&lt;rect x='668' y='96' width='548' height='4' rx='2' fill='#1F5FA8' /&gt;&lt;text x='686' y='130' fontSize='15.5' fontWeight='bold' fill='#1F5FA8' textAnchor='start' fontFamily='Microsoft YaHei'&gt;2.4 一对多：Topic 和 Entry 的外键 ★&lt;/text&gt;&lt;text x='686' y='169.0' fontSize='13' fill='#3A4A58' textAnchor='start' fontFamily='Microsoft YaHei'&gt;· 学习笔记的数据长这样：一个主题（比如「Python」）下面挂着很多条目（今天学的一&lt;/text&gt;&lt;text x='686' y='188.5' fontSize='13' fill='#3A4A58' textAnchor='start' fontFamily='Microsoft YaHei'&gt;点、明天学的一点）。&lt;/text&gt;&lt;text x='686' y='217.0' fontSize='13' fill='#3A4A58' textAnchor='start' fontFamily='Microsoft YaHei'&gt;· 每条 Entry 身上都有一列，记住「我属于哪个 Topic」。&lt;/text&gt;&lt;text x='686' y='245.5' fontSize='13' fill='#3A4A58' textAnchor='start' fontFamily='Microsoft YaHei'&gt;· on_delete=models.CASCADE 回答的是一个尖锐问题：主题被删了…&lt;/text&gt;&lt;rect x='64' y='574' width='1152' height='66' rx='12' fill='#EEF5FB' /&gt;&lt;text x='84' y='616' fontSize='14' fill='#243444' textAnchor='start' fontFamily='Microsoft YaHei'&gt;看不懂的地方先回讲义对应小节读一遍，再回来对着这页复述一次——能讲出来才算真懂。&lt;/text&gt;&#13;&#10;            &lt;text x='64' y='684' fontSize='13' fill='#8A9AAA' fontFamily='Microsoft YaHei'&gt;Python 讲授课件 · 逐节版&lt;/text&gt;&#13;&#10;            &lt;text x='1216' y='684' fontSize='13' fill='#8A9AAA' textAnchor='end' fontFamily='Microsoft YaHei'&gt;单元 18 · 第 93 节&lt;/text&gt;&#13;&#10;        &lt;/svg&gt;&#13;&#10;    &lt;/Box&gt;&#13;&#10;&lt;/Slide&gt;&#13;&#10;"/>
         <p:cNvGrpSpPr/>
         <p:nvPr/>
       </p:nvGrpSpPr>
@@ -6147,7 +3545,7 @@
   <p:cSld>
     <p:spTree>
       <p:nvGrpSpPr>
-        <p:cNvPr id="81" name="" descr="&lt;Slide style={{ width: '1280px', height: '720px', backgroundColor: '#FAFCFE', padding: 0, position: 'relative', overflow: 'hidden' }}&gt;&#13;&#10;    &lt;Box style={{ position: 'absolute', left: 64, top: 36, width: '1152px', flexDirection: 'row', alignItems: 'center', gap: 12 }}&gt;&#13;&#10;        &lt;Box style={{ background: '#0E9B78', borderRadius: 5, padding: '3px 11px' }}&gt;&#13;&#10;            &lt;Text style={{ fontSize: 14, fontWeight: 'bold', color: '#FFFFFF' }}&gt;第 94 节&lt;/Text&gt;&#13;&#10;        &lt;/Box&gt;&#13;&#10;        &lt;Text style={{ fontSize: 30, fontWeight: 'bold', color: '#16232E' }}&gt;核心知识点&lt;/Text&gt;&#13;&#10;        &lt;Text style={{ fontSize: 15, color: '#5A6B7A', marginTop: 10 }}&gt;· ★ 一次请求的旅程：URL → 视图 →…&lt;/Text&gt;&#13;&#10;    &lt;/Box&gt;&#13;&#10;    &lt;Box style={{ position: 'absolute', left: 0, top: 0, width: '1280px', height: '720px' }}&gt;&#13;&#10;        &lt;svg width='1280' height='720' viewBox='0 0 1280 720'&gt;&#13;&#10;            &lt;rect x='64' y='96' width='1152' height='330' rx='12' fill='#FFFFFF' stroke='#D8E3EE' /&gt;&lt;rect x='64' y='96' width='1152' height='4' rx='2' fill='#1F5FA8' /&gt;&lt;text x='82' y='130' fontSize='15.5' fontWeight='bold' fill='#1F5FA8' textAnchor='start' fontFamily='Microsoft YaHei'&gt;2.5 一次请求的旅程：URL → 视图 → 模板 ★&lt;/text&gt;&lt;text x='82' y='169.0' fontSize='13' fill='#3A4A58' textAnchor='start' fontFamily='Microsoft YaHei'&gt;· 这是本单元最难的部分，也是 Django 的命脉。用户每敲一次网址，都发生下面这一串事：&lt;/text&gt;&lt;rect x='64' y='574' width='1152' height='66' rx='12' fill='#EEF5FB' /&gt;&lt;text x='84' y='616' fontSize='14' fill='#243444' textAnchor='start' fontFamily='Microsoft YaHei'&gt;看不懂的地方先回讲义对应小节读一遍，再回来对着这页复述一次——能讲出来才算真懂。&lt;/text&gt;&#13;&#10;            &lt;text x='64' y='684' fontSize='13' fill='#8A9AAA' fontFamily='Microsoft YaHei'&gt;Python 讲授课件 · 逐节版&lt;/text&gt;&#13;&#10;            &lt;text x='1216' y='684' fontSize='13' fill='#8A9AAA' textAnchor='end' fontFamily='Microsoft YaHei'&gt;单元 18 · 第 94 节&lt;/text&gt;&#13;&#10;        &lt;/svg&gt;&#13;&#10;    &lt;/Box&gt;&#13;&#10;&lt;/Slide&gt;&#13;&#10;"/>
+        <p:cNvPr id="81" name="" descr="&lt;Slide style={{ width: '1280px', height: '720px', backgroundColor: '#FAFCFE', padding: 0, position: 'relative', overflow: 'hidden' }}&gt;&#13;&#10;    &lt;Box style={{ position: 'absolute', left: 64, top: 36, width: '1152px', flexDirection: 'row', alignItems: 'center', gap: 12 }}&gt;&#13;&#10;        &lt;Box style={{ background: '#0E9B78', borderRadius: 5, padding: '3px 11px' }}&gt;&#13;&#10;            &lt;Text style={{ fontSize: 14, fontWeight: 'bold', color: '#FFFFFF' }}&gt;第 94 节&lt;/Text&gt;&#13;&#10;        &lt;/Box&gt;&#13;&#10;        &lt;Text style={{ fontSize: 30, fontWeight: 'bold', color: '#16232E' }}&gt;核心知识点&lt;/Text&gt;&#13;&#10;        &lt;Text style={{ fontSize: 15, color: '#5A6B7A', marginTop: 10 }}&gt;· ★ 一次请求的旅程：URL → 视图 →…&lt;/Text&gt;&#13;&#10;    &lt;/Box&gt;&#13;&#10;    &lt;Box style={{ position: 'absolute', left: 0, top: 0, width: '1280px', height: '720px' }}&gt;&#13;&#10;        &lt;svg width='1280' height='720' viewBox='0 0 1280 720'&gt;&#13;&#10;            &lt;rect x='64' y='96' width='1152' height='330' rx='12' fill='#FFFFFF' stroke='#D8E3EE' /&gt;&lt;rect x='64' y='96' width='1152' height='4' rx='2' fill='#1F5FA8' /&gt;&lt;text x='82' y='130' fontSize='15.5' fontWeight='bold' fill='#1F5FA8' textAnchor='start' fontFamily='Microsoft YaHei'&gt;2.5 一次请求的旅程：URL → 视图 → 模板 ★&lt;/text&gt;&lt;text x='82' y='169.0' fontSize='13' fill='#3A4A58' textAnchor='start' fontFamily='Microsoft YaHei'&gt;· path() 接受三个实参：URL 模式字符串（比如 'topics/＜int…&lt;/text&gt;&lt;text x='82' y='197.5' fontSize='13' fill='#3A4A58' textAnchor='start' fontFamily='Microsoft YaHei'&gt;· /topics/3/ 命中 topic 并带出 ｛'topic_id': '3'｝…&lt;/text&gt;&lt;rect x='64' y='574' width='1152' height='66' rx='12' fill='#EEF5FB' /&gt;&lt;text x='84' y='616' fontSize='14' fill='#243444' textAnchor='start' fontFamily='Microsoft YaHei'&gt;看不懂的地方先回讲义对应小节读一遍，再回来对着这页复述一次——能讲出来才算真懂。&lt;/text&gt;&#13;&#10;            &lt;text x='64' y='684' fontSize='13' fill='#8A9AAA' fontFamily='Microsoft YaHei'&gt;Python 讲授课件 · 逐节版&lt;/text&gt;&#13;&#10;            &lt;text x='1216' y='684' fontSize='13' fill='#8A9AAA' textAnchor='end' fontFamily='Microsoft YaHei'&gt;单元 18 · 第 94 节&lt;/text&gt;&#13;&#10;        &lt;/svg&gt;&#13;&#10;    &lt;/Box&gt;&#13;&#10;&lt;/Slide&gt;&#13;&#10;"/>
         <p:cNvGrpSpPr/>
         <p:nvPr/>
       </p:nvGrpSpPr>
@@ -6608,7 +4006,7 @@
   <p:cSld>
     <p:spTree>
       <p:nvGrpSpPr>
-        <p:cNvPr id="94" name="" descr="&lt;Slide style={{ width: '1280px', height: '720px', backgroundColor: '#FAFCFE', padding: 0, position: 'relative', overflow: 'hidden' }}&gt;&#13;&#10;    &lt;Box style={{ position: 'absolute', left: 64, top: 36, width: '1152px', flexDirection: 'row', alignItems: 'center', gap: 12 }}&gt;&#13;&#10;        &lt;Box style={{ background: '#0E9B78', borderRadius: 5, padding: '3px 11px' }}&gt;&#13;&#10;            &lt;Text style={{ fontSize: 14, fontWeight: 'bold', color: '#FFFFFF' }}&gt;第 95 节&lt;/Text&gt;&#13;&#10;        &lt;/Box&gt;&#13;&#10;        &lt;Text style={{ fontSize: 30, fontWeight: 'bold', color: '#16232E' }}&gt;核心知识点&lt;/Text&gt;&#13;&#10;        &lt;Text style={{ fontSize: 15, color: '#5A6B7A', marginTop: 10 }}&gt;· 模板语法与模板继承&lt;/Text&gt;&#13;&#10;    &lt;/Box&gt;&#13;&#10;    &lt;Box style={{ position: 'absolute', left: 0, top: 0, width: '1280px', height: '720px' }}&gt;&#13;&#10;        &lt;svg width='1280' height='720' viewBox='0 0 1280 720'&gt;&#13;&#10;            &lt;rect x='64' y='96' width='1152' height='330' rx='12' fill='#FFFFFF' stroke='#D8E3EE' /&gt;&lt;rect x='64' y='96' width='1152' height='4' rx='2' fill='#1F5FA8' /&gt;&lt;text x='82' y='130' fontSize='15.5' fontWeight='bold' fill='#1F5FA8' textAnchor='start' fontFamily='Microsoft YaHei'&gt;2.6 模板语法：｛｛ ｝｝、｛% for %｝ 与 ｛%…&lt;/text&gt;&lt;text x='82' y='169.0' fontSize='13' fill='#3A4A58' textAnchor='start' fontFamily='Microsoft YaHei'&gt;· 模板里只有三样东西要记：&lt;/text&gt;&lt;rect x='64' y='574' width='1152' height='66' rx='12' fill='#EEF5FB' /&gt;&lt;text x='84' y='616' fontSize='14' fill='#243444' textAnchor='start' fontFamily='Microsoft YaHei'&gt;看不懂的地方先回讲义对应小节读一遍，再回来对着这页复述一次——能讲出来才算真懂。&lt;/text&gt;&#13;&#10;            &lt;text x='64' y='684' fontSize='13' fill='#8A9AAA' fontFamily='Microsoft YaHei'&gt;Python 讲授课件 · 逐节版&lt;/text&gt;&#13;&#10;            &lt;text x='1216' y='684' fontSize='13' fill='#8A9AAA' textAnchor='end' fontFamily='Microsoft YaHei'&gt;单元 18 · 第 95 节&lt;/text&gt;&#13;&#10;        &lt;/svg&gt;&#13;&#10;    &lt;/Box&gt;&#13;&#10;&lt;/Slide&gt;&#13;&#10;"/>
+        <p:cNvPr id="94" name="" descr="&lt;Slide style={{ width: '1280px', height: '720px', backgroundColor: '#FAFCFE', padding: 0, position: 'relative', overflow: 'hidden' }}&gt;&#13;&#10;    &lt;Box style={{ position: 'absolute', left: 64, top: 36, width: '1152px', flexDirection: 'row', alignItems: 'center', gap: 12 }}&gt;&#13;&#10;        &lt;Box style={{ background: '#0E9B78', borderRadius: 5, padding: '3px 11px' }}&gt;&#13;&#10;            &lt;Text style={{ fontSize: 14, fontWeight: 'bold', color: '#FFFFFF' }}&gt;第 95 节&lt;/Text&gt;&#13;&#10;        &lt;/Box&gt;&#13;&#10;        &lt;Text style={{ fontSize: 30, fontWeight: 'bold', color: '#16232E' }}&gt;核心知识点&lt;/Text&gt;&#13;&#10;        &lt;Text style={{ fontSize: 15, color: '#5A6B7A', marginTop: 10 }}&gt;· 模板语法与模板继承&lt;/Text&gt;&#13;&#10;    &lt;/Box&gt;&#13;&#10;    &lt;Box style={{ position: 'absolute', left: 0, top: 0, width: '1280px', height: '720px' }}&gt;&#13;&#10;        &lt;svg width='1280' height='720' viewBox='0 0 1280 720'&gt;&#13;&#10;            &lt;rect x='64' y='96' width='1152' height='330' rx='12' fill='#FFFFFF' stroke='#D8E3EE' /&gt;&lt;rect x='64' y='96' width='1152' height='4' rx='2' fill='#1F5FA8' /&gt;&lt;text x='82' y='130' fontSize='15.5' fontWeight='bold' fill='#1F5FA8' textAnchor='start' fontFamily='Microsoft YaHei'&gt;2.6 模板语法：｛｛ ｝｝、｛% for %｝ 与 ｛%…&lt;/text&gt;&lt;text x='82' y='169.0' fontSize='13' fill='#3A4A58' textAnchor='start' fontFamily='Microsoft YaHei'&gt;· 循环必须以 ｛% endfor %｝ 显式收尾——模板不靠缩进判断边界…&lt;/text&gt;&lt;text x='82' y='197.5' fontSize='13' fill='#3A4A58' textAnchor='start' fontFamily='Microsoft YaHei'&gt;· 过滤器用竖线 | 表示，在渲染过程中修改变量的值：｛｛ entry.date_added|date…&lt;/text&gt;&lt;text x='82' y='226.0' fontSize='13' fill='#3A4A58' textAnchor='start' fontFamily='Microsoft YaHei'&gt;· 'learning_logs:topic' 里的冒号前是命名空间（来自 urls.py 里的 app_…&lt;/text&gt;&lt;rect x='64' y='574' width='1152' height='66' rx='12' fill='#EEF5FB' /&gt;&lt;text x='84' y='616' fontSize='14' fill='#243444' textAnchor='start' fontFamily='Microsoft YaHei'&gt;看不懂的地方先回讲义对应小节读一遍，再回来对着这页复述一次——能讲出来才算真懂。&lt;/text&gt;&#13;&#10;            &lt;text x='64' y='684' fontSize='13' fill='#8A9AAA' fontFamily='Microsoft YaHei'&gt;Python 讲授课件 · 逐节版&lt;/text&gt;&#13;&#10;            &lt;text x='1216' y='684' fontSize='13' fill='#8A9AAA' textAnchor='end' fontFamily='Microsoft YaHei'&gt;单元 18 · 第 95 节&lt;/text&gt;&#13;&#10;        &lt;/svg&gt;&#13;&#10;    &lt;/Box&gt;&#13;&#10;&lt;/Slide&gt;&#13;&#10;"/>
         <p:cNvGrpSpPr/>
         <p:nvPr/>
       </p:nvGrpSpPr>

--- a/python-course-ppt/逐节课件/Python讲授课件-单元18.pptx
+++ b/python-course-ppt/逐节课件/Python讲授课件-单元18.pptx
@@ -238,6 +238,1482 @@
     </a:lvl9pPr>
   </p:notesStyle>
 </p:notesMaster>
+</file>
+
+<file path=ppt/notesSlides/notesSlide1.xml><?xml version="1.0" encoding="utf-8"?>
+<p:notes xmlns:a="http://schemas.openxmlformats.org/drawingml/2006/main" xmlns:p="http://schemas.openxmlformats.org/presentationml/2006/main" xmlns:r="http://schemas.openxmlformats.org/officeDocument/2006/relationships">
+  <p:cSld>
+    <p:spTree>
+      <p:nvGrpSpPr>
+        <p:cNvPr id="1" name=""/>
+        <p:cNvGrpSpPr/>
+        <p:nvPr/>
+      </p:nvGrpSpPr>
+      <p:grpSpPr>
+        <a:xfrm>
+          <a:off x="0" y="0"/>
+          <a:ext cx="0" cy="0"/>
+          <a:chOff x="0" y="0"/>
+          <a:chExt cx="0" cy="0"/>
+        </a:xfrm>
+      </p:grpSpPr>
+      <p:sp>
+        <p:nvSpPr>
+          <p:cNvPr id="2" name="讲课提示"/>
+          <p:cNvSpPr txBox="1"/>
+          <p:nvPr/>
+        </p:nvSpPr>
+        <p:spPr>
+          <a:xfrm>
+            <a:off x="457200" y="457200"/>
+            <a:ext cx="6858000" cy="4800600"/>
+          </a:xfrm>
+          <a:prstGeom prst="rect">
+            <a:avLst/>
+          </a:prstGeom>
+        </p:spPr>
+        <p:txBody>
+          <a:bodyPr wrap="square"/>
+          <a:lstStyle/>
+          <a:p>
+            <a:r>
+              <a:rPr lang="zh-CN" dirty="0"/>
+              <a:t>单元 18 · 单元 18 · Django 入门</a:t>
+            </a:r>
+          </a:p>
+          <a:p>
+            <a:r>
+              <a:rPr lang="zh-CN" dirty="0"/>
+              <a:t/>
+            </a:r>
+          </a:p>
+          <a:p>
+            <a:r>
+              <a:rPr lang="zh-CN" dirty="0"/>
+              <a:t>本单元包含以下课节：</a:t>
+            </a:r>
+          </a:p>
+          <a:p>
+            <a:r>
+              <a:rPr lang="zh-CN" dirty="0"/>
+              <a:t>· 第 92 节 ★ 虚拟环境与 Django 项目</a:t>
+            </a:r>
+          </a:p>
+          <a:p>
+            <a:r>
+              <a:rPr lang="zh-CN" dirty="0"/>
+              <a:t>· 第 93 节 ★ 应用、模型与迁移三步曲</a:t>
+            </a:r>
+          </a:p>
+          <a:p>
+            <a:r>
+              <a:rPr lang="zh-CN" dirty="0"/>
+              <a:t>· 第 94 节 ★ 一次请求的旅程：URL → 视图 → 模板</a:t>
+            </a:r>
+          </a:p>
+          <a:p>
+            <a:r>
+              <a:rPr lang="zh-CN" dirty="0"/>
+              <a:t>· 第 95 节 模板语法与模板继承</a:t>
+            </a:r>
+          </a:p>
+          <a:p>
+            <a:r>
+              <a:rPr lang="zh-CN" dirty="0"/>
+              <a:t>· 第 96 节 Django shell 与 404</a:t>
+            </a:r>
+          </a:p>
+          <a:p>
+            <a:r>
+              <a:rPr lang="zh-CN" dirty="0"/>
+              <a:t>· 第 97 节 实战、答案与验收复盘</a:t>
+            </a:r>
+          </a:p>
+          <a:p>
+            <a:r>
+              <a:rPr lang="zh-CN" dirty="0"/>
+              <a:t/>
+            </a:r>
+          </a:p>
+          <a:p>
+            <a:r>
+              <a:rPr lang="zh-CN" dirty="0"/>
+              <a:t>开场用 3 分钟讲清：这个单元学完能做出什么，最后会被关卡怎么验。</a:t>
+            </a:r>
+          </a:p>
+        </p:txBody>
+      </p:sp>
+    </p:spTree>
+  </p:cSld>
+  <p:clrMapOvr>
+    <a:masterClrMapping/>
+  </p:clrMapOvr>
+</p:notes>
+</file>
+
+<file path=ppt/notesSlides/notesSlide10.xml><?xml version="1.0" encoding="utf-8"?>
+<p:notes xmlns:a="http://schemas.openxmlformats.org/drawingml/2006/main" xmlns:p="http://schemas.openxmlformats.org/presentationml/2006/main" xmlns:r="http://schemas.openxmlformats.org/officeDocument/2006/relationships">
+  <p:cSld>
+    <p:spTree>
+      <p:nvGrpSpPr>
+        <p:cNvPr id="1" name=""/>
+        <p:cNvGrpSpPr/>
+        <p:nvPr/>
+      </p:nvGrpSpPr>
+      <p:grpSpPr>
+        <a:xfrm>
+          <a:off x="0" y="0"/>
+          <a:ext cx="0" cy="0"/>
+          <a:chOff x="0" y="0"/>
+          <a:chExt cx="0" cy="0"/>
+        </a:xfrm>
+      </p:grpSpPr>
+      <p:sp>
+        <p:nvSpPr>
+          <p:cNvPr id="2" name="讲课提示"/>
+          <p:cNvSpPr txBox="1"/>
+          <p:nvPr/>
+        </p:nvSpPr>
+        <p:spPr>
+          <a:xfrm>
+            <a:off x="457200" y="457200"/>
+            <a:ext cx="6858000" cy="4800600"/>
+          </a:xfrm>
+          <a:prstGeom prst="rect">
+            <a:avLst/>
+          </a:prstGeom>
+        </p:spPr>
+        <p:txBody>
+          <a:bodyPr wrap="square"/>
+          <a:lstStyle/>
+          <a:p>
+            <a:r>
+              <a:rPr lang="zh-CN" dirty="0"/>
+              <a:t>第 96 节 · Django shell 与 404</a:t>
+            </a:r>
+          </a:p>
+          <a:p>
+            <a:r>
+              <a:rPr lang="zh-CN" dirty="0"/>
+              <a:t>单元 18 · Django 入门 · W24</a:t>
+            </a:r>
+          </a:p>
+          <a:p>
+            <a:r>
+              <a:rPr lang="zh-CN" dirty="0"/>
+              <a:t/>
+            </a:r>
+          </a:p>
+          <a:p>
+            <a:r>
+              <a:rPr lang="zh-CN" dirty="0"/>
+              <a:t>学习目标：会用 shell 直接查数据库；理解 get_object_or_404 的意义</a:t>
+            </a:r>
+          </a:p>
+          <a:p>
+            <a:r>
+              <a:rPr lang="zh-CN" dirty="0"/>
+              <a:t/>
+            </a:r>
+          </a:p>
+          <a:p>
+            <a:r>
+              <a:rPr lang="zh-CN" dirty="0"/>
+              <a:t>课堂实操（40 分钟，不看答案）：</a:t>
+            </a:r>
+          </a:p>
+          <a:p>
+            <a:r>
+              <a:rPr lang="zh-CN" dirty="0"/>
+              <a:t>· 用 shell 造三条 Entry</a:t>
+            </a:r>
+          </a:p>
+          <a:p>
+            <a:r>
+              <a:rPr lang="zh-CN" dirty="0"/>
+              <a:t>· 访问一个不存在的 topic_id，看 404 页面</a:t>
+            </a:r>
+          </a:p>
+          <a:p>
+            <a:r>
+              <a:rPr lang="zh-CN" dirty="0"/>
+              <a:t/>
+            </a:r>
+          </a:p>
+          <a:p>
+            <a:r>
+              <a:rPr lang="zh-CN" dirty="0"/>
+              <a:t>课后作业：</a:t>
+            </a:r>
+          </a:p>
+          <a:p>
+            <a:r>
+              <a:rPr lang="zh-CN" dirty="0"/>
+              <a:t>· 产出：能浏览主题与条目的本地网站</a:t>
+            </a:r>
+          </a:p>
+          <a:p>
+            <a:r>
+              <a:rPr lang="zh-CN" dirty="0"/>
+              <a:t/>
+            </a:r>
+          </a:p>
+          <a:p>
+            <a:r>
+              <a:rPr lang="zh-CN" dirty="0"/>
+              <a:t>节奏：讲 20 分钟 → 学员自己敲 40 分钟（不看答案）→ 对讲评自查 20 分钟 → 写作业 10 分钟。</a:t>
+            </a:r>
+          </a:p>
+        </p:txBody>
+      </p:sp>
+    </p:spTree>
+  </p:cSld>
+  <p:clrMapOvr>
+    <a:masterClrMapping/>
+  </p:clrMapOvr>
+</p:notes>
+</file>
+
+<file path=ppt/notesSlides/notesSlide11.xml><?xml version="1.0" encoding="utf-8"?>
+<p:notes xmlns:a="http://schemas.openxmlformats.org/drawingml/2006/main" xmlns:p="http://schemas.openxmlformats.org/presentationml/2006/main" xmlns:r="http://schemas.openxmlformats.org/officeDocument/2006/relationships">
+  <p:cSld>
+    <p:spTree>
+      <p:nvGrpSpPr>
+        <p:cNvPr id="1" name=""/>
+        <p:cNvGrpSpPr/>
+        <p:nvPr/>
+      </p:nvGrpSpPr>
+      <p:grpSpPr>
+        <a:xfrm>
+          <a:off x="0" y="0"/>
+          <a:ext cx="0" cy="0"/>
+          <a:chOff x="0" y="0"/>
+          <a:chExt cx="0" cy="0"/>
+        </a:xfrm>
+      </p:grpSpPr>
+      <p:sp>
+        <p:nvSpPr>
+          <p:cNvPr id="2" name="讲课提示"/>
+          <p:cNvSpPr txBox="1"/>
+          <p:nvPr/>
+        </p:nvSpPr>
+        <p:spPr>
+          <a:xfrm>
+            <a:off x="457200" y="457200"/>
+            <a:ext cx="6858000" cy="4800600"/>
+          </a:xfrm>
+          <a:prstGeom prst="rect">
+            <a:avLst/>
+          </a:prstGeom>
+        </p:spPr>
+        <p:txBody>
+          <a:bodyPr wrap="square"/>
+          <a:lstStyle/>
+          <a:p>
+            <a:r>
+              <a:rPr lang="zh-CN" dirty="0"/>
+              <a:t>第 96 节 · 核心知识点：Django shell 与 404</a:t>
+            </a:r>
+          </a:p>
+          <a:p>
+            <a:r>
+              <a:rPr lang="zh-CN" dirty="0"/>
+              <a:t/>
+            </a:r>
+          </a:p>
+          <a:p>
+            <a:r>
+              <a:rPr lang="zh-CN" dirty="0"/>
+              <a:t>讲这一页时：先让学生说出上节课的结论，再逐块讲要点。</a:t>
+            </a:r>
+          </a:p>
+          <a:p>
+            <a:r>
+              <a:rPr lang="zh-CN" dirty="0"/>
+              <a:t>每讲完一块，问一句「这一步如果写错了，报错会长什么样？」——把错误提前讲。</a:t>
+            </a:r>
+          </a:p>
+          <a:p>
+            <a:r>
+              <a:rPr lang="zh-CN" dirty="0"/>
+              <a:t/>
+            </a:r>
+          </a:p>
+          <a:p>
+            <a:r>
+              <a:rPr lang="zh-CN" dirty="0"/>
+              <a:t>本节目标：会用 shell 直接查数据库；理解 get_object_or_404 的意义</a:t>
+            </a:r>
+          </a:p>
+          <a:p>
+            <a:r>
+              <a:rPr lang="zh-CN" dirty="0"/>
+              <a:t/>
+            </a:r>
+          </a:p>
+          <a:p>
+            <a:r>
+              <a:rPr lang="zh-CN" dirty="0"/>
+              <a:t>看不到懂的地方，回讲义对应小节读一遍，再回来对着这页复述一次——能讲出来才算真懂。</a:t>
+            </a:r>
+          </a:p>
+        </p:txBody>
+      </p:sp>
+    </p:spTree>
+  </p:cSld>
+  <p:clrMapOvr>
+    <a:masterClrMapping/>
+  </p:clrMapOvr>
+</p:notes>
+</file>
+
+<file path=ppt/notesSlides/notesSlide12.xml><?xml version="1.0" encoding="utf-8"?>
+<p:notes xmlns:a="http://schemas.openxmlformats.org/drawingml/2006/main" xmlns:p="http://schemas.openxmlformats.org/presentationml/2006/main" xmlns:r="http://schemas.openxmlformats.org/officeDocument/2006/relationships">
+  <p:cSld>
+    <p:spTree>
+      <p:nvGrpSpPr>
+        <p:cNvPr id="1" name=""/>
+        <p:cNvGrpSpPr/>
+        <p:nvPr/>
+      </p:nvGrpSpPr>
+      <p:grpSpPr>
+        <a:xfrm>
+          <a:off x="0" y="0"/>
+          <a:ext cx="0" cy="0"/>
+          <a:chOff x="0" y="0"/>
+          <a:chExt cx="0" cy="0"/>
+        </a:xfrm>
+      </p:grpSpPr>
+      <p:sp>
+        <p:nvSpPr>
+          <p:cNvPr id="2" name="讲课提示"/>
+          <p:cNvSpPr txBox="1"/>
+          <p:nvPr/>
+        </p:nvSpPr>
+        <p:spPr>
+          <a:xfrm>
+            <a:off x="457200" y="457200"/>
+            <a:ext cx="6858000" cy="4800600"/>
+          </a:xfrm>
+          <a:prstGeom prst="rect">
+            <a:avLst/>
+          </a:prstGeom>
+        </p:spPr>
+        <p:txBody>
+          <a:bodyPr wrap="square"/>
+          <a:lstStyle/>
+          <a:p>
+            <a:r>
+              <a:rPr lang="zh-CN" dirty="0"/>
+              <a:t>第 97 节 · 实战、答案与验收复盘</a:t>
+            </a:r>
+          </a:p>
+          <a:p>
+            <a:r>
+              <a:rPr lang="zh-CN" dirty="0"/>
+              <a:t>单元 18 · Django 入门 · W24</a:t>
+            </a:r>
+          </a:p>
+          <a:p>
+            <a:r>
+              <a:rPr lang="zh-CN" dirty="0"/>
+              <a:t/>
+            </a:r>
+          </a:p>
+          <a:p>
+            <a:r>
+              <a:rPr lang="zh-CN" dirty="0"/>
+              <a:t>学习目标：独立完成单元 18 练习，画得出项目结构图</a:t>
+            </a:r>
+          </a:p>
+          <a:p>
+            <a:r>
+              <a:rPr lang="zh-CN" dirty="0"/>
+              <a:t/>
+            </a:r>
+          </a:p>
+          <a:p>
+            <a:r>
+              <a:rPr lang="zh-CN" dirty="0"/>
+              <a:t>课堂实操（40 分钟，不看答案）：</a:t>
+            </a:r>
+          </a:p>
+          <a:p>
+            <a:r>
+              <a:rPr lang="zh-CN" dirty="0"/>
+              <a:t>· 限时 40 分钟独立完成基础档</a:t>
+            </a:r>
+          </a:p>
+          <a:p>
+            <a:r>
+              <a:rPr lang="zh-CN" dirty="0"/>
+              <a:t>· 互相检查对方的 settings.py 配置</a:t>
+            </a:r>
+          </a:p>
+          <a:p>
+            <a:r>
+              <a:rPr lang="zh-CN" dirty="0"/>
+              <a:t/>
+            </a:r>
+          </a:p>
+          <a:p>
+            <a:r>
+              <a:rPr lang="zh-CN" dirty="0"/>
+              <a:t>课后作业：</a:t>
+            </a:r>
+          </a:p>
+          <a:p>
+            <a:r>
+              <a:rPr lang="zh-CN" dirty="0"/>
+              <a:t>· ★ 产出：学习笔记本地网站</a:t>
+            </a:r>
+          </a:p>
+          <a:p>
+            <a:r>
+              <a:rPr lang="zh-CN" dirty="0"/>
+              <a:t/>
+            </a:r>
+          </a:p>
+          <a:p>
+            <a:r>
+              <a:rPr lang="zh-CN" dirty="0"/>
+              <a:t>节奏：讲 20 分钟 → 学员自己敲 40 分钟（不看答案）→ 对讲评自查 20 分钟 → 写作业 10 分钟。</a:t>
+            </a:r>
+          </a:p>
+        </p:txBody>
+      </p:sp>
+    </p:spTree>
+  </p:cSld>
+  <p:clrMapOvr>
+    <a:masterClrMapping/>
+  </p:clrMapOvr>
+</p:notes>
+</file>
+
+<file path=ppt/notesSlides/notesSlide13.xml><?xml version="1.0" encoding="utf-8"?>
+<p:notes xmlns:a="http://schemas.openxmlformats.org/drawingml/2006/main" xmlns:p="http://schemas.openxmlformats.org/presentationml/2006/main" xmlns:r="http://schemas.openxmlformats.org/officeDocument/2006/relationships">
+  <p:cSld>
+    <p:spTree>
+      <p:nvGrpSpPr>
+        <p:cNvPr id="1" name=""/>
+        <p:cNvGrpSpPr/>
+        <p:nvPr/>
+      </p:nvGrpSpPr>
+      <p:grpSpPr>
+        <a:xfrm>
+          <a:off x="0" y="0"/>
+          <a:ext cx="0" cy="0"/>
+          <a:chOff x="0" y="0"/>
+          <a:chExt cx="0" cy="0"/>
+        </a:xfrm>
+      </p:grpSpPr>
+      <p:sp>
+        <p:nvSpPr>
+          <p:cNvPr id="2" name="讲课提示"/>
+          <p:cNvSpPr txBox="1"/>
+          <p:nvPr/>
+        </p:nvSpPr>
+        <p:spPr>
+          <a:xfrm>
+            <a:off x="457200" y="457200"/>
+            <a:ext cx="6858000" cy="4800600"/>
+          </a:xfrm>
+          <a:prstGeom prst="rect">
+            <a:avLst/>
+          </a:prstGeom>
+        </p:spPr>
+        <p:txBody>
+          <a:bodyPr wrap="square"/>
+          <a:lstStyle/>
+          <a:p>
+            <a:r>
+              <a:rPr lang="zh-CN" dirty="0"/>
+              <a:t>第 97 节 · 核心知识点：实战、答案与验收复盘</a:t>
+            </a:r>
+          </a:p>
+          <a:p>
+            <a:r>
+              <a:rPr lang="zh-CN" dirty="0"/>
+              <a:t/>
+            </a:r>
+          </a:p>
+          <a:p>
+            <a:r>
+              <a:rPr lang="zh-CN" dirty="0"/>
+              <a:t>讲这一页时：先让学生说出上节课的结论，再逐块讲要点。</a:t>
+            </a:r>
+          </a:p>
+          <a:p>
+            <a:r>
+              <a:rPr lang="zh-CN" dirty="0"/>
+              <a:t>每讲完一块，问一句「这一步如果写错了，报错会长什么样？」——把错误提前讲。</a:t>
+            </a:r>
+          </a:p>
+          <a:p>
+            <a:r>
+              <a:rPr lang="zh-CN" dirty="0"/>
+              <a:t/>
+            </a:r>
+          </a:p>
+          <a:p>
+            <a:r>
+              <a:rPr lang="zh-CN" dirty="0"/>
+              <a:t>本节目标：独立完成单元 18 练习，画得出项目结构图</a:t>
+            </a:r>
+          </a:p>
+          <a:p>
+            <a:r>
+              <a:rPr lang="zh-CN" dirty="0"/>
+              <a:t/>
+            </a:r>
+          </a:p>
+          <a:p>
+            <a:r>
+              <a:rPr lang="zh-CN" dirty="0"/>
+              <a:t>看不到懂的地方，回讲义对应小节读一遍，再回来对着这页复述一次——能讲出来才算真懂。</a:t>
+            </a:r>
+          </a:p>
+        </p:txBody>
+      </p:sp>
+    </p:spTree>
+  </p:cSld>
+  <p:clrMapOvr>
+    <a:masterClrMapping/>
+  </p:clrMapOvr>
+</p:notes>
+</file>
+
+<file path=ppt/notesSlides/notesSlide14.xml><?xml version="1.0" encoding="utf-8"?>
+<p:notes xmlns:a="http://schemas.openxmlformats.org/drawingml/2006/main" xmlns:p="http://schemas.openxmlformats.org/presentationml/2006/main" xmlns:r="http://schemas.openxmlformats.org/officeDocument/2006/relationships">
+  <p:cSld>
+    <p:spTree>
+      <p:nvGrpSpPr>
+        <p:cNvPr id="1" name=""/>
+        <p:cNvGrpSpPr/>
+        <p:nvPr/>
+      </p:nvGrpSpPr>
+      <p:grpSpPr>
+        <a:xfrm>
+          <a:off x="0" y="0"/>
+          <a:ext cx="0" cy="0"/>
+          <a:chOff x="0" y="0"/>
+          <a:chExt cx="0" cy="0"/>
+        </a:xfrm>
+      </p:grpSpPr>
+      <p:sp>
+        <p:nvSpPr>
+          <p:cNvPr id="2" name="讲课提示"/>
+          <p:cNvSpPr txBox="1"/>
+          <p:nvPr/>
+        </p:nvSpPr>
+        <p:spPr>
+          <a:xfrm>
+            <a:off x="457200" y="457200"/>
+            <a:ext cx="6858000" cy="4800600"/>
+          </a:xfrm>
+          <a:prstGeom prst="rect">
+            <a:avLst/>
+          </a:prstGeom>
+        </p:spPr>
+        <p:txBody>
+          <a:bodyPr wrap="square"/>
+          <a:lstStyle/>
+          <a:p>
+            <a:r>
+              <a:rPr lang="zh-CN" dirty="0"/>
+              <a:t>单元 18 小结 · 单元 18 · 小结</a:t>
+            </a:r>
+          </a:p>
+          <a:p>
+            <a:r>
+              <a:rPr lang="zh-CN" dirty="0"/>
+              <a:t/>
+            </a:r>
+          </a:p>
+          <a:p>
+            <a:r>
+              <a:rPr lang="zh-CN" dirty="0"/>
+              <a:t>收尾动作：让学生合上讲义，口述本单元三个最重要的结论；说不出来的，回对应课节。</a:t>
+            </a:r>
+          </a:p>
+          <a:p>
+            <a:r>
+              <a:rPr lang="zh-CN" dirty="0"/>
+              <a:t>然后当场勾一遍本单元课节的「已完成」，没打勾的进下一单元前补掉。</a:t>
+            </a:r>
+          </a:p>
+        </p:txBody>
+      </p:sp>
+    </p:spTree>
+  </p:cSld>
+  <p:clrMapOvr>
+    <a:masterClrMapping/>
+  </p:clrMapOvr>
+</p:notes>
+</file>
+
+<file path=ppt/notesSlides/notesSlide2.xml><?xml version="1.0" encoding="utf-8"?>
+<p:notes xmlns:a="http://schemas.openxmlformats.org/drawingml/2006/main" xmlns:p="http://schemas.openxmlformats.org/presentationml/2006/main" xmlns:r="http://schemas.openxmlformats.org/officeDocument/2006/relationships">
+  <p:cSld>
+    <p:spTree>
+      <p:nvGrpSpPr>
+        <p:cNvPr id="1" name=""/>
+        <p:cNvGrpSpPr/>
+        <p:nvPr/>
+      </p:nvGrpSpPr>
+      <p:grpSpPr>
+        <a:xfrm>
+          <a:off x="0" y="0"/>
+          <a:ext cx="0" cy="0"/>
+          <a:chOff x="0" y="0"/>
+          <a:chExt cx="0" cy="0"/>
+        </a:xfrm>
+      </p:grpSpPr>
+      <p:sp>
+        <p:nvSpPr>
+          <p:cNvPr id="2" name="讲课提示"/>
+          <p:cNvSpPr txBox="1"/>
+          <p:nvPr/>
+        </p:nvSpPr>
+        <p:spPr>
+          <a:xfrm>
+            <a:off x="457200" y="457200"/>
+            <a:ext cx="6858000" cy="4800600"/>
+          </a:xfrm>
+          <a:prstGeom prst="rect">
+            <a:avLst/>
+          </a:prstGeom>
+        </p:spPr>
+        <p:txBody>
+          <a:bodyPr wrap="square"/>
+          <a:lstStyle/>
+          <a:p>
+            <a:r>
+              <a:rPr lang="zh-CN" dirty="0"/>
+              <a:t>第 92 节 · ★ 虚拟环境与 Django 项目</a:t>
+            </a:r>
+          </a:p>
+          <a:p>
+            <a:r>
+              <a:rPr lang="zh-CN" dirty="0"/>
+              <a:t>单元 18 · Django 入门 · W22–W23</a:t>
+            </a:r>
+          </a:p>
+          <a:p>
+            <a:r>
+              <a:rPr lang="zh-CN" dirty="0"/>
+              <a:t/>
+            </a:r>
+          </a:p>
+          <a:p>
+            <a:r>
+              <a:rPr lang="zh-CN" dirty="0"/>
+              <a:t>学习目标：说清为什么必须用虚拟环境；能建项目、跑起来、看清目录结构</a:t>
+            </a:r>
+          </a:p>
+          <a:p>
+            <a:r>
+              <a:rPr lang="zh-CN" dirty="0"/>
+              <a:t/>
+            </a:r>
+          </a:p>
+          <a:p>
+            <a:r>
+              <a:rPr lang="zh-CN" dirty="0"/>
+              <a:t>课堂实操（40 分钟，不看答案）：</a:t>
+            </a:r>
+          </a:p>
+          <a:p>
+            <a:r>
+              <a:rPr lang="zh-CN" dirty="0"/>
+              <a:t>· 建 ll_env 并激活，确认命令行出现 (ll_env)</a:t>
+            </a:r>
+          </a:p>
+          <a:p>
+            <a:r>
+              <a:rPr lang="zh-CN" dirty="0"/>
+              <a:t>· 跑 startserver 打开首页</a:t>
+            </a:r>
+          </a:p>
+          <a:p>
+            <a:r>
+              <a:rPr lang="zh-CN" dirty="0"/>
+              <a:t/>
+            </a:r>
+          </a:p>
+          <a:p>
+            <a:r>
+              <a:rPr lang="zh-CN" dirty="0"/>
+              <a:t>课后作业：</a:t>
+            </a:r>
+          </a:p>
+          <a:p>
+            <a:r>
+              <a:rPr lang="zh-CN" dirty="0"/>
+              <a:t>· 产出：能跑起来的空 Django 项目</a:t>
+            </a:r>
+          </a:p>
+          <a:p>
+            <a:r>
+              <a:rPr lang="zh-CN" dirty="0"/>
+              <a:t/>
+            </a:r>
+          </a:p>
+          <a:p>
+            <a:r>
+              <a:rPr lang="zh-CN" dirty="0"/>
+              <a:t>节奏：讲 20 分钟 → 学员自己敲 40 分钟（不看答案）→ 对讲评自查 20 分钟 → 写作业 10 分钟。</a:t>
+            </a:r>
+          </a:p>
+        </p:txBody>
+      </p:sp>
+    </p:spTree>
+  </p:cSld>
+  <p:clrMapOvr>
+    <a:masterClrMapping/>
+  </p:clrMapOvr>
+</p:notes>
+</file>
+
+<file path=ppt/notesSlides/notesSlide3.xml><?xml version="1.0" encoding="utf-8"?>
+<p:notes xmlns:a="http://schemas.openxmlformats.org/drawingml/2006/main" xmlns:p="http://schemas.openxmlformats.org/presentationml/2006/main" xmlns:r="http://schemas.openxmlformats.org/officeDocument/2006/relationships">
+  <p:cSld>
+    <p:spTree>
+      <p:nvGrpSpPr>
+        <p:cNvPr id="1" name=""/>
+        <p:cNvGrpSpPr/>
+        <p:nvPr/>
+      </p:nvGrpSpPr>
+      <p:grpSpPr>
+        <a:xfrm>
+          <a:off x="0" y="0"/>
+          <a:ext cx="0" cy="0"/>
+          <a:chOff x="0" y="0"/>
+          <a:chExt cx="0" cy="0"/>
+        </a:xfrm>
+      </p:grpSpPr>
+      <p:sp>
+        <p:nvSpPr>
+          <p:cNvPr id="2" name="讲课提示"/>
+          <p:cNvSpPr txBox="1"/>
+          <p:nvPr/>
+        </p:nvSpPr>
+        <p:spPr>
+          <a:xfrm>
+            <a:off x="457200" y="457200"/>
+            <a:ext cx="6858000" cy="4800600"/>
+          </a:xfrm>
+          <a:prstGeom prst="rect">
+            <a:avLst/>
+          </a:prstGeom>
+        </p:spPr>
+        <p:txBody>
+          <a:bodyPr wrap="square"/>
+          <a:lstStyle/>
+          <a:p>
+            <a:r>
+              <a:rPr lang="zh-CN" dirty="0"/>
+              <a:t>第 92 节 · 核心知识点：★ 虚拟环境与 Django 项目</a:t>
+            </a:r>
+          </a:p>
+          <a:p>
+            <a:r>
+              <a:rPr lang="zh-CN" dirty="0"/>
+              <a:t/>
+            </a:r>
+          </a:p>
+          <a:p>
+            <a:r>
+              <a:rPr lang="zh-CN" dirty="0"/>
+              <a:t>讲这一页时：先让学生说出上节课的结论，再逐块讲要点。</a:t>
+            </a:r>
+          </a:p>
+          <a:p>
+            <a:r>
+              <a:rPr lang="zh-CN" dirty="0"/>
+              <a:t>每讲完一块，问一句「这一步如果写错了，报错会长什么样？」——把错误提前讲。</a:t>
+            </a:r>
+          </a:p>
+          <a:p>
+            <a:r>
+              <a:rPr lang="zh-CN" dirty="0"/>
+              <a:t/>
+            </a:r>
+          </a:p>
+          <a:p>
+            <a:r>
+              <a:rPr lang="zh-CN" dirty="0"/>
+              <a:t>本节目标：说清为什么必须用虚拟环境；能建项目、跑起来、看清目录结构</a:t>
+            </a:r>
+          </a:p>
+          <a:p>
+            <a:r>
+              <a:rPr lang="zh-CN" dirty="0"/>
+              <a:t/>
+            </a:r>
+          </a:p>
+          <a:p>
+            <a:r>
+              <a:rPr lang="zh-CN" dirty="0"/>
+              <a:t>看不到懂的地方，回讲义对应小节读一遍，再回来对着这页复述一次——能讲出来才算真懂。</a:t>
+            </a:r>
+          </a:p>
+        </p:txBody>
+      </p:sp>
+    </p:spTree>
+  </p:cSld>
+  <p:clrMapOvr>
+    <a:masterClrMapping/>
+  </p:clrMapOvr>
+</p:notes>
+</file>
+
+<file path=ppt/notesSlides/notesSlide4.xml><?xml version="1.0" encoding="utf-8"?>
+<p:notes xmlns:a="http://schemas.openxmlformats.org/drawingml/2006/main" xmlns:p="http://schemas.openxmlformats.org/presentationml/2006/main" xmlns:r="http://schemas.openxmlformats.org/officeDocument/2006/relationships">
+  <p:cSld>
+    <p:spTree>
+      <p:nvGrpSpPr>
+        <p:cNvPr id="1" name=""/>
+        <p:cNvGrpSpPr/>
+        <p:nvPr/>
+      </p:nvGrpSpPr>
+      <p:grpSpPr>
+        <a:xfrm>
+          <a:off x="0" y="0"/>
+          <a:ext cx="0" cy="0"/>
+          <a:chOff x="0" y="0"/>
+          <a:chExt cx="0" cy="0"/>
+        </a:xfrm>
+      </p:grpSpPr>
+      <p:sp>
+        <p:nvSpPr>
+          <p:cNvPr id="2" name="讲课提示"/>
+          <p:cNvSpPr txBox="1"/>
+          <p:nvPr/>
+        </p:nvSpPr>
+        <p:spPr>
+          <a:xfrm>
+            <a:off x="457200" y="457200"/>
+            <a:ext cx="6858000" cy="4800600"/>
+          </a:xfrm>
+          <a:prstGeom prst="rect">
+            <a:avLst/>
+          </a:prstGeom>
+        </p:spPr>
+        <p:txBody>
+          <a:bodyPr wrap="square"/>
+          <a:lstStyle/>
+          <a:p>
+            <a:r>
+              <a:rPr lang="zh-CN" dirty="0"/>
+              <a:t>第 93 节 · ★ 应用、模型与迁移三步曲</a:t>
+            </a:r>
+          </a:p>
+          <a:p>
+            <a:r>
+              <a:rPr lang="zh-CN" dirty="0"/>
+              <a:t>单元 18 · Django 入门 · W23</a:t>
+            </a:r>
+          </a:p>
+          <a:p>
+            <a:r>
+              <a:rPr lang="zh-CN" dirty="0"/>
+              <a:t/>
+            </a:r>
+          </a:p>
+          <a:p>
+            <a:r>
+              <a:rPr lang="zh-CN" dirty="0"/>
+              <a:t>学习目标：定义 Topic / Entry 模型；掌握「改模型 → makemigrations → migrate」三步</a:t>
+            </a:r>
+          </a:p>
+          <a:p>
+            <a:r>
+              <a:rPr lang="zh-CN" dirty="0"/>
+              <a:t/>
+            </a:r>
+          </a:p>
+          <a:p>
+            <a:r>
+              <a:rPr lang="zh-CN" dirty="0"/>
+              <a:t>课堂实操（40 分钟，不看答案）：</a:t>
+            </a:r>
+          </a:p>
+          <a:p>
+            <a:r>
+              <a:rPr lang="zh-CN" dirty="0"/>
+              <a:t>· 改一次模型跑一遍三步曲</a:t>
+            </a:r>
+          </a:p>
+          <a:p>
+            <a:r>
+              <a:rPr lang="zh-CN" dirty="0"/>
+              <a:t>· 故意改错 on_delete 看报错</a:t>
+            </a:r>
+          </a:p>
+          <a:p>
+            <a:r>
+              <a:rPr lang="zh-CN" dirty="0"/>
+              <a:t/>
+            </a:r>
+          </a:p>
+          <a:p>
+            <a:r>
+              <a:rPr lang="zh-CN" dirty="0"/>
+              <a:t>课后作业：</a:t>
+            </a:r>
+          </a:p>
+          <a:p>
+            <a:r>
+              <a:rPr lang="zh-CN" dirty="0"/>
+              <a:t>· 产出：能进管理后台看到 Topic 和 Entry</a:t>
+            </a:r>
+          </a:p>
+          <a:p>
+            <a:r>
+              <a:rPr lang="zh-CN" dirty="0"/>
+              <a:t/>
+            </a:r>
+          </a:p>
+          <a:p>
+            <a:r>
+              <a:rPr lang="zh-CN" dirty="0"/>
+              <a:t>节奏：讲 20 分钟 → 学员自己敲 40 分钟（不看答案）→ 对讲评自查 20 分钟 → 写作业 10 分钟。</a:t>
+            </a:r>
+          </a:p>
+        </p:txBody>
+      </p:sp>
+    </p:spTree>
+  </p:cSld>
+  <p:clrMapOvr>
+    <a:masterClrMapping/>
+  </p:clrMapOvr>
+</p:notes>
+</file>
+
+<file path=ppt/notesSlides/notesSlide5.xml><?xml version="1.0" encoding="utf-8"?>
+<p:notes xmlns:a="http://schemas.openxmlformats.org/drawingml/2006/main" xmlns:p="http://schemas.openxmlformats.org/presentationml/2006/main" xmlns:r="http://schemas.openxmlformats.org/officeDocument/2006/relationships">
+  <p:cSld>
+    <p:spTree>
+      <p:nvGrpSpPr>
+        <p:cNvPr id="1" name=""/>
+        <p:cNvGrpSpPr/>
+        <p:nvPr/>
+      </p:nvGrpSpPr>
+      <p:grpSpPr>
+        <a:xfrm>
+          <a:off x="0" y="0"/>
+          <a:ext cx="0" cy="0"/>
+          <a:chOff x="0" y="0"/>
+          <a:chExt cx="0" cy="0"/>
+        </a:xfrm>
+      </p:grpSpPr>
+      <p:sp>
+        <p:nvSpPr>
+          <p:cNvPr id="2" name="讲课提示"/>
+          <p:cNvSpPr txBox="1"/>
+          <p:nvPr/>
+        </p:nvSpPr>
+        <p:spPr>
+          <a:xfrm>
+            <a:off x="457200" y="457200"/>
+            <a:ext cx="6858000" cy="4800600"/>
+          </a:xfrm>
+          <a:prstGeom prst="rect">
+            <a:avLst/>
+          </a:prstGeom>
+        </p:spPr>
+        <p:txBody>
+          <a:bodyPr wrap="square"/>
+          <a:lstStyle/>
+          <a:p>
+            <a:r>
+              <a:rPr lang="zh-CN" dirty="0"/>
+              <a:t>第 93 节 · 核心知识点：★ 应用、模型与迁移三步曲</a:t>
+            </a:r>
+          </a:p>
+          <a:p>
+            <a:r>
+              <a:rPr lang="zh-CN" dirty="0"/>
+              <a:t/>
+            </a:r>
+          </a:p>
+          <a:p>
+            <a:r>
+              <a:rPr lang="zh-CN" dirty="0"/>
+              <a:t>讲这一页时：先让学生说出上节课的结论，再逐块讲要点。</a:t>
+            </a:r>
+          </a:p>
+          <a:p>
+            <a:r>
+              <a:rPr lang="zh-CN" dirty="0"/>
+              <a:t>每讲完一块，问一句「这一步如果写错了，报错会长什么样？」——把错误提前讲。</a:t>
+            </a:r>
+          </a:p>
+          <a:p>
+            <a:r>
+              <a:rPr lang="zh-CN" dirty="0"/>
+              <a:t/>
+            </a:r>
+          </a:p>
+          <a:p>
+            <a:r>
+              <a:rPr lang="zh-CN" dirty="0"/>
+              <a:t>本节目标：定义 Topic / Entry 模型；掌握「改模型 → makemigrations → migrate」三步</a:t>
+            </a:r>
+          </a:p>
+          <a:p>
+            <a:r>
+              <a:rPr lang="zh-CN" dirty="0"/>
+              <a:t/>
+            </a:r>
+          </a:p>
+          <a:p>
+            <a:r>
+              <a:rPr lang="zh-CN" dirty="0"/>
+              <a:t>看不到懂的地方，回讲义对应小节读一遍，再回来对着这页复述一次——能讲出来才算真懂。</a:t>
+            </a:r>
+          </a:p>
+        </p:txBody>
+      </p:sp>
+    </p:spTree>
+  </p:cSld>
+  <p:clrMapOvr>
+    <a:masterClrMapping/>
+  </p:clrMapOvr>
+</p:notes>
+</file>
+
+<file path=ppt/notesSlides/notesSlide6.xml><?xml version="1.0" encoding="utf-8"?>
+<p:notes xmlns:a="http://schemas.openxmlformats.org/drawingml/2006/main" xmlns:p="http://schemas.openxmlformats.org/presentationml/2006/main" xmlns:r="http://schemas.openxmlformats.org/officeDocument/2006/relationships">
+  <p:cSld>
+    <p:spTree>
+      <p:nvGrpSpPr>
+        <p:cNvPr id="1" name=""/>
+        <p:cNvGrpSpPr/>
+        <p:nvPr/>
+      </p:nvGrpSpPr>
+      <p:grpSpPr>
+        <a:xfrm>
+          <a:off x="0" y="0"/>
+          <a:ext cx="0" cy="0"/>
+          <a:chOff x="0" y="0"/>
+          <a:chExt cx="0" cy="0"/>
+        </a:xfrm>
+      </p:grpSpPr>
+      <p:sp>
+        <p:nvSpPr>
+          <p:cNvPr id="2" name="讲课提示"/>
+          <p:cNvSpPr txBox="1"/>
+          <p:nvPr/>
+        </p:nvSpPr>
+        <p:spPr>
+          <a:xfrm>
+            <a:off x="457200" y="457200"/>
+            <a:ext cx="6858000" cy="4800600"/>
+          </a:xfrm>
+          <a:prstGeom prst="rect">
+            <a:avLst/>
+          </a:prstGeom>
+        </p:spPr>
+        <p:txBody>
+          <a:bodyPr wrap="square"/>
+          <a:lstStyle/>
+          <a:p>
+            <a:r>
+              <a:rPr lang="zh-CN" dirty="0"/>
+              <a:t>第 94 节 · ★ 一次请求的旅程：URL → 视图 → 模板</a:t>
+            </a:r>
+          </a:p>
+          <a:p>
+            <a:r>
+              <a:rPr lang="zh-CN" dirty="0"/>
+              <a:t>单元 18 · Django 入门 · W23–W24</a:t>
+            </a:r>
+          </a:p>
+          <a:p>
+            <a:r>
+              <a:rPr lang="zh-CN" dirty="0"/>
+              <a:t/>
+            </a:r>
+          </a:p>
+          <a:p>
+            <a:r>
+              <a:rPr lang="zh-CN" dirty="0"/>
+              <a:t>学习目标：能画完整请求链路图；会映射 URL、写视图、渲染模板</a:t>
+            </a:r>
+          </a:p>
+          <a:p>
+            <a:r>
+              <a:rPr lang="zh-CN" dirty="0"/>
+              <a:t/>
+            </a:r>
+          </a:p>
+          <a:p>
+            <a:r>
+              <a:rPr lang="zh-CN" dirty="0"/>
+              <a:t>课堂实操（40 分钟，不看答案）：</a:t>
+            </a:r>
+          </a:p>
+          <a:p>
+            <a:r>
+              <a:rPr lang="zh-CN" dirty="0"/>
+              <a:t>· 现场加一条 URL 并访问它</a:t>
+            </a:r>
+          </a:p>
+          <a:p>
+            <a:r>
+              <a:rPr lang="zh-CN" dirty="0"/>
+              <a:t>· 故意把视图里的 context 删掉，看模板报什么错</a:t>
+            </a:r>
+          </a:p>
+          <a:p>
+            <a:r>
+              <a:rPr lang="zh-CN" dirty="0"/>
+              <a:t/>
+            </a:r>
+          </a:p>
+          <a:p>
+            <a:r>
+              <a:rPr lang="zh-CN" dirty="0"/>
+              <a:t>课后作业：</a:t>
+            </a:r>
+          </a:p>
+          <a:p>
+            <a:r>
+              <a:rPr lang="zh-CN" dirty="0"/>
+              <a:t>· ★ 产出：一张自己画的请求链路图</a:t>
+            </a:r>
+          </a:p>
+          <a:p>
+            <a:r>
+              <a:rPr lang="zh-CN" dirty="0"/>
+              <a:t/>
+            </a:r>
+          </a:p>
+          <a:p>
+            <a:r>
+              <a:rPr lang="zh-CN" dirty="0"/>
+              <a:t>节奏：讲 20 分钟 → 学员自己敲 40 分钟（不看答案）→ 对讲评自查 20 分钟 → 写作业 10 分钟。</a:t>
+            </a:r>
+          </a:p>
+        </p:txBody>
+      </p:sp>
+    </p:spTree>
+  </p:cSld>
+  <p:clrMapOvr>
+    <a:masterClrMapping/>
+  </p:clrMapOvr>
+</p:notes>
+</file>
+
+<file path=ppt/notesSlides/notesSlide7.xml><?xml version="1.0" encoding="utf-8"?>
+<p:notes xmlns:a="http://schemas.openxmlformats.org/drawingml/2006/main" xmlns:p="http://schemas.openxmlformats.org/presentationml/2006/main" xmlns:r="http://schemas.openxmlformats.org/officeDocument/2006/relationships">
+  <p:cSld>
+    <p:spTree>
+      <p:nvGrpSpPr>
+        <p:cNvPr id="1" name=""/>
+        <p:cNvGrpSpPr/>
+        <p:nvPr/>
+      </p:nvGrpSpPr>
+      <p:grpSpPr>
+        <a:xfrm>
+          <a:off x="0" y="0"/>
+          <a:ext cx="0" cy="0"/>
+          <a:chOff x="0" y="0"/>
+          <a:chExt cx="0" cy="0"/>
+        </a:xfrm>
+      </p:grpSpPr>
+      <p:sp>
+        <p:nvSpPr>
+          <p:cNvPr id="2" name="讲课提示"/>
+          <p:cNvSpPr txBox="1"/>
+          <p:nvPr/>
+        </p:nvSpPr>
+        <p:spPr>
+          <a:xfrm>
+            <a:off x="457200" y="457200"/>
+            <a:ext cx="6858000" cy="4800600"/>
+          </a:xfrm>
+          <a:prstGeom prst="rect">
+            <a:avLst/>
+          </a:prstGeom>
+        </p:spPr>
+        <p:txBody>
+          <a:bodyPr wrap="square"/>
+          <a:lstStyle/>
+          <a:p>
+            <a:r>
+              <a:rPr lang="zh-CN" dirty="0"/>
+              <a:t>第 94 节 · 核心知识点：★ 一次请求的旅程：URL → 视图 → 模板</a:t>
+            </a:r>
+          </a:p>
+          <a:p>
+            <a:r>
+              <a:rPr lang="zh-CN" dirty="0"/>
+              <a:t/>
+            </a:r>
+          </a:p>
+          <a:p>
+            <a:r>
+              <a:rPr lang="zh-CN" dirty="0"/>
+              <a:t>讲这一页时：先让学生说出上节课的结论，再逐块讲要点。</a:t>
+            </a:r>
+          </a:p>
+          <a:p>
+            <a:r>
+              <a:rPr lang="zh-CN" dirty="0"/>
+              <a:t>每讲完一块，问一句「这一步如果写错了，报错会长什么样？」——把错误提前讲。</a:t>
+            </a:r>
+          </a:p>
+          <a:p>
+            <a:r>
+              <a:rPr lang="zh-CN" dirty="0"/>
+              <a:t/>
+            </a:r>
+          </a:p>
+          <a:p>
+            <a:r>
+              <a:rPr lang="zh-CN" dirty="0"/>
+              <a:t>本节目标：能画完整请求链路图；会映射 URL、写视图、渲染模板</a:t>
+            </a:r>
+          </a:p>
+          <a:p>
+            <a:r>
+              <a:rPr lang="zh-CN" dirty="0"/>
+              <a:t/>
+            </a:r>
+          </a:p>
+          <a:p>
+            <a:r>
+              <a:rPr lang="zh-CN" dirty="0"/>
+              <a:t>看不到懂的地方，回讲义对应小节读一遍，再回来对着这页复述一次——能讲出来才算真懂。</a:t>
+            </a:r>
+          </a:p>
+        </p:txBody>
+      </p:sp>
+    </p:spTree>
+  </p:cSld>
+  <p:clrMapOvr>
+    <a:masterClrMapping/>
+  </p:clrMapOvr>
+</p:notes>
+</file>
+
+<file path=ppt/notesSlides/notesSlide8.xml><?xml version="1.0" encoding="utf-8"?>
+<p:notes xmlns:a="http://schemas.openxmlformats.org/drawingml/2006/main" xmlns:p="http://schemas.openxmlformats.org/presentationml/2006/main" xmlns:r="http://schemas.openxmlformats.org/officeDocument/2006/relationships">
+  <p:cSld>
+    <p:spTree>
+      <p:nvGrpSpPr>
+        <p:cNvPr id="1" name=""/>
+        <p:cNvGrpSpPr/>
+        <p:nvPr/>
+      </p:nvGrpSpPr>
+      <p:grpSpPr>
+        <a:xfrm>
+          <a:off x="0" y="0"/>
+          <a:ext cx="0" cy="0"/>
+          <a:chOff x="0" y="0"/>
+          <a:chExt cx="0" cy="0"/>
+        </a:xfrm>
+      </p:grpSpPr>
+      <p:sp>
+        <p:nvSpPr>
+          <p:cNvPr id="2" name="讲课提示"/>
+          <p:cNvSpPr txBox="1"/>
+          <p:nvPr/>
+        </p:nvSpPr>
+        <p:spPr>
+          <a:xfrm>
+            <a:off x="457200" y="457200"/>
+            <a:ext cx="6858000" cy="4800600"/>
+          </a:xfrm>
+          <a:prstGeom prst="rect">
+            <a:avLst/>
+          </a:prstGeom>
+        </p:spPr>
+        <p:txBody>
+          <a:bodyPr wrap="square"/>
+          <a:lstStyle/>
+          <a:p>
+            <a:r>
+              <a:rPr lang="zh-CN" dirty="0"/>
+              <a:t>第 95 节 · 模板语法与模板继承</a:t>
+            </a:r>
+          </a:p>
+          <a:p>
+            <a:r>
+              <a:rPr lang="zh-CN" dirty="0"/>
+              <a:t>单元 18 · Django 入门 · W24</a:t>
+            </a:r>
+          </a:p>
+          <a:p>
+            <a:r>
+              <a:rPr lang="zh-CN" dirty="0"/>
+              <a:t/>
+            </a:r>
+          </a:p>
+          <a:p>
+            <a:r>
+              <a:rPr lang="zh-CN" dirty="0"/>
+              <a:t>学习目标：会用 `{{ }}`、`{% for %}`、`{% url %}`；会用 base.html 做模板继承</a:t>
+            </a:r>
+          </a:p>
+          <a:p>
+            <a:r>
+              <a:rPr lang="zh-CN" dirty="0"/>
+              <a:t/>
+            </a:r>
+          </a:p>
+          <a:p>
+            <a:r>
+              <a:rPr lang="zh-CN" dirty="0"/>
+              <a:t>课堂实操（40 分钟，不看答案）：</a:t>
+            </a:r>
+          </a:p>
+          <a:p>
+            <a:r>
+              <a:rPr lang="zh-CN" dirty="0"/>
+              <a:t>· 把重复的导航栏抽进 base.html</a:t>
+            </a:r>
+          </a:p>
+          <a:p>
+            <a:r>
+              <a:rPr lang="zh-CN" dirty="0"/>
+              <a:t>· 故意写错 url 名字看 NoReverseMatch</a:t>
+            </a:r>
+          </a:p>
+          <a:p>
+            <a:r>
+              <a:rPr lang="zh-CN" dirty="0"/>
+              <a:t/>
+            </a:r>
+          </a:p>
+          <a:p>
+            <a:r>
+              <a:rPr lang="zh-CN" dirty="0"/>
+              <a:t>课后作业：</a:t>
+            </a:r>
+          </a:p>
+          <a:p>
+            <a:r>
+              <a:rPr lang="zh-CN" dirty="0"/>
+              <a:t>· 完成教材 18.4 全部动手练</a:t>
+            </a:r>
+          </a:p>
+          <a:p>
+            <a:r>
+              <a:rPr lang="zh-CN" dirty="0"/>
+              <a:t/>
+            </a:r>
+          </a:p>
+          <a:p>
+            <a:r>
+              <a:rPr lang="zh-CN" dirty="0"/>
+              <a:t>节奏：讲 20 分钟 → 学员自己敲 40 分钟（不看答案）→ 对讲评自查 20 分钟 → 写作业 10 分钟。</a:t>
+            </a:r>
+          </a:p>
+        </p:txBody>
+      </p:sp>
+    </p:spTree>
+  </p:cSld>
+  <p:clrMapOvr>
+    <a:masterClrMapping/>
+  </p:clrMapOvr>
+</p:notes>
+</file>
+
+<file path=ppt/notesSlides/notesSlide9.xml><?xml version="1.0" encoding="utf-8"?>
+<p:notes xmlns:a="http://schemas.openxmlformats.org/drawingml/2006/main" xmlns:p="http://schemas.openxmlformats.org/presentationml/2006/main" xmlns:r="http://schemas.openxmlformats.org/officeDocument/2006/relationships">
+  <p:cSld>
+    <p:spTree>
+      <p:nvGrpSpPr>
+        <p:cNvPr id="1" name=""/>
+        <p:cNvGrpSpPr/>
+        <p:nvPr/>
+      </p:nvGrpSpPr>
+      <p:grpSpPr>
+        <a:xfrm>
+          <a:off x="0" y="0"/>
+          <a:ext cx="0" cy="0"/>
+          <a:chOff x="0" y="0"/>
+          <a:chExt cx="0" cy="0"/>
+        </a:xfrm>
+      </p:grpSpPr>
+      <p:sp>
+        <p:nvSpPr>
+          <p:cNvPr id="2" name="讲课提示"/>
+          <p:cNvSpPr txBox="1"/>
+          <p:nvPr/>
+        </p:nvSpPr>
+        <p:spPr>
+          <a:xfrm>
+            <a:off x="457200" y="457200"/>
+            <a:ext cx="6858000" cy="4800600"/>
+          </a:xfrm>
+          <a:prstGeom prst="rect">
+            <a:avLst/>
+          </a:prstGeom>
+        </p:spPr>
+        <p:txBody>
+          <a:bodyPr wrap="square"/>
+          <a:lstStyle/>
+          <a:p>
+            <a:r>
+              <a:rPr lang="zh-CN" dirty="0"/>
+              <a:t>第 95 节 · 核心知识点：模板语法与模板继承</a:t>
+            </a:r>
+          </a:p>
+          <a:p>
+            <a:r>
+              <a:rPr lang="zh-CN" dirty="0"/>
+              <a:t/>
+            </a:r>
+          </a:p>
+          <a:p>
+            <a:r>
+              <a:rPr lang="zh-CN" dirty="0"/>
+              <a:t>讲这一页时：先让学生说出上节课的结论，再逐块讲要点。</a:t>
+            </a:r>
+          </a:p>
+          <a:p>
+            <a:r>
+              <a:rPr lang="zh-CN" dirty="0"/>
+              <a:t>每讲完一块，问一句「这一步如果写错了，报错会长什么样？」——把错误提前讲。</a:t>
+            </a:r>
+          </a:p>
+          <a:p>
+            <a:r>
+              <a:rPr lang="zh-CN" dirty="0"/>
+              <a:t/>
+            </a:r>
+          </a:p>
+          <a:p>
+            <a:r>
+              <a:rPr lang="zh-CN" dirty="0"/>
+              <a:t>本节目标：会用 `{{ }}`、`{% for %}`、`{% url %}`；会用 base.html 做模板继承</a:t>
+            </a:r>
+          </a:p>
+          <a:p>
+            <a:r>
+              <a:rPr lang="zh-CN" dirty="0"/>
+              <a:t/>
+            </a:r>
+          </a:p>
+          <a:p>
+            <a:r>
+              <a:rPr lang="zh-CN" dirty="0"/>
+              <a:t>看不到懂的地方，回讲义对应小节读一遍，再回来对着这页复述一次——能讲出来才算真懂。</a:t>
+            </a:r>
+          </a:p>
+        </p:txBody>
+      </p:sp>
+    </p:spTree>
+  </p:cSld>
+  <p:clrMapOvr>
+    <a:masterClrMapping/>
+  </p:clrMapOvr>
+</p:notes>
 </file>
 
 <file path=ppt/slideLayouts/slideLayout1.xml><?xml version="1.0" encoding="utf-8"?>
